--- a/proposal/pitchdeck_nickopus5.8.pptx
+++ b/proposal/pitchdeck_nickopus5.8.pptx
@@ -4,6 +4,9 @@
   <p:sldMasterIdLst>
     <p:sldMasterId id="2147483648" r:id="rId1"/>
   </p:sldMasterIdLst>
+  <p:notesMasterIdLst>
+    <p:notesMasterId r:id="rId16"/>
+  </p:notesMasterIdLst>
   <p:sldIdLst>
     <p:sldId id="256" r:id="rId2"/>
     <p:sldId id="257" r:id="rId3"/>
@@ -20,11 +23,8 @@
     <p:sldId id="268" r:id="rId14"/>
     <p:sldId id="269" r:id="rId15"/>
   </p:sldIdLst>
-  <p:notesMasterIdLst>
-    <p:notesMasterId r:id="rId16"/>
-  </p:notesMasterIdLst>
-  <p:sldSz cx="12191695" cy="6858000"/>
-  <p:notesSz cx="6858000" cy="12191695"/>
+  <p:sldSz cx="12192000" cy="6858000"/>
+  <p:notesSz cx="6858000" cy="12192000"/>
   <p:defaultTextStyle>
     <a:lvl1pPr marL="0" algn="l" defTabSz="914400" rtl="0" eaLnBrk="1" latinLnBrk="0" hangingPunct="1">
       <a:defRPr sz="1800" kern="1200">
@@ -117,13 +117,20 @@
       </a:defRPr>
     </a:lvl9pPr>
   </p:defaultTextStyle>
+  <p:extLst>
+    <p:ext uri="{EFAFB233-063F-42B5-8137-9DF3F51BA10A}">
+      <p15:sldGuideLst xmlns:p15="http://schemas.microsoft.com/office/powerpoint/2012/main"/>
+    </p:ext>
+  </p:extLst>
 </p:presentation>
 </file>
 
 <file path=ppt/charts/chart1.xml><?xml version="1.0" encoding="utf-8"?>
-<c:chartSpace xmlns:c="http://schemas.openxmlformats.org/drawingml/2006/chart" xmlns:a="http://schemas.openxmlformats.org/drawingml/2006/main" xmlns:r="http://schemas.openxmlformats.org/officeDocument/2006/relationships">
+<c:chartSpace xmlns:c="http://schemas.openxmlformats.org/drawingml/2006/chart" xmlns:a="http://schemas.openxmlformats.org/drawingml/2006/main" xmlns:r="http://schemas.openxmlformats.org/officeDocument/2006/relationships" xmlns:c16r2="http://schemas.microsoft.com/office/drawing/2015/06/chart">
   <c:date1904 val="0"/>
+  <c:lang val="en-US"/>
   <c:roundedCorners val="1"/>
+  <c:style val="2"/>
   <c:chart>
     <c:autoTitleDeleted val="1"/>
     <c:plotArea>
@@ -155,18 +162,26 @@
           <c:invertIfNegative val="0"/>
           <c:dLbls>
             <c:numFmt formatCode="#,##0" sourceLinked="0"/>
+            <c:spPr>
+              <a:noFill/>
+              <a:ln>
+                <a:noFill/>
+              </a:ln>
+              <a:effectLst/>
+            </c:spPr>
             <c:txPr>
               <a:bodyPr/>
               <a:lstStyle/>
               <a:p>
                 <a:pPr>
-                  <a:defRPr b="1" i="0" strike="noStrike" sz="1100" u="none">
+                  <a:defRPr sz="1100" b="1" i="0" u="none" strike="noStrike">
                     <a:solidFill>
                       <a:srgbClr val="1E293B"/>
                     </a:solidFill>
                     <a:latin typeface="Arial"/>
                   </a:defRPr>
                 </a:pPr>
+                <a:endParaRPr lang="en-US"/>
               </a:p>
             </c:txPr>
             <c:showLegendKey val="0"/>
@@ -176,25 +191,28 @@
             <c:showPercent val="0"/>
             <c:showBubbleSize val="0"/>
             <c:showLeaderLines val="0"/>
+            <c:extLst>
+              <c:ext xmlns:c15="http://schemas.microsoft.com/office/drawing/2012/chart" uri="{CE6537A1-D6FC-4f65-9D91-7224C49458BB}">
+                <c15:showLeaderLines val="0"/>
+              </c:ext>
+            </c:extLst>
           </c:dLbls>
           <c:cat>
-            <c:multiLvlStrRef>
+            <c:strRef>
               <c:f>Sheet1!$A$2:$A$4</c:f>
-              <c:multiLvlStrCache>
+              <c:strCache>
                 <c:ptCount val="3"/>
-                <c:lvl>
-                  <c:pt idx="0">
-                    <c:v>Year 1</c:v>
-                  </c:pt>
-                  <c:pt idx="1">
-                    <c:v>Year 2</c:v>
-                  </c:pt>
-                  <c:pt idx="2">
-                    <c:v>Year 3</c:v>
-                  </c:pt>
-                </c:lvl>
-              </c:multiLvlStrCache>
-            </c:multiLvlStrRef>
+                <c:pt idx="0">
+                  <c:v>Year 1</c:v>
+                </c:pt>
+                <c:pt idx="1">
+                  <c:v>Year 2</c:v>
+                </c:pt>
+                <c:pt idx="2">
+                  <c:v>Year 3</c:v>
+                </c:pt>
+              </c:strCache>
+            </c:strRef>
           </c:cat>
           <c:val>
             <c:numRef>
@@ -214,36 +232,23 @@
               </c:numCache>
             </c:numRef>
           </c:val>
+          <c:extLst>
+            <c:ext xmlns:c16="http://schemas.microsoft.com/office/drawing/2014/chart" uri="{C3380CC4-5D6E-409C-BE32-E72D297353CC}">
+              <c16:uniqueId val="{00000000-5741-4FF6-8E38-F87C898A457A}"/>
+            </c:ext>
+          </c:extLst>
         </c:ser>
         <c:dLbls>
-          <c:numFmt formatCode="#,##0" sourceLinked="0"/>
-          <c:txPr>
-            <a:bodyPr/>
-            <a:lstStyle/>
-            <a:p>
-              <a:pPr>
-                <a:defRPr b="1" i="0" strike="noStrike" sz="1100" u="none">
-                  <a:solidFill>
-                    <a:srgbClr val="1E293B"/>
-                  </a:solidFill>
-                  <a:latin typeface="Arial"/>
-                </a:defRPr>
-              </a:pPr>
-            </a:p>
-          </c:txPr>
           <c:showLegendKey val="0"/>
           <c:showVal val="1"/>
           <c:showCatName val="0"/>
           <c:showSerName val="0"/>
           <c:showPercent val="0"/>
           <c:showBubbleSize val="0"/>
-          <c:showLeaderLines val="0"/>
         </c:dLbls>
         <c:gapWidth val="60"/>
-        <c:overlap val="0"/>
         <c:axId val="2094734554"/>
         <c:axId val="2094734552"/>
-        <c:axId val="2094734556"/>
       </c:barChart>
       <c:catAx>
         <c:axId val="2094734554"/>
@@ -284,6 +289,7 @@
         <c:crosses val="autoZero"/>
         <c:auto val="1"/>
         <c:lblAlgn val="ctr"/>
+        <c:lblOffset val="100"/>
         <c:noMultiLvlLbl val="1"/>
       </c:catAx>
       <c:valAx>
@@ -346,6 +352,7 @@
     </c:plotArea>
     <c:plotVisOnly val="1"/>
     <c:dispBlanksAs val="span"/>
+    <c:showDLblsOverMax val="1"/>
   </c:chart>
   <c:spPr>
     <a:solidFill>
@@ -363,9 +370,11 @@
 </file>
 
 <file path=ppt/charts/chart2.xml><?xml version="1.0" encoding="utf-8"?>
-<c:chartSpace xmlns:c="http://schemas.openxmlformats.org/drawingml/2006/chart" xmlns:a="http://schemas.openxmlformats.org/drawingml/2006/main" xmlns:r="http://schemas.openxmlformats.org/officeDocument/2006/relationships">
+<c:chartSpace xmlns:c="http://schemas.openxmlformats.org/drawingml/2006/chart" xmlns:a="http://schemas.openxmlformats.org/drawingml/2006/main" xmlns:r="http://schemas.openxmlformats.org/officeDocument/2006/relationships" xmlns:c16r2="http://schemas.microsoft.com/office/drawing/2015/06/chart">
   <c:date1904 val="0"/>
+  <c:lang val="en-US"/>
   <c:roundedCorners val="1"/>
+  <c:style val="2"/>
   <c:chart>
     <c:autoTitleDeleted val="1"/>
     <c:plotArea>
@@ -408,6 +417,11 @@
               </a:solidFill>
               <a:effectLst/>
             </c:spPr>
+            <c:extLst>
+              <c:ext xmlns:c16="http://schemas.microsoft.com/office/drawing/2014/chart" uri="{C3380CC4-5D6E-409C-BE32-E72D297353CC}">
+                <c16:uniqueId val="{00000001-C57F-434C-B335-B1E9E05D1660}"/>
+              </c:ext>
+            </c:extLst>
           </c:dPt>
           <c:dPt>
             <c:idx val="1"/>
@@ -418,6 +432,11 @@
               </a:solidFill>
               <a:effectLst/>
             </c:spPr>
+            <c:extLst>
+              <c:ext xmlns:c16="http://schemas.microsoft.com/office/drawing/2014/chart" uri="{C3380CC4-5D6E-409C-BE32-E72D297353CC}">
+                <c16:uniqueId val="{00000003-C57F-434C-B335-B1E9E05D1660}"/>
+              </c:ext>
+            </c:extLst>
           </c:dPt>
           <c:dPt>
             <c:idx val="2"/>
@@ -428,6 +447,11 @@
               </a:solidFill>
               <a:effectLst/>
             </c:spPr>
+            <c:extLst>
+              <c:ext xmlns:c16="http://schemas.microsoft.com/office/drawing/2014/chart" uri="{C3380CC4-5D6E-409C-BE32-E72D297353CC}">
+                <c16:uniqueId val="{00000005-C57F-434C-B335-B1E9E05D1660}"/>
+              </c:ext>
+            </c:extLst>
           </c:dPt>
           <c:dPt>
             <c:idx val="3"/>
@@ -438,6 +462,11 @@
               </a:solidFill>
               <a:effectLst/>
             </c:spPr>
+            <c:extLst>
+              <c:ext xmlns:c16="http://schemas.microsoft.com/office/drawing/2014/chart" uri="{C3380CC4-5D6E-409C-BE32-E72D297353CC}">
+                <c16:uniqueId val="{00000007-C57F-434C-B335-B1E9E05D1660}"/>
+              </c:ext>
+            </c:extLst>
           </c:dPt>
           <c:dPt>
             <c:idx val="4"/>
@@ -448,156 +477,12 @@
               </a:solidFill>
               <a:effectLst/>
             </c:spPr>
+            <c:extLst>
+              <c:ext xmlns:c16="http://schemas.microsoft.com/office/drawing/2014/chart" uri="{C3380CC4-5D6E-409C-BE32-E72D297353CC}">
+                <c16:uniqueId val="{00000009-C57F-434C-B335-B1E9E05D1660}"/>
+              </c:ext>
+            </c:extLst>
           </c:dPt>
-          <c:dLbls>
-            <c:dLbl>
-              <c:idx val="0"/>
-              <c:numFmt formatCode="General" sourceLinked="0"/>
-              <c:spPr/>
-              <c:txPr>
-                <a:bodyPr/>
-                <a:lstStyle/>
-                <a:p>
-                  <a:pPr>
-                    <a:defRPr sz="1200" b="0" i="0" u="none" strike="noStrike">
-                      <a:solidFill>
-                        <a:srgbClr val="FFFFFF"/>
-                      </a:solidFill>
-                      <a:latin typeface="Arial"/>
-                    </a:defRPr>
-                  </a:pPr>
-                </a:p>
-              </c:txPr>
-              <c:showLegendKey val="0"/>
-              <c:showVal val="0"/>
-              <c:showCatName val="0"/>
-              <c:showSerName val="0"/>
-              <c:showPercent val="0"/>
-              <c:showBubbleSize val="0"/>
-            </c:dLbl>
-            <c:dLbl>
-              <c:idx val="1"/>
-              <c:numFmt formatCode="General" sourceLinked="0"/>
-              <c:spPr/>
-              <c:txPr>
-                <a:bodyPr/>
-                <a:lstStyle/>
-                <a:p>
-                  <a:pPr>
-                    <a:defRPr sz="1200" b="0" i="0" u="none" strike="noStrike">
-                      <a:solidFill>
-                        <a:srgbClr val="FFFFFF"/>
-                      </a:solidFill>
-                      <a:latin typeface="Arial"/>
-                    </a:defRPr>
-                  </a:pPr>
-                </a:p>
-              </c:txPr>
-              <c:showLegendKey val="0"/>
-              <c:showVal val="0"/>
-              <c:showCatName val="0"/>
-              <c:showSerName val="0"/>
-              <c:showPercent val="0"/>
-              <c:showBubbleSize val="0"/>
-            </c:dLbl>
-            <c:dLbl>
-              <c:idx val="2"/>
-              <c:numFmt formatCode="General" sourceLinked="0"/>
-              <c:spPr/>
-              <c:txPr>
-                <a:bodyPr/>
-                <a:lstStyle/>
-                <a:p>
-                  <a:pPr>
-                    <a:defRPr sz="1200" b="0" i="0" u="none" strike="noStrike">
-                      <a:solidFill>
-                        <a:srgbClr val="FFFFFF"/>
-                      </a:solidFill>
-                      <a:latin typeface="Arial"/>
-                    </a:defRPr>
-                  </a:pPr>
-                </a:p>
-              </c:txPr>
-              <c:showLegendKey val="0"/>
-              <c:showVal val="0"/>
-              <c:showCatName val="0"/>
-              <c:showSerName val="0"/>
-              <c:showPercent val="0"/>
-              <c:showBubbleSize val="0"/>
-            </c:dLbl>
-            <c:dLbl>
-              <c:idx val="3"/>
-              <c:numFmt formatCode="General" sourceLinked="0"/>
-              <c:spPr/>
-              <c:txPr>
-                <a:bodyPr/>
-                <a:lstStyle/>
-                <a:p>
-                  <a:pPr>
-                    <a:defRPr sz="1200" b="0" i="0" u="none" strike="noStrike">
-                      <a:solidFill>
-                        <a:srgbClr val="FFFFFF"/>
-                      </a:solidFill>
-                      <a:latin typeface="Arial"/>
-                    </a:defRPr>
-                  </a:pPr>
-                </a:p>
-              </c:txPr>
-              <c:showLegendKey val="0"/>
-              <c:showVal val="0"/>
-              <c:showCatName val="0"/>
-              <c:showSerName val="0"/>
-              <c:showPercent val="0"/>
-              <c:showBubbleSize val="0"/>
-            </c:dLbl>
-            <c:dLbl>
-              <c:idx val="4"/>
-              <c:numFmt formatCode="General" sourceLinked="0"/>
-              <c:spPr/>
-              <c:txPr>
-                <a:bodyPr/>
-                <a:lstStyle/>
-                <a:p>
-                  <a:pPr>
-                    <a:defRPr sz="1200" b="0" i="0" u="none" strike="noStrike">
-                      <a:solidFill>
-                        <a:srgbClr val="FFFFFF"/>
-                      </a:solidFill>
-                      <a:latin typeface="Arial"/>
-                    </a:defRPr>
-                  </a:pPr>
-                </a:p>
-              </c:txPr>
-              <c:showLegendKey val="0"/>
-              <c:showVal val="0"/>
-              <c:showCatName val="0"/>
-              <c:showSerName val="0"/>
-              <c:showPercent val="0"/>
-              <c:showBubbleSize val="0"/>
-            </c:dLbl>
-            <c:numFmt formatCode="General" sourceLinked="0"/>
-            <c:txPr>
-              <a:bodyPr/>
-              <a:lstStyle/>
-              <a:p>
-                <a:pPr>
-                  <a:defRPr sz="1800" b="0" i="0" u="none" strike="noStrike">
-                    <a:solidFill>
-                      <a:srgbClr val="000000"/>
-                    </a:solidFill>
-                    <a:latin typeface="Arial"/>
-                  </a:defRPr>
-                </a:pPr>
-              </a:p>
-            </c:txPr>
-            <c:showLegendKey val="0"/>
-            <c:showVal val="0"/>
-            <c:showCatName val="1"/>
-            <c:showSerName val="0"/>
-            <c:showPercent val="1"/>
-            <c:showBubbleSize val="0"/>
-            <c:showLeaderLines val="0"/>
-          </c:dLbls>
           <c:cat>
             <c:strRef>
               <c:f>Sheet1!$A$2:$A$6</c:f>
@@ -625,6 +510,7 @@
             <c:numRef>
               <c:f>Sheet1!$B$2:$B$6</c:f>
               <c:numCache>
+                <c:formatCode>General</c:formatCode>
                 <c:ptCount val="5"/>
                 <c:pt idx="0">
                   <c:v>40</c:v>
@@ -644,7 +530,21 @@
               </c:numCache>
             </c:numRef>
           </c:val>
+          <c:extLst>
+            <c:ext xmlns:c16="http://schemas.microsoft.com/office/drawing/2014/chart" uri="{C3380CC4-5D6E-409C-BE32-E72D297353CC}">
+              <c16:uniqueId val="{0000000A-C57F-434C-B335-B1E9E05D1660}"/>
+            </c:ext>
+          </c:extLst>
         </c:ser>
+        <c:dLbls>
+          <c:showLegendKey val="0"/>
+          <c:showVal val="0"/>
+          <c:showCatName val="0"/>
+          <c:showSerName val="0"/>
+          <c:showPercent val="0"/>
+          <c:showBubbleSize val="0"/>
+          <c:showLeaderLines val="0"/>
+        </c:dLbls>
         <c:firstSliceAng val="0"/>
         <c:holeSize val="58"/>
       </c:doughnutChart>
@@ -658,6 +558,7 @@
     </c:plotArea>
     <c:plotVisOnly val="1"/>
     <c:dispBlanksAs val="span"/>
+    <c:showDLblsOverMax val="1"/>
   </c:chart>
   <c:spPr>
     <a:solidFill>
@@ -696,234 +597,10 @@
           <a:chExt cx="0" cy="0"/>
         </a:xfrm>
       </p:grpSpPr>
-      <p:sp>
-        <p:nvSpPr>
-          <p:cNvPr id="2" name="Header Placeholder 1"/>
-          <p:cNvSpPr>
-            <a:spLocks noGrp="1"/>
-          </p:cNvSpPr>
-          <p:nvPr>
-            <p:ph type="hdr" sz="quarter"/>
-          </p:nvPr>
-        </p:nvSpPr>
-        <p:spPr>
-          <a:xfrm>
-            <a:off x="0" y="0"/>
-            <a:ext cx="2971800" cy="458788"/>
-          </a:xfrm>
-          <a:prstGeom prst="rect">
-            <a:avLst/>
-          </a:prstGeom>
-        </p:spPr>
-        <p:txBody>
-          <a:bodyPr vert="horz" lIns="91440" tIns="45720" rIns="91440" bIns="45720" rtlCol="0"/>
-          <a:lstStyle>
-            <a:lvl1pPr algn="l">
-              <a:defRPr sz="1200"/>
-            </a:lvl1pPr>
-          </a:lstStyle>
-          <a:p>
-            <a:endParaRPr lang="en-US"/>
-          </a:p>
-        </p:txBody>
-      </p:sp>
-      <p:sp>
-        <p:nvSpPr>
-          <p:cNvPr id="3" name="Date Placeholder 2"/>
-          <p:cNvSpPr>
-            <a:spLocks noGrp="1"/>
-          </p:cNvSpPr>
-          <p:nvPr>
-            <p:ph type="dt" idx="1"/>
-          </p:nvPr>
-        </p:nvSpPr>
-        <p:spPr>
-          <a:xfrm>
-            <a:off x="3884613" y="0"/>
-            <a:ext cx="2971800" cy="458788"/>
-          </a:xfrm>
-          <a:prstGeom prst="rect">
-            <a:avLst/>
-          </a:prstGeom>
-        </p:spPr>
-        <p:txBody>
-          <a:bodyPr vert="horz" lIns="91440" tIns="45720" rIns="91440" bIns="45720" rtlCol="0"/>
-          <a:lstStyle>
-            <a:lvl1pPr algn="r">
-              <a:defRPr sz="1200"/>
-            </a:lvl1pPr>
-          </a:lstStyle>
-          <a:p>
-            <a:fld id="{5282F153-3F37-0F45-9E97-73ACFA13230C}" type="datetimeFigureOut">
-              <a:rPr lang="en-US"/>
-              <a:t>7/23/19</a:t>
-            </a:fld>
-            <a:endParaRPr lang="en-US"/>
-          </a:p>
-        </p:txBody>
-      </p:sp>
-      <p:sp>
-        <p:nvSpPr>
-          <p:cNvPr id="4" name="Slide Image Placeholder 3"/>
-          <p:cNvSpPr>
-            <a:spLocks noGrp="1" noRot="1" noChangeAspect="1"/>
-          </p:cNvSpPr>
-          <p:nvPr>
-            <p:ph type="sldImg" idx="2"/>
-          </p:nvPr>
-        </p:nvSpPr>
-        <p:spPr>
-          <a:xfrm>
-            <a:off x="685800" y="1143000"/>
-            <a:ext cx="5486400" cy="3086100"/>
-          </a:xfrm>
-          <a:prstGeom prst="rect">
-            <a:avLst/>
-          </a:prstGeom>
-          <a:noFill/>
-          <a:ln w="12700">
-            <a:solidFill>
-              <a:prstClr val="black"/>
-            </a:solidFill>
-          </a:ln>
-        </p:spPr>
-        <p:txBody>
-          <a:bodyPr vert="horz" lIns="91440" tIns="45720" rIns="91440" bIns="45720" rtlCol="0" anchor="ctr"/>
-          <a:lstStyle/>
-          <a:p>
-            <a:endParaRPr lang="en-US"/>
-          </a:p>
-        </p:txBody>
-      </p:sp>
-      <p:sp>
-        <p:nvSpPr>
-          <p:cNvPr id="5" name="Notes Placeholder 4"/>
-          <p:cNvSpPr>
-            <a:spLocks noGrp="1"/>
-          </p:cNvSpPr>
-          <p:nvPr>
-            <p:ph type="body" sz="quarter" idx="3"/>
-          </p:nvPr>
-        </p:nvSpPr>
-        <p:spPr>
-          <a:xfrm>
-            <a:off x="685800" y="4400550"/>
-            <a:ext cx="5486400" cy="3600450"/>
-          </a:xfrm>
-          <a:prstGeom prst="rect">
-            <a:avLst/>
-          </a:prstGeom>
-        </p:spPr>
-        <p:txBody>
-          <a:bodyPr vert="horz" lIns="91440" tIns="45720" rIns="91440" bIns="45720" rtlCol="0"/>
-          <a:lstStyle/>
-          <a:p>
-            <a:pPr lvl="0"/>
-            <a:r>
-              <a:rPr lang="en-US"/>
-              <a:t>Click to edit Master text styles</a:t>
-            </a:r>
-          </a:p>
-          <a:p>
-            <a:pPr lvl="1"/>
-            <a:r>
-              <a:rPr lang="en-US"/>
-              <a:t>Second level</a:t>
-            </a:r>
-          </a:p>
-          <a:p>
-            <a:pPr lvl="2"/>
-            <a:r>
-              <a:rPr lang="en-US"/>
-              <a:t>Third level</a:t>
-            </a:r>
-          </a:p>
-          <a:p>
-            <a:pPr lvl="3"/>
-            <a:r>
-              <a:rPr lang="en-US"/>
-              <a:t>Fourth level</a:t>
-            </a:r>
-          </a:p>
-          <a:p>
-            <a:pPr lvl="4"/>
-            <a:r>
-              <a:rPr lang="en-US"/>
-              <a:t>Fifth level</a:t>
-            </a:r>
-          </a:p>
-        </p:txBody>
-      </p:sp>
-      <p:sp>
-        <p:nvSpPr>
-          <p:cNvPr id="6" name="Footer Placeholder 5"/>
-          <p:cNvSpPr>
-            <a:spLocks noGrp="1"/>
-          </p:cNvSpPr>
-          <p:nvPr>
-            <p:ph type="ftr" sz="quarter" idx="4"/>
-          </p:nvPr>
-        </p:nvSpPr>
-        <p:spPr>
-          <a:xfrm>
-            <a:off x="0" y="8685213"/>
-            <a:ext cx="2971800" cy="458787"/>
-          </a:xfrm>
-          <a:prstGeom prst="rect">
-            <a:avLst/>
-          </a:prstGeom>
-        </p:spPr>
-        <p:txBody>
-          <a:bodyPr vert="horz" lIns="91440" tIns="45720" rIns="91440" bIns="45720" rtlCol="0" anchor="b"/>
-          <a:lstStyle>
-            <a:lvl1pPr algn="l">
-              <a:defRPr sz="1200"/>
-            </a:lvl1pPr>
-          </a:lstStyle>
-          <a:p>
-            <a:endParaRPr lang="en-US"/>
-          </a:p>
-        </p:txBody>
-      </p:sp>
-      <p:sp>
-        <p:nvSpPr>
-          <p:cNvPr id="7" name="Slide Number Placeholder 6"/>
-          <p:cNvSpPr>
-            <a:spLocks noGrp="1"/>
-          </p:cNvSpPr>
-          <p:nvPr>
-            <p:ph type="sldNum" sz="quarter" idx="5"/>
-          </p:nvPr>
-        </p:nvSpPr>
-        <p:spPr>
-          <a:xfrm>
-            <a:off x="3884613" y="8685213"/>
-            <a:ext cx="2971800" cy="458787"/>
-          </a:xfrm>
-          <a:prstGeom prst="rect">
-            <a:avLst/>
-          </a:prstGeom>
-        </p:spPr>
-        <p:txBody>
-          <a:bodyPr vert="horz" lIns="91440" tIns="45720" rIns="91440" bIns="45720" rtlCol="0" anchor="b"/>
-          <a:lstStyle>
-            <a:lvl1pPr algn="r">
-              <a:defRPr sz="1200"/>
-            </a:lvl1pPr>
-          </a:lstStyle>
-          <a:p>
-            <a:fld id="{CE5E9CC1-C706-0F49-92D6-E571CC5EEA8F}" type="slidenum">
-              <a:rPr lang="en-US"/>
-              <a:t>‹#›</a:t>
-            </a:fld>
-            <a:endParaRPr lang="en-US"/>
-          </a:p>
-        </p:txBody>
-      </p:sp>
     </p:spTree>
     <p:extLst>
       <p:ext uri="{BB962C8B-B14F-4D97-AF65-F5344CB8AC3E}">
-        <p14:creationId xmlns:p14="http://schemas.microsoft.com/office/powerpoint/2010/main" val="1024086991"/>
+        <p14:creationId xmlns:p14="http://schemas.microsoft.com/office/powerpoint/2010/main" val="3667605892"/>
       </p:ext>
     </p:extLst>
   </p:cSld>
@@ -1067,10 +744,6 @@
           <a:bodyPr/>
           <a:lstStyle/>
           <a:p>
-            <a:r>
-              <a:rPr lang="en-US" dirty="0"/>
-              <a:t/>
-            </a:r>
             <a:endParaRPr lang="en-US" dirty="0"/>
           </a:p>
         </p:txBody>
@@ -1155,10 +828,6 @@
           <a:bodyPr/>
           <a:lstStyle/>
           <a:p>
-            <a:r>
-              <a:rPr lang="en-US" dirty="0"/>
-              <a:t/>
-            </a:r>
             <a:endParaRPr lang="en-US" dirty="0"/>
           </a:p>
         </p:txBody>
@@ -1243,10 +912,6 @@
           <a:bodyPr/>
           <a:lstStyle/>
           <a:p>
-            <a:r>
-              <a:rPr lang="en-US" dirty="0"/>
-              <a:t/>
-            </a:r>
             <a:endParaRPr lang="en-US" dirty="0"/>
           </a:p>
         </p:txBody>
@@ -1331,10 +996,6 @@
           <a:bodyPr/>
           <a:lstStyle/>
           <a:p>
-            <a:r>
-              <a:rPr lang="en-US" dirty="0"/>
-              <a:t/>
-            </a:r>
             <a:endParaRPr lang="en-US" dirty="0"/>
           </a:p>
         </p:txBody>
@@ -1419,10 +1080,6 @@
           <a:bodyPr/>
           <a:lstStyle/>
           <a:p>
-            <a:r>
-              <a:rPr lang="en-US" dirty="0"/>
-              <a:t/>
-            </a:r>
             <a:endParaRPr lang="en-US" dirty="0"/>
           </a:p>
         </p:txBody>
@@ -1507,10 +1164,6 @@
           <a:bodyPr/>
           <a:lstStyle/>
           <a:p>
-            <a:r>
-              <a:rPr lang="en-US" dirty="0"/>
-              <a:t/>
-            </a:r>
             <a:endParaRPr lang="en-US" dirty="0"/>
           </a:p>
         </p:txBody>
@@ -1595,10 +1248,6 @@
           <a:bodyPr/>
           <a:lstStyle/>
           <a:p>
-            <a:r>
-              <a:rPr lang="en-US" dirty="0"/>
-              <a:t/>
-            </a:r>
             <a:endParaRPr lang="en-US" dirty="0"/>
           </a:p>
         </p:txBody>
@@ -1683,10 +1332,6 @@
           <a:bodyPr/>
           <a:lstStyle/>
           <a:p>
-            <a:r>
-              <a:rPr lang="en-US" dirty="0"/>
-              <a:t/>
-            </a:r>
             <a:endParaRPr lang="en-US" dirty="0"/>
           </a:p>
         </p:txBody>
@@ -1771,10 +1416,6 @@
           <a:bodyPr/>
           <a:lstStyle/>
           <a:p>
-            <a:r>
-              <a:rPr lang="en-US" dirty="0"/>
-              <a:t/>
-            </a:r>
             <a:endParaRPr lang="en-US" dirty="0"/>
           </a:p>
         </p:txBody>
@@ -1859,10 +1500,6 @@
           <a:bodyPr/>
           <a:lstStyle/>
           <a:p>
-            <a:r>
-              <a:rPr lang="en-US" dirty="0"/>
-              <a:t/>
-            </a:r>
             <a:endParaRPr lang="en-US" dirty="0"/>
           </a:p>
         </p:txBody>
@@ -1947,10 +1584,6 @@
           <a:bodyPr/>
           <a:lstStyle/>
           <a:p>
-            <a:r>
-              <a:rPr lang="en-US" dirty="0"/>
-              <a:t/>
-            </a:r>
             <a:endParaRPr lang="en-US" dirty="0"/>
           </a:p>
         </p:txBody>
@@ -2035,10 +1668,6 @@
           <a:bodyPr/>
           <a:lstStyle/>
           <a:p>
-            <a:r>
-              <a:rPr lang="en-US" dirty="0"/>
-              <a:t/>
-            </a:r>
             <a:endParaRPr lang="en-US" dirty="0"/>
           </a:p>
         </p:txBody>
@@ -2123,10 +1752,6 @@
           <a:bodyPr/>
           <a:lstStyle/>
           <a:p>
-            <a:r>
-              <a:rPr lang="en-US" dirty="0"/>
-              <a:t/>
-            </a:r>
             <a:endParaRPr lang="en-US" dirty="0"/>
           </a:p>
         </p:txBody>
@@ -2211,10 +1836,6 @@
           <a:bodyPr/>
           <a:lstStyle/>
           <a:p>
-            <a:r>
-              <a:rPr lang="en-US" dirty="0"/>
-              <a:t/>
-            </a:r>
             <a:endParaRPr lang="en-US" dirty="0"/>
           </a:p>
         </p:txBody>
@@ -2288,6 +1909,11 @@
 <file path=ppt/slideMasters/slideMaster1.xml><?xml version="1.0" encoding="utf-8"?>
 <p:sldMaster xmlns:a="http://schemas.openxmlformats.org/drawingml/2006/main" xmlns:r="http://schemas.openxmlformats.org/officeDocument/2006/relationships" xmlns:p="http://schemas.openxmlformats.org/presentationml/2006/main">
   <p:cSld>
+    <p:bg>
+      <p:bgRef idx="1001">
+        <a:schemeClr val="bg1"/>
+      </p:bgRef>
+    </p:bg>
     <p:spTree>
       <p:nvGrpSpPr>
         <p:cNvPr id="1" name=""/>
@@ -2570,6 +2196,7 @@
         <a:solidFill>
           <a:srgbClr val="0B1B3A"/>
         </a:solidFill>
+        <a:effectLst/>
       </p:bgPr>
     </p:bg>
     <p:spTree>
@@ -2605,6 +2232,13 @@
           </a:solidFill>
           <a:ln/>
         </p:spPr>
+        <p:txBody>
+          <a:bodyPr/>
+          <a:lstStyle/>
+          <a:p>
+            <a:endParaRPr lang="en-US"/>
+          </a:p>
+        </p:txBody>
       </p:sp>
       <p:sp>
         <p:nvSpPr>
@@ -2628,6 +2262,13 @@
             <a:prstDash val="solid"/>
           </a:ln>
         </p:spPr>
+        <p:txBody>
+          <a:bodyPr/>
+          <a:lstStyle/>
+          <a:p>
+            <a:endParaRPr lang="en-US"/>
+          </a:p>
+        </p:txBody>
       </p:sp>
       <p:sp>
         <p:nvSpPr>
@@ -2651,6 +2292,13 @@
             <a:prstDash val="solid"/>
           </a:ln>
         </p:spPr>
+        <p:txBody>
+          <a:bodyPr/>
+          <a:lstStyle/>
+          <a:p>
+            <a:endParaRPr lang="en-US"/>
+          </a:p>
+        </p:txBody>
       </p:sp>
       <p:sp>
         <p:nvSpPr>
@@ -2674,6 +2322,13 @@
             <a:prstDash val="solid"/>
           </a:ln>
         </p:spPr>
+        <p:txBody>
+          <a:bodyPr/>
+          <a:lstStyle/>
+          <a:p>
+            <a:endParaRPr lang="en-US"/>
+          </a:p>
+        </p:txBody>
       </p:sp>
       <p:sp>
         <p:nvSpPr>
@@ -2697,6 +2352,13 @@
             <a:prstDash val="solid"/>
           </a:ln>
         </p:spPr>
+        <p:txBody>
+          <a:bodyPr/>
+          <a:lstStyle/>
+          <a:p>
+            <a:endParaRPr lang="en-US"/>
+          </a:p>
+        </p:txBody>
       </p:sp>
       <p:sp>
         <p:nvSpPr>
@@ -2720,6 +2382,13 @@
             <a:prstDash val="solid"/>
           </a:ln>
         </p:spPr>
+        <p:txBody>
+          <a:bodyPr/>
+          <a:lstStyle/>
+          <a:p>
+            <a:endParaRPr lang="en-US"/>
+          </a:p>
+        </p:txBody>
       </p:sp>
       <p:sp>
         <p:nvSpPr>
@@ -2743,6 +2412,13 @@
             <a:prstDash val="solid"/>
           </a:ln>
         </p:spPr>
+        <p:txBody>
+          <a:bodyPr/>
+          <a:lstStyle/>
+          <a:p>
+            <a:endParaRPr lang="en-US"/>
+          </a:p>
+        </p:txBody>
       </p:sp>
       <p:sp>
         <p:nvSpPr>
@@ -2766,6 +2442,13 @@
             <a:prstDash val="solid"/>
           </a:ln>
         </p:spPr>
+        <p:txBody>
+          <a:bodyPr/>
+          <a:lstStyle/>
+          <a:p>
+            <a:endParaRPr lang="en-US"/>
+          </a:p>
+        </p:txBody>
       </p:sp>
       <p:sp>
         <p:nvSpPr>
@@ -2788,11 +2471,11 @@
           <a:bodyPr wrap="square" lIns="0" tIns="0" rIns="0" bIns="0" rtlCol="0" anchor="ctr"/>
           <a:lstStyle/>
           <a:p>
-            <a:pPr algn="l" indent="0" marL="0">
-              <a:buNone/>
-            </a:pPr>
-            <a:r>
-              <a:rPr lang="en-US" sz="7600" b="1" spc="200" kern="0" dirty="0">
+            <a:pPr marL="0" indent="0" algn="l">
+              <a:buNone/>
+            </a:pPr>
+            <a:r>
+              <a:rPr lang="en-US" sz="7600" b="1" kern="0" spc="200" dirty="0" err="1">
                 <a:solidFill>
                   <a:srgbClr val="FFFFFF"/>
                 </a:solidFill>
@@ -2800,7 +2483,7 @@
                 <a:ea typeface="Georgia" pitchFamily="34" charset="-122"/>
                 <a:cs typeface="Georgia" pitchFamily="34" charset="-120"/>
               </a:rPr>
-              <a:t>TRANSAKT</a:t>
+              <a:t>BlockMed</a:t>
             </a:r>
             <a:endParaRPr lang="en-US" sz="7600" dirty="0"/>
           </a:p>
@@ -2827,7 +2510,7 @@
           <a:bodyPr wrap="square" lIns="0" tIns="0" rIns="0" bIns="0" rtlCol="0" anchor="ctr"/>
           <a:lstStyle/>
           <a:p>
-            <a:pPr algn="l" indent="0" marL="0">
+            <a:pPr marL="0" indent="0" algn="l">
               <a:buNone/>
             </a:pPr>
             <a:r>
@@ -2867,6 +2550,13 @@
             <a:prstDash val="solid"/>
           </a:ln>
         </p:spPr>
+        <p:txBody>
+          <a:bodyPr/>
+          <a:lstStyle/>
+          <a:p>
+            <a:endParaRPr lang="en-US"/>
+          </a:p>
+        </p:txBody>
       </p:sp>
       <p:sp>
         <p:nvSpPr>
@@ -2889,7 +2579,7 @@
           <a:bodyPr wrap="square" lIns="0" tIns="0" rIns="0" bIns="0" rtlCol="0" anchor="t"/>
           <a:lstStyle/>
           <a:p>
-            <a:pPr algn="l" indent="0" marL="0">
+            <a:pPr marL="0" indent="0" algn="l">
               <a:spcAft>
                 <a:spcPts val="600"/>
               </a:spcAft>
@@ -2909,7 +2599,7 @@
             <a:endParaRPr lang="en-US" sz="1500" dirty="0"/>
           </a:p>
           <a:p>
-            <a:pPr algn="l" indent="0" marL="0">
+            <a:pPr marL="0" indent="0" algn="l">
               <a:spcAft>
                 <a:spcPts val="600"/>
               </a:spcAft>
@@ -2929,7 +2619,7 @@
             <a:endParaRPr lang="en-US" sz="1500" dirty="0"/>
           </a:p>
           <a:p>
-            <a:pPr algn="l" indent="0" marL="0">
+            <a:pPr marL="0" indent="0" algn="l">
               <a:spcAft>
                 <a:spcPts val="600"/>
               </a:spcAft>
@@ -2966,6 +2656,7 @@
         <a:solidFill>
           <a:srgbClr val="FFFFFF"/>
         </a:solidFill>
+        <a:effectLst/>
       </p:bgPr>
     </p:bg>
     <p:spTree>
@@ -3003,11 +2694,11 @@
           <a:bodyPr wrap="square" lIns="0" tIns="0" rIns="0" bIns="0" rtlCol="0" anchor="ctr"/>
           <a:lstStyle/>
           <a:p>
-            <a:pPr algn="l" indent="0" marL="0">
-              <a:buNone/>
-            </a:pPr>
-            <a:r>
-              <a:rPr lang="en-US" sz="1100" b="1" spc="300" kern="0" dirty="0">
+            <a:pPr marL="0" indent="0" algn="l">
+              <a:buNone/>
+            </a:pPr>
+            <a:r>
+              <a:rPr lang="en-US" sz="1100" b="1" kern="0" spc="300" dirty="0">
                 <a:solidFill>
                   <a:srgbClr val="0E8C7F"/>
                 </a:solidFill>
@@ -3042,7 +2733,7 @@
           <a:bodyPr wrap="square" lIns="0" tIns="0" rIns="0" bIns="0" rtlCol="0" anchor="ctr"/>
           <a:lstStyle/>
           <a:p>
-            <a:pPr algn="l" indent="0" marL="0">
+            <a:pPr marL="0" indent="0" algn="l">
               <a:buNone/>
             </a:pPr>
             <a:r>
@@ -3084,6 +2775,13 @@
             <a:prstDash val="solid"/>
           </a:ln>
         </p:spPr>
+        <p:txBody>
+          <a:bodyPr/>
+          <a:lstStyle/>
+          <a:p>
+            <a:endParaRPr lang="en-US"/>
+          </a:p>
+        </p:txBody>
       </p:sp>
       <p:sp>
         <p:nvSpPr>
@@ -3106,7 +2804,7 @@
           <a:bodyPr wrap="square" lIns="0" tIns="0" rIns="0" bIns="0" rtlCol="0" anchor="ctr"/>
           <a:lstStyle/>
           <a:p>
-            <a:pPr algn="l" indent="0" marL="0">
+            <a:pPr marL="0" indent="0" algn="l">
               <a:buNone/>
             </a:pPr>
             <a:endParaRPr lang="en-US" sz="1150" dirty="0"/>
@@ -3137,6 +2835,13 @@
             <a:prstDash val="solid"/>
           </a:ln>
         </p:spPr>
+        <p:txBody>
+          <a:bodyPr/>
+          <a:lstStyle/>
+          <a:p>
+            <a:endParaRPr lang="en-US"/>
+          </a:p>
+        </p:txBody>
       </p:sp>
       <p:sp>
         <p:nvSpPr>
@@ -3159,7 +2864,7 @@
           <a:bodyPr wrap="square" lIns="0" tIns="0" rIns="0" bIns="0" rtlCol="0" anchor="ctr"/>
           <a:lstStyle/>
           <a:p>
-            <a:pPr algn="ctr" indent="0" marL="0">
+            <a:pPr marL="0" indent="0" algn="ctr">
               <a:buNone/>
             </a:pPr>
             <a:r>
@@ -3201,6 +2906,13 @@
             <a:prstDash val="solid"/>
           </a:ln>
         </p:spPr>
+        <p:txBody>
+          <a:bodyPr/>
+          <a:lstStyle/>
+          <a:p>
+            <a:endParaRPr lang="en-US"/>
+          </a:p>
+        </p:txBody>
       </p:sp>
       <p:sp>
         <p:nvSpPr>
@@ -3223,7 +2935,7 @@
           <a:bodyPr wrap="square" lIns="0" tIns="0" rIns="0" bIns="0" rtlCol="0" anchor="ctr"/>
           <a:lstStyle/>
           <a:p>
-            <a:pPr algn="ctr" indent="0" marL="0">
+            <a:pPr marL="0" indent="0" algn="ctr">
               <a:buNone/>
             </a:pPr>
             <a:r>
@@ -3265,6 +2977,13 @@
             <a:prstDash val="solid"/>
           </a:ln>
         </p:spPr>
+        <p:txBody>
+          <a:bodyPr/>
+          <a:lstStyle/>
+          <a:p>
+            <a:endParaRPr lang="en-US"/>
+          </a:p>
+        </p:txBody>
       </p:sp>
       <p:sp>
         <p:nvSpPr>
@@ -3287,7 +3006,7 @@
           <a:bodyPr wrap="square" lIns="0" tIns="0" rIns="0" bIns="0" rtlCol="0" anchor="ctr"/>
           <a:lstStyle/>
           <a:p>
-            <a:pPr algn="ctr" indent="0" marL="0">
+            <a:pPr marL="0" indent="0" algn="ctr">
               <a:buNone/>
             </a:pPr>
             <a:r>
@@ -3329,6 +3048,13 @@
             <a:prstDash val="solid"/>
           </a:ln>
         </p:spPr>
+        <p:txBody>
+          <a:bodyPr/>
+          <a:lstStyle/>
+          <a:p>
+            <a:endParaRPr lang="en-US"/>
+          </a:p>
+        </p:txBody>
       </p:sp>
       <p:sp>
         <p:nvSpPr>
@@ -3351,7 +3077,7 @@
           <a:bodyPr wrap="square" lIns="0" tIns="0" rIns="0" bIns="0" rtlCol="0" anchor="ctr"/>
           <a:lstStyle/>
           <a:p>
-            <a:pPr algn="l" indent="0" marL="0">
+            <a:pPr marL="0" indent="0" algn="l">
               <a:buNone/>
             </a:pPr>
             <a:r>
@@ -3393,6 +3119,13 @@
             <a:prstDash val="solid"/>
           </a:ln>
         </p:spPr>
+        <p:txBody>
+          <a:bodyPr/>
+          <a:lstStyle/>
+          <a:p>
+            <a:endParaRPr lang="en-US"/>
+          </a:p>
+        </p:txBody>
       </p:sp>
       <p:sp>
         <p:nvSpPr>
@@ -3415,7 +3148,7 @@
           <a:bodyPr wrap="square" lIns="0" tIns="0" rIns="0" bIns="0" rtlCol="0" anchor="ctr"/>
           <a:lstStyle/>
           <a:p>
-            <a:pPr algn="ctr" indent="0" marL="0">
+            <a:pPr marL="0" indent="0" algn="ctr">
               <a:buNone/>
             </a:pPr>
             <a:r>
@@ -3457,6 +3190,13 @@
             <a:prstDash val="solid"/>
           </a:ln>
         </p:spPr>
+        <p:txBody>
+          <a:bodyPr/>
+          <a:lstStyle/>
+          <a:p>
+            <a:endParaRPr lang="en-US"/>
+          </a:p>
+        </p:txBody>
       </p:sp>
       <p:sp>
         <p:nvSpPr>
@@ -3479,7 +3219,7 @@
           <a:bodyPr wrap="square" lIns="0" tIns="0" rIns="0" bIns="0" rtlCol="0" anchor="ctr"/>
           <a:lstStyle/>
           <a:p>
-            <a:pPr algn="ctr" indent="0" marL="0">
+            <a:pPr marL="0" indent="0" algn="ctr">
               <a:buNone/>
             </a:pPr>
             <a:r>
@@ -3521,6 +3261,13 @@
             <a:prstDash val="solid"/>
           </a:ln>
         </p:spPr>
+        <p:txBody>
+          <a:bodyPr/>
+          <a:lstStyle/>
+          <a:p>
+            <a:endParaRPr lang="en-US"/>
+          </a:p>
+        </p:txBody>
       </p:sp>
       <p:sp>
         <p:nvSpPr>
@@ -3543,7 +3290,7 @@
           <a:bodyPr wrap="square" lIns="0" tIns="0" rIns="0" bIns="0" rtlCol="0" anchor="ctr"/>
           <a:lstStyle/>
           <a:p>
-            <a:pPr algn="ctr" indent="0" marL="0">
+            <a:pPr marL="0" indent="0" algn="ctr">
               <a:buNone/>
             </a:pPr>
             <a:r>
@@ -3585,6 +3332,13 @@
             <a:prstDash val="solid"/>
           </a:ln>
         </p:spPr>
+        <p:txBody>
+          <a:bodyPr/>
+          <a:lstStyle/>
+          <a:p>
+            <a:endParaRPr lang="en-US"/>
+          </a:p>
+        </p:txBody>
       </p:sp>
       <p:sp>
         <p:nvSpPr>
@@ -3607,7 +3361,7 @@
           <a:bodyPr wrap="square" lIns="0" tIns="0" rIns="0" bIns="0" rtlCol="0" anchor="ctr"/>
           <a:lstStyle/>
           <a:p>
-            <a:pPr algn="l" indent="0" marL="0">
+            <a:pPr marL="0" indent="0" algn="l">
               <a:buNone/>
             </a:pPr>
             <a:r>
@@ -3649,6 +3403,13 @@
             <a:prstDash val="solid"/>
           </a:ln>
         </p:spPr>
+        <p:txBody>
+          <a:bodyPr/>
+          <a:lstStyle/>
+          <a:p>
+            <a:endParaRPr lang="en-US"/>
+          </a:p>
+        </p:txBody>
       </p:sp>
       <p:sp>
         <p:nvSpPr>
@@ -3671,7 +3432,7 @@
           <a:bodyPr wrap="square" lIns="0" tIns="0" rIns="0" bIns="0" rtlCol="0" anchor="ctr"/>
           <a:lstStyle/>
           <a:p>
-            <a:pPr algn="ctr" indent="0" marL="0">
+            <a:pPr marL="0" indent="0" algn="ctr">
               <a:buNone/>
             </a:pPr>
             <a:r>
@@ -3713,6 +3474,13 @@
             <a:prstDash val="solid"/>
           </a:ln>
         </p:spPr>
+        <p:txBody>
+          <a:bodyPr/>
+          <a:lstStyle/>
+          <a:p>
+            <a:endParaRPr lang="en-US"/>
+          </a:p>
+        </p:txBody>
       </p:sp>
       <p:sp>
         <p:nvSpPr>
@@ -3735,7 +3503,7 @@
           <a:bodyPr wrap="square" lIns="0" tIns="0" rIns="0" bIns="0" rtlCol="0" anchor="ctr"/>
           <a:lstStyle/>
           <a:p>
-            <a:pPr algn="ctr" indent="0" marL="0">
+            <a:pPr marL="0" indent="0" algn="ctr">
               <a:buNone/>
             </a:pPr>
             <a:r>
@@ -3777,6 +3545,13 @@
             <a:prstDash val="solid"/>
           </a:ln>
         </p:spPr>
+        <p:txBody>
+          <a:bodyPr/>
+          <a:lstStyle/>
+          <a:p>
+            <a:endParaRPr lang="en-US"/>
+          </a:p>
+        </p:txBody>
       </p:sp>
       <p:sp>
         <p:nvSpPr>
@@ -3799,7 +3574,7 @@
           <a:bodyPr wrap="square" lIns="0" tIns="0" rIns="0" bIns="0" rtlCol="0" anchor="ctr"/>
           <a:lstStyle/>
           <a:p>
-            <a:pPr algn="ctr" indent="0" marL="0">
+            <a:pPr marL="0" indent="0" algn="ctr">
               <a:buNone/>
             </a:pPr>
             <a:r>
@@ -3841,6 +3616,13 @@
             <a:prstDash val="solid"/>
           </a:ln>
         </p:spPr>
+        <p:txBody>
+          <a:bodyPr/>
+          <a:lstStyle/>
+          <a:p>
+            <a:endParaRPr lang="en-US"/>
+          </a:p>
+        </p:txBody>
       </p:sp>
       <p:sp>
         <p:nvSpPr>
@@ -3863,7 +3645,7 @@
           <a:bodyPr wrap="square" lIns="0" tIns="0" rIns="0" bIns="0" rtlCol="0" anchor="ctr"/>
           <a:lstStyle/>
           <a:p>
-            <a:pPr algn="l" indent="0" marL="0">
+            <a:pPr marL="0" indent="0" algn="l">
               <a:buNone/>
             </a:pPr>
             <a:r>
@@ -3905,6 +3687,13 @@
             <a:prstDash val="solid"/>
           </a:ln>
         </p:spPr>
+        <p:txBody>
+          <a:bodyPr/>
+          <a:lstStyle/>
+          <a:p>
+            <a:endParaRPr lang="en-US"/>
+          </a:p>
+        </p:txBody>
       </p:sp>
       <p:sp>
         <p:nvSpPr>
@@ -3927,7 +3716,7 @@
           <a:bodyPr wrap="square" lIns="0" tIns="0" rIns="0" bIns="0" rtlCol="0" anchor="ctr"/>
           <a:lstStyle/>
           <a:p>
-            <a:pPr algn="ctr" indent="0" marL="0">
+            <a:pPr marL="0" indent="0" algn="ctr">
               <a:buNone/>
             </a:pPr>
             <a:r>
@@ -3969,6 +3758,13 @@
             <a:prstDash val="solid"/>
           </a:ln>
         </p:spPr>
+        <p:txBody>
+          <a:bodyPr/>
+          <a:lstStyle/>
+          <a:p>
+            <a:endParaRPr lang="en-US"/>
+          </a:p>
+        </p:txBody>
       </p:sp>
       <p:sp>
         <p:nvSpPr>
@@ -3991,7 +3787,7 @@
           <a:bodyPr wrap="square" lIns="0" tIns="0" rIns="0" bIns="0" rtlCol="0" anchor="ctr"/>
           <a:lstStyle/>
           <a:p>
-            <a:pPr algn="ctr" indent="0" marL="0">
+            <a:pPr marL="0" indent="0" algn="ctr">
               <a:buNone/>
             </a:pPr>
             <a:r>
@@ -4033,6 +3829,13 @@
             <a:prstDash val="solid"/>
           </a:ln>
         </p:spPr>
+        <p:txBody>
+          <a:bodyPr/>
+          <a:lstStyle/>
+          <a:p>
+            <a:endParaRPr lang="en-US"/>
+          </a:p>
+        </p:txBody>
       </p:sp>
       <p:sp>
         <p:nvSpPr>
@@ -4055,7 +3858,7 @@
           <a:bodyPr wrap="square" lIns="0" tIns="0" rIns="0" bIns="0" rtlCol="0" anchor="ctr"/>
           <a:lstStyle/>
           <a:p>
-            <a:pPr algn="ctr" indent="0" marL="0">
+            <a:pPr marL="0" indent="0" algn="ctr">
               <a:buNone/>
             </a:pPr>
             <a:r>
@@ -4097,6 +3900,13 @@
             <a:prstDash val="solid"/>
           </a:ln>
         </p:spPr>
+        <p:txBody>
+          <a:bodyPr/>
+          <a:lstStyle/>
+          <a:p>
+            <a:endParaRPr lang="en-US"/>
+          </a:p>
+        </p:txBody>
       </p:sp>
       <p:sp>
         <p:nvSpPr>
@@ -4119,7 +3929,7 @@
           <a:bodyPr wrap="square" lIns="0" tIns="0" rIns="0" bIns="0" rtlCol="0" anchor="ctr"/>
           <a:lstStyle/>
           <a:p>
-            <a:pPr algn="l" indent="0" marL="0">
+            <a:pPr marL="0" indent="0" algn="l">
               <a:buNone/>
             </a:pPr>
             <a:r>
@@ -4161,6 +3971,13 @@
             <a:prstDash val="solid"/>
           </a:ln>
         </p:spPr>
+        <p:txBody>
+          <a:bodyPr/>
+          <a:lstStyle/>
+          <a:p>
+            <a:endParaRPr lang="en-US"/>
+          </a:p>
+        </p:txBody>
       </p:sp>
       <p:sp>
         <p:nvSpPr>
@@ -4183,7 +4000,7 @@
           <a:bodyPr wrap="square" lIns="0" tIns="0" rIns="0" bIns="0" rtlCol="0" anchor="ctr"/>
           <a:lstStyle/>
           <a:p>
-            <a:pPr algn="ctr" indent="0" marL="0">
+            <a:pPr marL="0" indent="0" algn="ctr">
               <a:buNone/>
             </a:pPr>
             <a:r>
@@ -4225,6 +4042,13 @@
             <a:prstDash val="solid"/>
           </a:ln>
         </p:spPr>
+        <p:txBody>
+          <a:bodyPr/>
+          <a:lstStyle/>
+          <a:p>
+            <a:endParaRPr lang="en-US"/>
+          </a:p>
+        </p:txBody>
       </p:sp>
       <p:sp>
         <p:nvSpPr>
@@ -4247,7 +4071,7 @@
           <a:bodyPr wrap="square" lIns="0" tIns="0" rIns="0" bIns="0" rtlCol="0" anchor="ctr"/>
           <a:lstStyle/>
           <a:p>
-            <a:pPr algn="ctr" indent="0" marL="0">
+            <a:pPr marL="0" indent="0" algn="ctr">
               <a:buNone/>
             </a:pPr>
             <a:r>
@@ -4289,6 +4113,13 @@
             <a:prstDash val="solid"/>
           </a:ln>
         </p:spPr>
+        <p:txBody>
+          <a:bodyPr/>
+          <a:lstStyle/>
+          <a:p>
+            <a:endParaRPr lang="en-US"/>
+          </a:p>
+        </p:txBody>
       </p:sp>
       <p:sp>
         <p:nvSpPr>
@@ -4311,7 +4142,7 @@
           <a:bodyPr wrap="square" lIns="0" tIns="0" rIns="0" bIns="0" rtlCol="0" anchor="ctr"/>
           <a:lstStyle/>
           <a:p>
-            <a:pPr algn="ctr" indent="0" marL="0">
+            <a:pPr marL="0" indent="0" algn="ctr">
               <a:buNone/>
             </a:pPr>
             <a:r>
@@ -4353,6 +4184,13 @@
             <a:prstDash val="solid"/>
           </a:ln>
         </p:spPr>
+        <p:txBody>
+          <a:bodyPr/>
+          <a:lstStyle/>
+          <a:p>
+            <a:endParaRPr lang="en-US"/>
+          </a:p>
+        </p:txBody>
       </p:sp>
       <p:sp>
         <p:nvSpPr>
@@ -4375,7 +4213,7 @@
           <a:bodyPr wrap="square" lIns="0" tIns="0" rIns="0" bIns="0" rtlCol="0" anchor="ctr"/>
           <a:lstStyle/>
           <a:p>
-            <a:pPr algn="l" indent="0" marL="0">
+            <a:pPr marL="0" indent="0" algn="l">
               <a:buNone/>
             </a:pPr>
             <a:r>
@@ -4417,6 +4255,13 @@
             <a:prstDash val="solid"/>
           </a:ln>
         </p:spPr>
+        <p:txBody>
+          <a:bodyPr/>
+          <a:lstStyle/>
+          <a:p>
+            <a:endParaRPr lang="en-US"/>
+          </a:p>
+        </p:txBody>
       </p:sp>
       <p:sp>
         <p:nvSpPr>
@@ -4439,7 +4284,7 @@
           <a:bodyPr wrap="square" lIns="0" tIns="0" rIns="0" bIns="0" rtlCol="0" anchor="ctr"/>
           <a:lstStyle/>
           <a:p>
-            <a:pPr algn="ctr" indent="0" marL="0">
+            <a:pPr marL="0" indent="0" algn="ctr">
               <a:buNone/>
             </a:pPr>
             <a:r>
@@ -4481,6 +4326,13 @@
             <a:prstDash val="solid"/>
           </a:ln>
         </p:spPr>
+        <p:txBody>
+          <a:bodyPr/>
+          <a:lstStyle/>
+          <a:p>
+            <a:endParaRPr lang="en-US"/>
+          </a:p>
+        </p:txBody>
       </p:sp>
       <p:sp>
         <p:nvSpPr>
@@ -4503,7 +4355,7 @@
           <a:bodyPr wrap="square" lIns="0" tIns="0" rIns="0" bIns="0" rtlCol="0" anchor="ctr"/>
           <a:lstStyle/>
           <a:p>
-            <a:pPr algn="ctr" indent="0" marL="0">
+            <a:pPr marL="0" indent="0" algn="ctr">
               <a:buNone/>
             </a:pPr>
             <a:r>
@@ -4545,6 +4397,13 @@
             <a:prstDash val="solid"/>
           </a:ln>
         </p:spPr>
+        <p:txBody>
+          <a:bodyPr/>
+          <a:lstStyle/>
+          <a:p>
+            <a:endParaRPr lang="en-US"/>
+          </a:p>
+        </p:txBody>
       </p:sp>
       <p:sp>
         <p:nvSpPr>
@@ -4567,7 +4426,7 @@
           <a:bodyPr wrap="square" lIns="0" tIns="0" rIns="0" bIns="0" rtlCol="0" anchor="ctr"/>
           <a:lstStyle/>
           <a:p>
-            <a:pPr algn="ctr" indent="0" marL="0">
+            <a:pPr marL="0" indent="0" algn="ctr">
               <a:buNone/>
             </a:pPr>
             <a:r>
@@ -4609,6 +4468,13 @@
             <a:prstDash val="solid"/>
           </a:ln>
         </p:spPr>
+        <p:txBody>
+          <a:bodyPr/>
+          <a:lstStyle/>
+          <a:p>
+            <a:endParaRPr lang="en-US"/>
+          </a:p>
+        </p:txBody>
       </p:sp>
       <p:sp>
         <p:nvSpPr>
@@ -4631,7 +4497,7 @@
           <a:bodyPr wrap="square" lIns="0" tIns="0" rIns="0" bIns="0" rtlCol="0" anchor="ctr"/>
           <a:lstStyle/>
           <a:p>
-            <a:pPr algn="l" indent="0" marL="0">
+            <a:pPr marL="0" indent="0" algn="l">
               <a:buNone/>
             </a:pPr>
             <a:r>
@@ -4673,6 +4539,13 @@
             <a:prstDash val="solid"/>
           </a:ln>
         </p:spPr>
+        <p:txBody>
+          <a:bodyPr/>
+          <a:lstStyle/>
+          <a:p>
+            <a:endParaRPr lang="en-US"/>
+          </a:p>
+        </p:txBody>
       </p:sp>
       <p:sp>
         <p:nvSpPr>
@@ -4695,7 +4568,7 @@
           <a:bodyPr wrap="square" lIns="0" tIns="0" rIns="0" bIns="0" rtlCol="0" anchor="ctr"/>
           <a:lstStyle/>
           <a:p>
-            <a:pPr algn="ctr" indent="0" marL="0">
+            <a:pPr marL="0" indent="0" algn="ctr">
               <a:buNone/>
             </a:pPr>
             <a:r>
@@ -4737,6 +4610,13 @@
             <a:prstDash val="solid"/>
           </a:ln>
         </p:spPr>
+        <p:txBody>
+          <a:bodyPr/>
+          <a:lstStyle/>
+          <a:p>
+            <a:endParaRPr lang="en-US"/>
+          </a:p>
+        </p:txBody>
       </p:sp>
       <p:sp>
         <p:nvSpPr>
@@ -4759,7 +4639,7 @@
           <a:bodyPr wrap="square" lIns="0" tIns="0" rIns="0" bIns="0" rtlCol="0" anchor="ctr"/>
           <a:lstStyle/>
           <a:p>
-            <a:pPr algn="ctr" indent="0" marL="0">
+            <a:pPr marL="0" indent="0" algn="ctr">
               <a:buNone/>
             </a:pPr>
             <a:r>
@@ -4801,6 +4681,13 @@
             <a:prstDash val="solid"/>
           </a:ln>
         </p:spPr>
+        <p:txBody>
+          <a:bodyPr/>
+          <a:lstStyle/>
+          <a:p>
+            <a:endParaRPr lang="en-US"/>
+          </a:p>
+        </p:txBody>
       </p:sp>
       <p:sp>
         <p:nvSpPr>
@@ -4823,7 +4710,7 @@
           <a:bodyPr wrap="square" lIns="0" tIns="0" rIns="0" bIns="0" rtlCol="0" anchor="ctr"/>
           <a:lstStyle/>
           <a:p>
-            <a:pPr algn="ctr" indent="0" marL="0">
+            <a:pPr marL="0" indent="0" algn="ctr">
               <a:buNone/>
             </a:pPr>
             <a:r>
@@ -4865,6 +4752,13 @@
             <a:prstDash val="solid"/>
           </a:ln>
         </p:spPr>
+        <p:txBody>
+          <a:bodyPr/>
+          <a:lstStyle/>
+          <a:p>
+            <a:endParaRPr lang="en-US"/>
+          </a:p>
+        </p:txBody>
       </p:sp>
       <p:sp>
         <p:nvSpPr>
@@ -4887,7 +4781,7 @@
           <a:bodyPr wrap="square" lIns="0" tIns="0" rIns="0" bIns="0" rtlCol="0" anchor="ctr"/>
           <a:lstStyle/>
           <a:p>
-            <a:pPr algn="l" indent="0" marL="0">
+            <a:pPr marL="0" indent="0" algn="l">
               <a:buNone/>
             </a:pPr>
             <a:r>
@@ -4929,6 +4823,13 @@
             <a:prstDash val="solid"/>
           </a:ln>
         </p:spPr>
+        <p:txBody>
+          <a:bodyPr/>
+          <a:lstStyle/>
+          <a:p>
+            <a:endParaRPr lang="en-US"/>
+          </a:p>
+        </p:txBody>
       </p:sp>
       <p:sp>
         <p:nvSpPr>
@@ -4951,7 +4852,7 @@
           <a:bodyPr wrap="square" lIns="0" tIns="0" rIns="0" bIns="0" rtlCol="0" anchor="ctr"/>
           <a:lstStyle/>
           <a:p>
-            <a:pPr algn="ctr" indent="0" marL="0">
+            <a:pPr marL="0" indent="0" algn="ctr">
               <a:buNone/>
             </a:pPr>
             <a:r>
@@ -4993,6 +4894,13 @@
             <a:prstDash val="solid"/>
           </a:ln>
         </p:spPr>
+        <p:txBody>
+          <a:bodyPr/>
+          <a:lstStyle/>
+          <a:p>
+            <a:endParaRPr lang="en-US"/>
+          </a:p>
+        </p:txBody>
       </p:sp>
       <p:sp>
         <p:nvSpPr>
@@ -5015,7 +4923,7 @@
           <a:bodyPr wrap="square" lIns="0" tIns="0" rIns="0" bIns="0" rtlCol="0" anchor="ctr"/>
           <a:lstStyle/>
           <a:p>
-            <a:pPr algn="ctr" indent="0" marL="0">
+            <a:pPr marL="0" indent="0" algn="ctr">
               <a:buNone/>
             </a:pPr>
             <a:r>
@@ -5057,6 +4965,13 @@
             <a:prstDash val="solid"/>
           </a:ln>
         </p:spPr>
+        <p:txBody>
+          <a:bodyPr/>
+          <a:lstStyle/>
+          <a:p>
+            <a:endParaRPr lang="en-US"/>
+          </a:p>
+        </p:txBody>
       </p:sp>
       <p:sp>
         <p:nvSpPr>
@@ -5079,7 +4994,7 @@
           <a:bodyPr wrap="square" lIns="0" tIns="0" rIns="0" bIns="0" rtlCol="0" anchor="ctr"/>
           <a:lstStyle/>
           <a:p>
-            <a:pPr algn="ctr" indent="0" marL="0">
+            <a:pPr marL="0" indent="0" algn="ctr">
               <a:buNone/>
             </a:pPr>
             <a:r>
@@ -5118,11 +5033,11 @@
           <a:bodyPr wrap="square" lIns="0" tIns="0" rIns="0" bIns="0" rtlCol="0" anchor="ctr"/>
           <a:lstStyle/>
           <a:p>
-            <a:pPr indent="0" marL="0">
-              <a:buNone/>
-            </a:pPr>
-            <a:r>
-              <a:rPr lang="en-US" sz="1050" b="1" spc="100" kern="0" dirty="0">
+            <a:pPr marL="0" indent="0">
+              <a:buNone/>
+            </a:pPr>
+            <a:r>
+              <a:rPr lang="en-US" sz="1050" b="1" kern="0" spc="100" dirty="0">
                 <a:solidFill>
                   <a:srgbClr val="2C7A33"/>
                 </a:solidFill>
@@ -5138,7 +5053,7 @@
       </p:sp>
       <p:graphicFrame>
         <p:nvGraphicFramePr>
-          <p:cNvPr id="69" name="Chart 0" descr=""/>
+          <p:cNvPr id="69" name="Chart 0"/>
           <p:cNvGraphicFramePr/>
           <p:nvPr/>
         </p:nvGraphicFramePr>
@@ -5146,9 +5061,9 @@
           <a:off x="7315200" y="2103120"/>
           <a:ext cx="4434840" cy="2743200"/>
         </p:xfrm>
-        <a:graphic xmlns:a="http://schemas.openxmlformats.org/drawingml/2006/main">
+        <a:graphic>
           <a:graphicData uri="http://schemas.openxmlformats.org/drawingml/2006/chart">
-            <c:chart xmlns:c="http://schemas.openxmlformats.org/drawingml/2006/chart" r:id="rId1"/>
+            <c:chart xmlns:c="http://schemas.openxmlformats.org/drawingml/2006/chart" xmlns:r="http://schemas.openxmlformats.org/officeDocument/2006/relationships" r:id="rId3"/>
           </a:graphicData>
         </a:graphic>
       </p:graphicFrame>
@@ -5176,6 +5091,13 @@
             <a:prstDash val="solid"/>
           </a:ln>
         </p:spPr>
+        <p:txBody>
+          <a:bodyPr/>
+          <a:lstStyle/>
+          <a:p>
+            <a:endParaRPr lang="en-US"/>
+          </a:p>
+        </p:txBody>
       </p:sp>
       <p:sp>
         <p:nvSpPr>
@@ -5198,7 +5120,7 @@
           <a:bodyPr wrap="square" lIns="0" tIns="0" rIns="0" bIns="0" rtlCol="0" anchor="ctr"/>
           <a:lstStyle/>
           <a:p>
-            <a:pPr algn="l" indent="0" marL="0">
+            <a:pPr marL="0" indent="0" algn="l">
               <a:lnSpc>
                 <a:spcPct val="130000"/>
               </a:lnSpc>
@@ -5215,12 +5137,6 @@
               </a:rPr>
               <a:t>Break-even  </a:t>
             </a:r>
-            <a:pPr algn="l" indent="0" marL="0">
-              <a:lnSpc>
-                <a:spcPct val="130000"/>
-              </a:lnSpc>
-              <a:buNone/>
-            </a:pPr>
             <a:r>
               <a:rPr lang="en-US" sz="1300" dirty="0">
                 <a:solidFill>
@@ -5232,12 +5148,6 @@
               </a:rPr>
               <a:t>Q3 2029 – Q1 2030 (Month 36–48)        </a:t>
             </a:r>
-            <a:pPr algn="l" indent="0" marL="0">
-              <a:lnSpc>
-                <a:spcPct val="130000"/>
-              </a:lnSpc>
-              <a:buNone/>
-            </a:pPr>
             <a:r>
               <a:rPr lang="en-US" sz="1300" b="1" dirty="0">
                 <a:solidFill>
@@ -5249,12 +5159,6 @@
               </a:rPr>
               <a:t>Cumulative loss to break-even  </a:t>
             </a:r>
-            <a:pPr algn="l" indent="0" marL="0">
-              <a:lnSpc>
-                <a:spcPct val="130000"/>
-              </a:lnSpc>
-              <a:buNone/>
-            </a:pPr>
             <a:r>
               <a:rPr lang="en-US" sz="1300" dirty="0">
                 <a:solidFill>
@@ -5266,12 +5170,6 @@
               </a:rPr>
               <a:t>~$1.3–1.7M        </a:t>
             </a:r>
-            <a:pPr algn="l" indent="0" marL="0">
-              <a:lnSpc>
-                <a:spcPct val="130000"/>
-              </a:lnSpc>
-              <a:buNone/>
-            </a:pPr>
             <a:r>
               <a:rPr lang="en-US" sz="1300" b="1" dirty="0">
                 <a:solidFill>
@@ -5283,12 +5181,6 @@
               </a:rPr>
               <a:t>Total funding need  </a:t>
             </a:r>
-            <a:pPr algn="l" indent="0" marL="0">
-              <a:lnSpc>
-                <a:spcPct val="130000"/>
-              </a:lnSpc>
-              <a:buNone/>
-            </a:pPr>
             <a:r>
               <a:rPr lang="en-US" sz="1300" b="1" dirty="0">
                 <a:solidFill>
@@ -5325,7 +5217,7 @@
           <a:bodyPr wrap="square" lIns="0" tIns="0" rIns="0" bIns="0" rtlCol="0" anchor="ctr"/>
           <a:lstStyle/>
           <a:p>
-            <a:pPr indent="0" marL="0">
+            <a:pPr marL="0" indent="0">
               <a:buNone/>
             </a:pPr>
             <a:r>
@@ -5364,7 +5256,7 @@
           <a:bodyPr wrap="square" lIns="0" tIns="0" rIns="0" bIns="0" rtlCol="0" anchor="ctr"/>
           <a:lstStyle/>
           <a:p>
-            <a:pPr algn="r" indent="0" marL="0">
+            <a:pPr marL="0" indent="0" algn="r">
               <a:buNone/>
             </a:pPr>
             <a:r>
@@ -5398,6 +5290,7 @@
         <a:solidFill>
           <a:srgbClr val="FFFFFF"/>
         </a:solidFill>
+        <a:effectLst/>
       </p:bgPr>
     </p:bg>
     <p:spTree>
@@ -5435,11 +5328,11 @@
           <a:bodyPr wrap="square" lIns="0" tIns="0" rIns="0" bIns="0" rtlCol="0" anchor="ctr"/>
           <a:lstStyle/>
           <a:p>
-            <a:pPr algn="l" indent="0" marL="0">
-              <a:buNone/>
-            </a:pPr>
-            <a:r>
-              <a:rPr lang="en-US" sz="1100" b="1" spc="300" kern="0" dirty="0">
+            <a:pPr marL="0" indent="0" algn="l">
+              <a:buNone/>
+            </a:pPr>
+            <a:r>
+              <a:rPr lang="en-US" sz="1100" b="1" kern="0" spc="300" dirty="0">
                 <a:solidFill>
                   <a:srgbClr val="0E8C7F"/>
                 </a:solidFill>
@@ -5474,7 +5367,7 @@
           <a:bodyPr wrap="square" lIns="0" tIns="0" rIns="0" bIns="0" rtlCol="0" anchor="ctr"/>
           <a:lstStyle/>
           <a:p>
-            <a:pPr algn="l" indent="0" marL="0">
+            <a:pPr marL="0" indent="0" algn="l">
               <a:buNone/>
             </a:pPr>
             <a:r>
@@ -5516,13 +5409,20 @@
             <a:prstDash val="solid"/>
           </a:ln>
           <a:effectLst>
-            <a:outerShdw sx="100000" sy="100000" kx="0" ky="0" algn="bl" rotWithShape="0" blurRad="63500" dist="25400" dir="8100000">
+            <a:outerShdw blurRad="63500" dist="25400" dir="8100000" algn="bl" rotWithShape="0">
               <a:srgbClr val="000000">
                 <a:alpha val="10000"/>
               </a:srgbClr>
             </a:outerShdw>
           </a:effectLst>
         </p:spPr>
+        <p:txBody>
+          <a:bodyPr/>
+          <a:lstStyle/>
+          <a:p>
+            <a:endParaRPr lang="en-US"/>
+          </a:p>
+        </p:txBody>
       </p:sp>
       <p:sp>
         <p:nvSpPr>
@@ -5543,6 +5443,13 @@
           </a:solidFill>
           <a:ln/>
         </p:spPr>
+        <p:txBody>
+          <a:bodyPr/>
+          <a:lstStyle/>
+          <a:p>
+            <a:endParaRPr lang="en-US"/>
+          </a:p>
+        </p:txBody>
       </p:sp>
       <p:sp>
         <p:nvSpPr>
@@ -5565,7 +5472,7 @@
           <a:bodyPr wrap="square" lIns="0" tIns="0" rIns="0" bIns="0" rtlCol="0" anchor="ctr"/>
           <a:lstStyle/>
           <a:p>
-            <a:pPr algn="ctr" indent="0" marL="0">
+            <a:pPr marL="0" indent="0" algn="ctr">
               <a:buNone/>
             </a:pPr>
             <a:r>
@@ -5604,7 +5511,7 @@
           <a:bodyPr wrap="square" lIns="0" tIns="0" rIns="0" bIns="0" rtlCol="0" anchor="ctr"/>
           <a:lstStyle/>
           <a:p>
-            <a:pPr indent="0" marL="0">
+            <a:pPr marL="0" indent="0">
               <a:buNone/>
             </a:pPr>
             <a:r>
@@ -5643,7 +5550,7 @@
           <a:bodyPr wrap="square" lIns="0" tIns="0" rIns="0" bIns="0" rtlCol="0" anchor="ctr"/>
           <a:lstStyle/>
           <a:p>
-            <a:pPr indent="0" marL="0">
+            <a:pPr marL="0" indent="0">
               <a:buNone/>
             </a:pPr>
             <a:r>
@@ -5682,7 +5589,7 @@
           <a:bodyPr wrap="square" lIns="0" tIns="0" rIns="0" bIns="0" rtlCol="0" anchor="t"/>
           <a:lstStyle/>
           <a:p>
-            <a:pPr indent="0" marL="0">
+            <a:pPr marL="0" indent="0">
               <a:lnSpc>
                 <a:spcPct val="95000"/>
               </a:lnSpc>
@@ -5727,13 +5634,20 @@
             <a:prstDash val="solid"/>
           </a:ln>
           <a:effectLst>
-            <a:outerShdw sx="100000" sy="100000" kx="0" ky="0" algn="bl" rotWithShape="0" blurRad="63500" dist="25400" dir="8100000">
+            <a:outerShdw blurRad="63500" dist="25400" dir="8100000" algn="bl" rotWithShape="0">
               <a:srgbClr val="000000">
                 <a:alpha val="10000"/>
               </a:srgbClr>
             </a:outerShdw>
           </a:effectLst>
         </p:spPr>
+        <p:txBody>
+          <a:bodyPr/>
+          <a:lstStyle/>
+          <a:p>
+            <a:endParaRPr lang="en-US"/>
+          </a:p>
+        </p:txBody>
       </p:sp>
       <p:sp>
         <p:nvSpPr>
@@ -5754,6 +5668,13 @@
           </a:solidFill>
           <a:ln/>
         </p:spPr>
+        <p:txBody>
+          <a:bodyPr/>
+          <a:lstStyle/>
+          <a:p>
+            <a:endParaRPr lang="en-US"/>
+          </a:p>
+        </p:txBody>
       </p:sp>
       <p:sp>
         <p:nvSpPr>
@@ -5776,7 +5697,7 @@
           <a:bodyPr wrap="square" lIns="0" tIns="0" rIns="0" bIns="0" rtlCol="0" anchor="ctr"/>
           <a:lstStyle/>
           <a:p>
-            <a:pPr algn="ctr" indent="0" marL="0">
+            <a:pPr marL="0" indent="0" algn="ctr">
               <a:buNone/>
             </a:pPr>
             <a:r>
@@ -5815,7 +5736,7 @@
           <a:bodyPr wrap="square" lIns="0" tIns="0" rIns="0" bIns="0" rtlCol="0" anchor="ctr"/>
           <a:lstStyle/>
           <a:p>
-            <a:pPr indent="0" marL="0">
+            <a:pPr marL="0" indent="0">
               <a:buNone/>
             </a:pPr>
             <a:r>
@@ -5854,7 +5775,7 @@
           <a:bodyPr wrap="square" lIns="0" tIns="0" rIns="0" bIns="0" rtlCol="0" anchor="ctr"/>
           <a:lstStyle/>
           <a:p>
-            <a:pPr indent="0" marL="0">
+            <a:pPr marL="0" indent="0">
               <a:buNone/>
             </a:pPr>
             <a:r>
@@ -5893,7 +5814,7 @@
           <a:bodyPr wrap="square" lIns="0" tIns="0" rIns="0" bIns="0" rtlCol="0" anchor="t"/>
           <a:lstStyle/>
           <a:p>
-            <a:pPr indent="0" marL="0">
+            <a:pPr marL="0" indent="0">
               <a:lnSpc>
                 <a:spcPct val="95000"/>
               </a:lnSpc>
@@ -5938,13 +5859,20 @@
             <a:prstDash val="solid"/>
           </a:ln>
           <a:effectLst>
-            <a:outerShdw sx="100000" sy="100000" kx="0" ky="0" algn="bl" rotWithShape="0" blurRad="63500" dist="25400" dir="8100000">
+            <a:outerShdw blurRad="63500" dist="25400" dir="8100000" algn="bl" rotWithShape="0">
               <a:srgbClr val="000000">
                 <a:alpha val="10000"/>
               </a:srgbClr>
             </a:outerShdw>
           </a:effectLst>
         </p:spPr>
+        <p:txBody>
+          <a:bodyPr/>
+          <a:lstStyle/>
+          <a:p>
+            <a:endParaRPr lang="en-US"/>
+          </a:p>
+        </p:txBody>
       </p:sp>
       <p:sp>
         <p:nvSpPr>
@@ -5965,6 +5893,13 @@
           </a:solidFill>
           <a:ln/>
         </p:spPr>
+        <p:txBody>
+          <a:bodyPr/>
+          <a:lstStyle/>
+          <a:p>
+            <a:endParaRPr lang="en-US"/>
+          </a:p>
+        </p:txBody>
       </p:sp>
       <p:sp>
         <p:nvSpPr>
@@ -5987,7 +5922,7 @@
           <a:bodyPr wrap="square" lIns="0" tIns="0" rIns="0" bIns="0" rtlCol="0" anchor="ctr"/>
           <a:lstStyle/>
           <a:p>
-            <a:pPr algn="ctr" indent="0" marL="0">
+            <a:pPr marL="0" indent="0" algn="ctr">
               <a:buNone/>
             </a:pPr>
             <a:r>
@@ -6026,7 +5961,7 @@
           <a:bodyPr wrap="square" lIns="0" tIns="0" rIns="0" bIns="0" rtlCol="0" anchor="ctr"/>
           <a:lstStyle/>
           <a:p>
-            <a:pPr indent="0" marL="0">
+            <a:pPr marL="0" indent="0">
               <a:buNone/>
             </a:pPr>
             <a:r>
@@ -6065,7 +6000,7 @@
           <a:bodyPr wrap="square" lIns="0" tIns="0" rIns="0" bIns="0" rtlCol="0" anchor="ctr"/>
           <a:lstStyle/>
           <a:p>
-            <a:pPr indent="0" marL="0">
+            <a:pPr marL="0" indent="0">
               <a:buNone/>
             </a:pPr>
             <a:r>
@@ -6104,7 +6039,7 @@
           <a:bodyPr wrap="square" lIns="0" tIns="0" rIns="0" bIns="0" rtlCol="0" anchor="t"/>
           <a:lstStyle/>
           <a:p>
-            <a:pPr indent="0" marL="0">
+            <a:pPr marL="0" indent="0">
               <a:lnSpc>
                 <a:spcPct val="95000"/>
               </a:lnSpc>
@@ -6149,13 +6084,20 @@
             <a:prstDash val="solid"/>
           </a:ln>
           <a:effectLst>
-            <a:outerShdw sx="100000" sy="100000" kx="0" ky="0" algn="bl" rotWithShape="0" blurRad="63500" dist="25400" dir="8100000">
+            <a:outerShdw blurRad="63500" dist="25400" dir="8100000" algn="bl" rotWithShape="0">
               <a:srgbClr val="000000">
                 <a:alpha val="10000"/>
               </a:srgbClr>
             </a:outerShdw>
           </a:effectLst>
         </p:spPr>
+        <p:txBody>
+          <a:bodyPr/>
+          <a:lstStyle/>
+          <a:p>
+            <a:endParaRPr lang="en-US"/>
+          </a:p>
+        </p:txBody>
       </p:sp>
       <p:sp>
         <p:nvSpPr>
@@ -6176,6 +6118,13 @@
           </a:solidFill>
           <a:ln/>
         </p:spPr>
+        <p:txBody>
+          <a:bodyPr/>
+          <a:lstStyle/>
+          <a:p>
+            <a:endParaRPr lang="en-US"/>
+          </a:p>
+        </p:txBody>
       </p:sp>
       <p:sp>
         <p:nvSpPr>
@@ -6198,7 +6147,7 @@
           <a:bodyPr wrap="square" lIns="0" tIns="0" rIns="0" bIns="0" rtlCol="0" anchor="ctr"/>
           <a:lstStyle/>
           <a:p>
-            <a:pPr algn="ctr" indent="0" marL="0">
+            <a:pPr marL="0" indent="0" algn="ctr">
               <a:buNone/>
             </a:pPr>
             <a:r>
@@ -6237,7 +6186,7 @@
           <a:bodyPr wrap="square" lIns="0" tIns="0" rIns="0" bIns="0" rtlCol="0" anchor="ctr"/>
           <a:lstStyle/>
           <a:p>
-            <a:pPr indent="0" marL="0">
+            <a:pPr marL="0" indent="0">
               <a:buNone/>
             </a:pPr>
             <a:r>
@@ -6276,7 +6225,7 @@
           <a:bodyPr wrap="square" lIns="0" tIns="0" rIns="0" bIns="0" rtlCol="0" anchor="ctr"/>
           <a:lstStyle/>
           <a:p>
-            <a:pPr indent="0" marL="0">
+            <a:pPr marL="0" indent="0">
               <a:buNone/>
             </a:pPr>
             <a:r>
@@ -6315,7 +6264,7 @@
           <a:bodyPr wrap="square" lIns="0" tIns="0" rIns="0" bIns="0" rtlCol="0" anchor="t"/>
           <a:lstStyle/>
           <a:p>
-            <a:pPr indent="0" marL="0">
+            <a:pPr marL="0" indent="0">
               <a:lnSpc>
                 <a:spcPct val="95000"/>
               </a:lnSpc>
@@ -6360,13 +6309,20 @@
             <a:prstDash val="solid"/>
           </a:ln>
           <a:effectLst>
-            <a:outerShdw sx="100000" sy="100000" kx="0" ky="0" algn="bl" rotWithShape="0" blurRad="63500" dist="25400" dir="8100000">
+            <a:outerShdw blurRad="63500" dist="25400" dir="8100000" algn="bl" rotWithShape="0">
               <a:srgbClr val="000000">
                 <a:alpha val="10000"/>
               </a:srgbClr>
             </a:outerShdw>
           </a:effectLst>
         </p:spPr>
+        <p:txBody>
+          <a:bodyPr/>
+          <a:lstStyle/>
+          <a:p>
+            <a:endParaRPr lang="en-US"/>
+          </a:p>
+        </p:txBody>
       </p:sp>
       <p:sp>
         <p:nvSpPr>
@@ -6387,6 +6343,13 @@
           </a:solidFill>
           <a:ln/>
         </p:spPr>
+        <p:txBody>
+          <a:bodyPr/>
+          <a:lstStyle/>
+          <a:p>
+            <a:endParaRPr lang="en-US"/>
+          </a:p>
+        </p:txBody>
       </p:sp>
       <p:sp>
         <p:nvSpPr>
@@ -6409,7 +6372,7 @@
           <a:bodyPr wrap="square" lIns="0" tIns="0" rIns="0" bIns="0" rtlCol="0" anchor="ctr"/>
           <a:lstStyle/>
           <a:p>
-            <a:pPr algn="ctr" indent="0" marL="0">
+            <a:pPr marL="0" indent="0" algn="ctr">
               <a:buNone/>
             </a:pPr>
             <a:r>
@@ -6448,7 +6411,7 @@
           <a:bodyPr wrap="square" lIns="0" tIns="0" rIns="0" bIns="0" rtlCol="0" anchor="ctr"/>
           <a:lstStyle/>
           <a:p>
-            <a:pPr indent="0" marL="0">
+            <a:pPr marL="0" indent="0">
               <a:buNone/>
             </a:pPr>
             <a:r>
@@ -6487,7 +6450,7 @@
           <a:bodyPr wrap="square" lIns="0" tIns="0" rIns="0" bIns="0" rtlCol="0" anchor="ctr"/>
           <a:lstStyle/>
           <a:p>
-            <a:pPr indent="0" marL="0">
+            <a:pPr marL="0" indent="0">
               <a:buNone/>
             </a:pPr>
             <a:r>
@@ -6526,7 +6489,7 @@
           <a:bodyPr wrap="square" lIns="0" tIns="0" rIns="0" bIns="0" rtlCol="0" anchor="t"/>
           <a:lstStyle/>
           <a:p>
-            <a:pPr indent="0" marL="0">
+            <a:pPr marL="0" indent="0">
               <a:lnSpc>
                 <a:spcPct val="95000"/>
               </a:lnSpc>
@@ -6571,13 +6534,20 @@
             <a:prstDash val="solid"/>
           </a:ln>
           <a:effectLst>
-            <a:outerShdw sx="100000" sy="100000" kx="0" ky="0" algn="bl" rotWithShape="0" blurRad="63500" dist="25400" dir="8100000">
+            <a:outerShdw blurRad="63500" dist="25400" dir="8100000" algn="bl" rotWithShape="0">
               <a:srgbClr val="000000">
                 <a:alpha val="10000"/>
               </a:srgbClr>
             </a:outerShdw>
           </a:effectLst>
         </p:spPr>
+        <p:txBody>
+          <a:bodyPr/>
+          <a:lstStyle/>
+          <a:p>
+            <a:endParaRPr lang="en-US"/>
+          </a:p>
+        </p:txBody>
       </p:sp>
       <p:sp>
         <p:nvSpPr>
@@ -6598,6 +6568,13 @@
           </a:solidFill>
           <a:ln/>
         </p:spPr>
+        <p:txBody>
+          <a:bodyPr/>
+          <a:lstStyle/>
+          <a:p>
+            <a:endParaRPr lang="en-US"/>
+          </a:p>
+        </p:txBody>
       </p:sp>
       <p:sp>
         <p:nvSpPr>
@@ -6620,7 +6597,7 @@
           <a:bodyPr wrap="square" lIns="0" tIns="0" rIns="0" bIns="0" rtlCol="0" anchor="ctr"/>
           <a:lstStyle/>
           <a:p>
-            <a:pPr algn="ctr" indent="0" marL="0">
+            <a:pPr marL="0" indent="0" algn="ctr">
               <a:buNone/>
             </a:pPr>
             <a:r>
@@ -6659,7 +6636,7 @@
           <a:bodyPr wrap="square" lIns="0" tIns="0" rIns="0" bIns="0" rtlCol="0" anchor="ctr"/>
           <a:lstStyle/>
           <a:p>
-            <a:pPr indent="0" marL="0">
+            <a:pPr marL="0" indent="0">
               <a:buNone/>
             </a:pPr>
             <a:r>
@@ -6698,7 +6675,7 @@
           <a:bodyPr wrap="square" lIns="0" tIns="0" rIns="0" bIns="0" rtlCol="0" anchor="ctr"/>
           <a:lstStyle/>
           <a:p>
-            <a:pPr indent="0" marL="0">
+            <a:pPr marL="0" indent="0">
               <a:buNone/>
             </a:pPr>
             <a:r>
@@ -6737,7 +6714,7 @@
           <a:bodyPr wrap="square" lIns="0" tIns="0" rIns="0" bIns="0" rtlCol="0" anchor="t"/>
           <a:lstStyle/>
           <a:p>
-            <a:pPr indent="0" marL="0">
+            <a:pPr marL="0" indent="0">
               <a:lnSpc>
                 <a:spcPct val="95000"/>
               </a:lnSpc>
@@ -6777,6 +6754,13 @@
           </a:solidFill>
           <a:ln/>
         </p:spPr>
+        <p:txBody>
+          <a:bodyPr/>
+          <a:lstStyle/>
+          <a:p>
+            <a:endParaRPr lang="en-US"/>
+          </a:p>
+        </p:txBody>
       </p:sp>
       <p:sp>
         <p:nvSpPr>
@@ -6799,7 +6783,7 @@
           <a:bodyPr wrap="square" lIns="0" tIns="0" rIns="0" bIns="0" rtlCol="0" anchor="ctr"/>
           <a:lstStyle/>
           <a:p>
-            <a:pPr algn="ctr" indent="0" marL="0">
+            <a:pPr marL="0" indent="0" algn="ctr">
               <a:buNone/>
             </a:pPr>
             <a:r>
@@ -6838,11 +6822,8 @@
           <a:bodyPr wrap="square" lIns="0" tIns="0" rIns="0" bIns="0" rtlCol="0" anchor="ctr"/>
           <a:lstStyle/>
           <a:p>
-            <a:pPr algn="l" indent="0" marL="0">
-              <a:buNone/>
-            </a:pPr>
-            <a:r>
-              <a:rPr lang="en-US" sz="850" spc="200" kern="0" dirty="0">
+            <a:r>
+              <a:rPr lang="en-US" sz="850" kern="0" spc="200" dirty="0" err="1">
                 <a:solidFill>
                   <a:srgbClr val="6B7280"/>
                 </a:solidFill>
@@ -6850,7 +6831,7 @@
                 <a:ea typeface="Georgia" pitchFamily="34" charset="-122"/>
                 <a:cs typeface="Georgia" pitchFamily="34" charset="-120"/>
               </a:rPr>
-              <a:t>TRANSAKT</a:t>
+              <a:t>BlockMed</a:t>
             </a:r>
             <a:endParaRPr lang="en-US" sz="850" dirty="0"/>
           </a:p>
@@ -6877,7 +6858,7 @@
           <a:bodyPr wrap="square" lIns="0" tIns="0" rIns="0" bIns="0" rtlCol="0" anchor="ctr"/>
           <a:lstStyle/>
           <a:p>
-            <a:pPr algn="r" indent="0" marL="0">
+            <a:pPr marL="0" indent="0" algn="r">
               <a:buNone/>
             </a:pPr>
             <a:r>
@@ -6911,6 +6892,7 @@
         <a:solidFill>
           <a:srgbClr val="FFFFFF"/>
         </a:solidFill>
+        <a:effectLst/>
       </p:bgPr>
     </p:bg>
     <p:spTree>
@@ -6948,11 +6930,11 @@
           <a:bodyPr wrap="square" lIns="0" tIns="0" rIns="0" bIns="0" rtlCol="0" anchor="ctr"/>
           <a:lstStyle/>
           <a:p>
-            <a:pPr algn="l" indent="0" marL="0">
-              <a:buNone/>
-            </a:pPr>
-            <a:r>
-              <a:rPr lang="en-US" sz="1100" b="1" spc="300" kern="0" dirty="0">
+            <a:pPr marL="0" indent="0" algn="l">
+              <a:buNone/>
+            </a:pPr>
+            <a:r>
+              <a:rPr lang="en-US" sz="1100" b="1" kern="0" spc="300" dirty="0">
                 <a:solidFill>
                   <a:srgbClr val="0E8C7F"/>
                 </a:solidFill>
@@ -6987,7 +6969,7 @@
           <a:bodyPr wrap="square" lIns="0" tIns="0" rIns="0" bIns="0" rtlCol="0" anchor="ctr"/>
           <a:lstStyle/>
           <a:p>
-            <a:pPr algn="l" indent="0" marL="0">
+            <a:pPr marL="0" indent="0" algn="l">
               <a:buNone/>
             </a:pPr>
             <a:r>
@@ -7007,7 +6989,7 @@
       </p:sp>
       <p:graphicFrame>
         <p:nvGraphicFramePr>
-          <p:cNvPr id="4" name="Chart 0" descr=""/>
+          <p:cNvPr id="4" name="Chart 0"/>
           <p:cNvGraphicFramePr/>
           <p:nvPr/>
         </p:nvGraphicFramePr>
@@ -7015,9 +6997,9 @@
           <a:off x="502920" y="1783080"/>
           <a:ext cx="4480560" cy="4023360"/>
         </p:xfrm>
-        <a:graphic xmlns:a="http://schemas.openxmlformats.org/drawingml/2006/main">
+        <a:graphic>
           <a:graphicData uri="http://schemas.openxmlformats.org/drawingml/2006/chart">
-            <c:chart xmlns:c="http://schemas.openxmlformats.org/drawingml/2006/chart" r:id="rId1"/>
+            <c:chart xmlns:c="http://schemas.openxmlformats.org/drawingml/2006/chart" xmlns:r="http://schemas.openxmlformats.org/officeDocument/2006/relationships" r:id="rId3"/>
           </a:graphicData>
         </a:graphic>
       </p:graphicFrame>
@@ -7042,7 +7024,7 @@
           <a:bodyPr wrap="square" lIns="0" tIns="0" rIns="0" bIns="0" rtlCol="0" anchor="ctr"/>
           <a:lstStyle/>
           <a:p>
-            <a:pPr algn="ctr" indent="0" marL="0">
+            <a:pPr marL="0" indent="0" algn="ctr">
               <a:buNone/>
             </a:pPr>
             <a:r>
@@ -7059,7 +7041,7 @@
             <a:endParaRPr lang="en-US" sz="3000" dirty="0"/>
           </a:p>
           <a:p>
-            <a:pPr algn="ctr" indent="0" marL="0">
+            <a:pPr marL="0" indent="0" algn="ctr">
               <a:buNone/>
             </a:pPr>
             <a:r>
@@ -7101,6 +7083,13 @@
             <a:prstDash val="solid"/>
           </a:ln>
         </p:spPr>
+        <p:txBody>
+          <a:bodyPr/>
+          <a:lstStyle/>
+          <a:p>
+            <a:endParaRPr lang="en-US"/>
+          </a:p>
+        </p:txBody>
       </p:sp>
       <p:sp>
         <p:nvSpPr>
@@ -7121,6 +7110,13 @@
           </a:solidFill>
           <a:ln/>
         </p:spPr>
+        <p:txBody>
+          <a:bodyPr/>
+          <a:lstStyle/>
+          <a:p>
+            <a:endParaRPr lang="en-US"/>
+          </a:p>
+        </p:txBody>
       </p:sp>
       <p:sp>
         <p:nvSpPr>
@@ -7143,7 +7139,7 @@
           <a:bodyPr wrap="square" lIns="0" tIns="0" rIns="0" bIns="0" rtlCol="0" anchor="ctr"/>
           <a:lstStyle/>
           <a:p>
-            <a:pPr indent="0" marL="0">
+            <a:pPr marL="0" indent="0">
               <a:buNone/>
             </a:pPr>
             <a:r>
@@ -7182,7 +7178,7 @@
           <a:bodyPr wrap="square" lIns="0" tIns="0" rIns="0" bIns="0" rtlCol="0" anchor="t"/>
           <a:lstStyle/>
           <a:p>
-            <a:pPr indent="0" marL="0">
+            <a:pPr marL="0" indent="0">
               <a:lnSpc>
                 <a:spcPct val="95000"/>
               </a:lnSpc>
@@ -7224,7 +7220,7 @@
           <a:bodyPr wrap="square" lIns="0" tIns="0" rIns="0" bIns="0" rtlCol="0" anchor="ctr"/>
           <a:lstStyle/>
           <a:p>
-            <a:pPr algn="r" indent="0" marL="0">
+            <a:pPr marL="0" indent="0" algn="r">
               <a:buNone/>
             </a:pPr>
             <a:r>
@@ -7263,7 +7259,7 @@
           <a:bodyPr wrap="square" lIns="0" tIns="0" rIns="0" bIns="0" rtlCol="0" anchor="ctr"/>
           <a:lstStyle/>
           <a:p>
-            <a:pPr algn="r" indent="0" marL="0">
+            <a:pPr marL="0" indent="0" algn="r">
               <a:buNone/>
             </a:pPr>
             <a:r>
@@ -7305,6 +7301,13 @@
             <a:prstDash val="solid"/>
           </a:ln>
         </p:spPr>
+        <p:txBody>
+          <a:bodyPr/>
+          <a:lstStyle/>
+          <a:p>
+            <a:endParaRPr lang="en-US"/>
+          </a:p>
+        </p:txBody>
       </p:sp>
       <p:sp>
         <p:nvSpPr>
@@ -7325,6 +7328,13 @@
           </a:solidFill>
           <a:ln/>
         </p:spPr>
+        <p:txBody>
+          <a:bodyPr/>
+          <a:lstStyle/>
+          <a:p>
+            <a:endParaRPr lang="en-US"/>
+          </a:p>
+        </p:txBody>
       </p:sp>
       <p:sp>
         <p:nvSpPr>
@@ -7347,7 +7357,7 @@
           <a:bodyPr wrap="square" lIns="0" tIns="0" rIns="0" bIns="0" rtlCol="0" anchor="ctr"/>
           <a:lstStyle/>
           <a:p>
-            <a:pPr indent="0" marL="0">
+            <a:pPr marL="0" indent="0">
               <a:buNone/>
             </a:pPr>
             <a:r>
@@ -7386,7 +7396,7 @@
           <a:bodyPr wrap="square" lIns="0" tIns="0" rIns="0" bIns="0" rtlCol="0" anchor="t"/>
           <a:lstStyle/>
           <a:p>
-            <a:pPr indent="0" marL="0">
+            <a:pPr marL="0" indent="0">
               <a:lnSpc>
                 <a:spcPct val="95000"/>
               </a:lnSpc>
@@ -7428,7 +7438,7 @@
           <a:bodyPr wrap="square" lIns="0" tIns="0" rIns="0" bIns="0" rtlCol="0" anchor="ctr"/>
           <a:lstStyle/>
           <a:p>
-            <a:pPr algn="r" indent="0" marL="0">
+            <a:pPr marL="0" indent="0" algn="r">
               <a:buNone/>
             </a:pPr>
             <a:r>
@@ -7467,7 +7477,7 @@
           <a:bodyPr wrap="square" lIns="0" tIns="0" rIns="0" bIns="0" rtlCol="0" anchor="ctr"/>
           <a:lstStyle/>
           <a:p>
-            <a:pPr algn="r" indent="0" marL="0">
+            <a:pPr marL="0" indent="0" algn="r">
               <a:buNone/>
             </a:pPr>
             <a:r>
@@ -7509,6 +7519,13 @@
             <a:prstDash val="solid"/>
           </a:ln>
         </p:spPr>
+        <p:txBody>
+          <a:bodyPr/>
+          <a:lstStyle/>
+          <a:p>
+            <a:endParaRPr lang="en-US"/>
+          </a:p>
+        </p:txBody>
       </p:sp>
       <p:sp>
         <p:nvSpPr>
@@ -7529,6 +7546,13 @@
           </a:solidFill>
           <a:ln/>
         </p:spPr>
+        <p:txBody>
+          <a:bodyPr/>
+          <a:lstStyle/>
+          <a:p>
+            <a:endParaRPr lang="en-US"/>
+          </a:p>
+        </p:txBody>
       </p:sp>
       <p:sp>
         <p:nvSpPr>
@@ -7551,7 +7575,7 @@
           <a:bodyPr wrap="square" lIns="0" tIns="0" rIns="0" bIns="0" rtlCol="0" anchor="ctr"/>
           <a:lstStyle/>
           <a:p>
-            <a:pPr indent="0" marL="0">
+            <a:pPr marL="0" indent="0">
               <a:buNone/>
             </a:pPr>
             <a:r>
@@ -7590,7 +7614,7 @@
           <a:bodyPr wrap="square" lIns="0" tIns="0" rIns="0" bIns="0" rtlCol="0" anchor="t"/>
           <a:lstStyle/>
           <a:p>
-            <a:pPr indent="0" marL="0">
+            <a:pPr marL="0" indent="0">
               <a:lnSpc>
                 <a:spcPct val="95000"/>
               </a:lnSpc>
@@ -7632,7 +7656,7 @@
           <a:bodyPr wrap="square" lIns="0" tIns="0" rIns="0" bIns="0" rtlCol="0" anchor="ctr"/>
           <a:lstStyle/>
           <a:p>
-            <a:pPr algn="r" indent="0" marL="0">
+            <a:pPr marL="0" indent="0" algn="r">
               <a:buNone/>
             </a:pPr>
             <a:r>
@@ -7671,7 +7695,7 @@
           <a:bodyPr wrap="square" lIns="0" tIns="0" rIns="0" bIns="0" rtlCol="0" anchor="ctr"/>
           <a:lstStyle/>
           <a:p>
-            <a:pPr algn="r" indent="0" marL="0">
+            <a:pPr marL="0" indent="0" algn="r">
               <a:buNone/>
             </a:pPr>
             <a:r>
@@ -7713,6 +7737,13 @@
             <a:prstDash val="solid"/>
           </a:ln>
         </p:spPr>
+        <p:txBody>
+          <a:bodyPr/>
+          <a:lstStyle/>
+          <a:p>
+            <a:endParaRPr lang="en-US"/>
+          </a:p>
+        </p:txBody>
       </p:sp>
       <p:sp>
         <p:nvSpPr>
@@ -7733,6 +7764,13 @@
           </a:solidFill>
           <a:ln/>
         </p:spPr>
+        <p:txBody>
+          <a:bodyPr/>
+          <a:lstStyle/>
+          <a:p>
+            <a:endParaRPr lang="en-US"/>
+          </a:p>
+        </p:txBody>
       </p:sp>
       <p:sp>
         <p:nvSpPr>
@@ -7755,7 +7793,7 @@
           <a:bodyPr wrap="square" lIns="0" tIns="0" rIns="0" bIns="0" rtlCol="0" anchor="ctr"/>
           <a:lstStyle/>
           <a:p>
-            <a:pPr indent="0" marL="0">
+            <a:pPr marL="0" indent="0">
               <a:buNone/>
             </a:pPr>
             <a:r>
@@ -7794,7 +7832,7 @@
           <a:bodyPr wrap="square" lIns="0" tIns="0" rIns="0" bIns="0" rtlCol="0" anchor="t"/>
           <a:lstStyle/>
           <a:p>
-            <a:pPr indent="0" marL="0">
+            <a:pPr marL="0" indent="0">
               <a:lnSpc>
                 <a:spcPct val="95000"/>
               </a:lnSpc>
@@ -7836,7 +7874,7 @@
           <a:bodyPr wrap="square" lIns="0" tIns="0" rIns="0" bIns="0" rtlCol="0" anchor="ctr"/>
           <a:lstStyle/>
           <a:p>
-            <a:pPr algn="r" indent="0" marL="0">
+            <a:pPr marL="0" indent="0" algn="r">
               <a:buNone/>
             </a:pPr>
             <a:r>
@@ -7875,7 +7913,7 @@
           <a:bodyPr wrap="square" lIns="0" tIns="0" rIns="0" bIns="0" rtlCol="0" anchor="ctr"/>
           <a:lstStyle/>
           <a:p>
-            <a:pPr algn="r" indent="0" marL="0">
+            <a:pPr marL="0" indent="0" algn="r">
               <a:buNone/>
             </a:pPr>
             <a:r>
@@ -7917,6 +7955,13 @@
             <a:prstDash val="solid"/>
           </a:ln>
         </p:spPr>
+        <p:txBody>
+          <a:bodyPr/>
+          <a:lstStyle/>
+          <a:p>
+            <a:endParaRPr lang="en-US"/>
+          </a:p>
+        </p:txBody>
       </p:sp>
       <p:sp>
         <p:nvSpPr>
@@ -7937,6 +7982,13 @@
           </a:solidFill>
           <a:ln/>
         </p:spPr>
+        <p:txBody>
+          <a:bodyPr/>
+          <a:lstStyle/>
+          <a:p>
+            <a:endParaRPr lang="en-US"/>
+          </a:p>
+        </p:txBody>
       </p:sp>
       <p:sp>
         <p:nvSpPr>
@@ -7959,7 +8011,7 @@
           <a:bodyPr wrap="square" lIns="0" tIns="0" rIns="0" bIns="0" rtlCol="0" anchor="ctr"/>
           <a:lstStyle/>
           <a:p>
-            <a:pPr indent="0" marL="0">
+            <a:pPr marL="0" indent="0">
               <a:buNone/>
             </a:pPr>
             <a:r>
@@ -7998,7 +8050,7 @@
           <a:bodyPr wrap="square" lIns="0" tIns="0" rIns="0" bIns="0" rtlCol="0" anchor="t"/>
           <a:lstStyle/>
           <a:p>
-            <a:pPr indent="0" marL="0">
+            <a:pPr marL="0" indent="0">
               <a:lnSpc>
                 <a:spcPct val="95000"/>
               </a:lnSpc>
@@ -8040,7 +8092,7 @@
           <a:bodyPr wrap="square" lIns="0" tIns="0" rIns="0" bIns="0" rtlCol="0" anchor="ctr"/>
           <a:lstStyle/>
           <a:p>
-            <a:pPr algn="r" indent="0" marL="0">
+            <a:pPr marL="0" indent="0" algn="r">
               <a:buNone/>
             </a:pPr>
             <a:r>
@@ -8079,7 +8131,7 @@
           <a:bodyPr wrap="square" lIns="0" tIns="0" rIns="0" bIns="0" rtlCol="0" anchor="ctr"/>
           <a:lstStyle/>
           <a:p>
-            <a:pPr algn="r" indent="0" marL="0">
+            <a:pPr marL="0" indent="0" algn="r">
               <a:buNone/>
             </a:pPr>
             <a:r>
@@ -8118,7 +8170,7 @@
           <a:bodyPr wrap="square" lIns="0" tIns="0" rIns="0" bIns="0" rtlCol="0" anchor="ctr"/>
           <a:lstStyle/>
           <a:p>
-            <a:pPr indent="0" marL="0">
+            <a:pPr marL="0" indent="0">
               <a:buNone/>
             </a:pPr>
             <a:r>
@@ -8157,11 +8209,8 @@
           <a:bodyPr wrap="square" lIns="0" tIns="0" rIns="0" bIns="0" rtlCol="0" anchor="ctr"/>
           <a:lstStyle/>
           <a:p>
-            <a:pPr algn="l" indent="0" marL="0">
-              <a:buNone/>
-            </a:pPr>
-            <a:r>
-              <a:rPr lang="en-US" sz="850" spc="200" kern="0" dirty="0">
+            <a:r>
+              <a:rPr lang="en-US" sz="850" kern="0" spc="200" dirty="0" err="1">
                 <a:solidFill>
                   <a:srgbClr val="6B7280"/>
                 </a:solidFill>
@@ -8169,7 +8218,7 @@
                 <a:ea typeface="Georgia" pitchFamily="34" charset="-122"/>
                 <a:cs typeface="Georgia" pitchFamily="34" charset="-120"/>
               </a:rPr>
-              <a:t>TRANSAKT</a:t>
+              <a:t>BlockMed</a:t>
             </a:r>
             <a:endParaRPr lang="en-US" sz="850" dirty="0"/>
           </a:p>
@@ -8196,7 +8245,7 @@
           <a:bodyPr wrap="square" lIns="0" tIns="0" rIns="0" bIns="0" rtlCol="0" anchor="ctr"/>
           <a:lstStyle/>
           <a:p>
-            <a:pPr algn="r" indent="0" marL="0">
+            <a:pPr marL="0" indent="0" algn="r">
               <a:buNone/>
             </a:pPr>
             <a:r>
@@ -8230,6 +8279,7 @@
         <a:solidFill>
           <a:srgbClr val="0B1B3A"/>
         </a:solidFill>
+        <a:effectLst/>
       </p:bgPr>
     </p:bg>
     <p:spTree>
@@ -8265,6 +8315,13 @@
           </a:solidFill>
           <a:ln/>
         </p:spPr>
+        <p:txBody>
+          <a:bodyPr/>
+          <a:lstStyle/>
+          <a:p>
+            <a:endParaRPr lang="en-US"/>
+          </a:p>
+        </p:txBody>
       </p:sp>
       <p:sp>
         <p:nvSpPr>
@@ -8287,11 +8344,11 @@
           <a:bodyPr wrap="square" lIns="0" tIns="0" rIns="0" bIns="0" rtlCol="0" anchor="ctr"/>
           <a:lstStyle/>
           <a:p>
-            <a:pPr indent="0" marL="0">
-              <a:buNone/>
-            </a:pPr>
-            <a:r>
-              <a:rPr lang="en-US" sz="1100" b="1" spc="300" kern="0" dirty="0">
+            <a:pPr marL="0" indent="0">
+              <a:buNone/>
+            </a:pPr>
+            <a:r>
+              <a:rPr lang="en-US" sz="1100" b="1" kern="0" spc="300" dirty="0">
                 <a:solidFill>
                   <a:srgbClr val="0E8C7F"/>
                 </a:solidFill>
@@ -8326,7 +8383,7 @@
           <a:bodyPr wrap="square" lIns="0" tIns="0" rIns="0" bIns="0" rtlCol="0" anchor="ctr"/>
           <a:lstStyle/>
           <a:p>
-            <a:pPr indent="0" marL="0">
+            <a:pPr marL="0" indent="0">
               <a:buNone/>
             </a:pPr>
             <a:r>
@@ -8368,6 +8425,13 @@
             <a:prstDash val="solid"/>
           </a:ln>
         </p:spPr>
+        <p:txBody>
+          <a:bodyPr/>
+          <a:lstStyle/>
+          <a:p>
+            <a:endParaRPr lang="en-US"/>
+          </a:p>
+        </p:txBody>
       </p:sp>
       <p:sp>
         <p:nvSpPr>
@@ -8390,7 +8454,7 @@
           <a:bodyPr wrap="square" lIns="0" tIns="0" rIns="0" bIns="0" rtlCol="0" anchor="ctr"/>
           <a:lstStyle/>
           <a:p>
-            <a:pPr algn="ctr" indent="0" marL="0">
+            <a:pPr marL="0" indent="0" algn="ctr">
               <a:buNone/>
             </a:pPr>
             <a:r>
@@ -8429,7 +8493,7 @@
           <a:bodyPr wrap="square" lIns="0" tIns="0" rIns="0" bIns="0" rtlCol="0" anchor="ctr"/>
           <a:lstStyle/>
           <a:p>
-            <a:pPr algn="ctr" indent="0" marL="0">
+            <a:pPr marL="0" indent="0" algn="ctr">
               <a:buNone/>
             </a:pPr>
             <a:r>
@@ -8471,6 +8535,13 @@
             <a:prstDash val="solid"/>
           </a:ln>
         </p:spPr>
+        <p:txBody>
+          <a:bodyPr/>
+          <a:lstStyle/>
+          <a:p>
+            <a:endParaRPr lang="en-US"/>
+          </a:p>
+        </p:txBody>
       </p:sp>
       <p:sp>
         <p:nvSpPr>
@@ -8493,7 +8564,7 @@
           <a:bodyPr wrap="square" lIns="0" tIns="0" rIns="0" bIns="0" rtlCol="0" anchor="ctr"/>
           <a:lstStyle/>
           <a:p>
-            <a:pPr algn="ctr" indent="0" marL="0">
+            <a:pPr marL="0" indent="0" algn="ctr">
               <a:buNone/>
             </a:pPr>
             <a:r>
@@ -8532,7 +8603,7 @@
           <a:bodyPr wrap="square" lIns="0" tIns="0" rIns="0" bIns="0" rtlCol="0" anchor="ctr"/>
           <a:lstStyle/>
           <a:p>
-            <a:pPr algn="ctr" indent="0" marL="0">
+            <a:pPr marL="0" indent="0" algn="ctr">
               <a:buNone/>
             </a:pPr>
             <a:r>
@@ -8574,6 +8645,13 @@
             <a:prstDash val="solid"/>
           </a:ln>
         </p:spPr>
+        <p:txBody>
+          <a:bodyPr/>
+          <a:lstStyle/>
+          <a:p>
+            <a:endParaRPr lang="en-US"/>
+          </a:p>
+        </p:txBody>
       </p:sp>
       <p:sp>
         <p:nvSpPr>
@@ -8596,7 +8674,7 @@
           <a:bodyPr wrap="square" lIns="0" tIns="0" rIns="0" bIns="0" rtlCol="0" anchor="ctr"/>
           <a:lstStyle/>
           <a:p>
-            <a:pPr algn="ctr" indent="0" marL="0">
+            <a:pPr marL="0" indent="0" algn="ctr">
               <a:buNone/>
             </a:pPr>
             <a:r>
@@ -8635,7 +8713,7 @@
           <a:bodyPr wrap="square" lIns="0" tIns="0" rIns="0" bIns="0" rtlCol="0" anchor="ctr"/>
           <a:lstStyle/>
           <a:p>
-            <a:pPr algn="ctr" indent="0" marL="0">
+            <a:pPr marL="0" indent="0" algn="ctr">
               <a:buNone/>
             </a:pPr>
             <a:r>
@@ -8674,11 +8752,11 @@
           <a:bodyPr wrap="square" lIns="0" tIns="0" rIns="0" bIns="0" rtlCol="0" anchor="ctr"/>
           <a:lstStyle/>
           <a:p>
-            <a:pPr indent="0" marL="0">
-              <a:buNone/>
-            </a:pPr>
-            <a:r>
-              <a:rPr lang="en-US" sz="1100" b="1" spc="200" kern="0" dirty="0">
+            <a:pPr marL="0" indent="0">
+              <a:buNone/>
+            </a:pPr>
+            <a:r>
+              <a:rPr lang="en-US" sz="1100" b="1" kern="0" spc="200" dirty="0">
                 <a:solidFill>
                   <a:srgbClr val="0E8C7F"/>
                 </a:solidFill>
@@ -8713,7 +8791,7 @@
           <a:bodyPr wrap="square" lIns="0" tIns="0" rIns="0" bIns="0" rtlCol="0" anchor="t"/>
           <a:lstStyle/>
           <a:p>
-            <a:pPr algn="l" marL="152400" indent="-152400">
+            <a:pPr marL="152400" indent="-152400" algn="l">
               <a:spcAft>
                 <a:spcPts val="600"/>
               </a:spcAft>
@@ -8734,7 +8812,7 @@
             <a:endParaRPr lang="en-US" sz="1300" dirty="0"/>
           </a:p>
           <a:p>
-            <a:pPr algn="l" marL="152400" indent="-152400">
+            <a:pPr marL="152400" indent="-152400" algn="l">
               <a:spcAft>
                 <a:spcPts val="600"/>
               </a:spcAft>
@@ -8755,7 +8833,7 @@
             <a:endParaRPr lang="en-US" sz="1300" dirty="0"/>
           </a:p>
           <a:p>
-            <a:pPr algn="l" marL="152400" indent="-152400">
+            <a:pPr marL="152400" indent="-152400" algn="l">
               <a:spcAft>
                 <a:spcPts val="600"/>
               </a:spcAft>
@@ -8776,7 +8854,7 @@
             <a:endParaRPr lang="en-US" sz="1300" dirty="0"/>
           </a:p>
           <a:p>
-            <a:pPr algn="l" marL="152400" indent="-152400">
+            <a:pPr marL="152400" indent="-152400" algn="l">
               <a:spcAft>
                 <a:spcPts val="600"/>
               </a:spcAft>
@@ -8797,7 +8875,7 @@
             <a:endParaRPr lang="en-US" sz="1300" dirty="0"/>
           </a:p>
           <a:p>
-            <a:pPr algn="l" marL="152400" indent="-152400">
+            <a:pPr marL="152400" indent="-152400" algn="l">
               <a:spcAft>
                 <a:spcPts val="600"/>
               </a:spcAft>
@@ -8840,11 +8918,11 @@
           <a:bodyPr wrap="square" lIns="0" tIns="0" rIns="0" bIns="0" rtlCol="0" anchor="ctr"/>
           <a:lstStyle/>
           <a:p>
-            <a:pPr indent="0" marL="0">
-              <a:buNone/>
-            </a:pPr>
-            <a:r>
-              <a:rPr lang="en-US" sz="1100" b="1" spc="200" kern="0" dirty="0">
+            <a:pPr marL="0" indent="0">
+              <a:buNone/>
+            </a:pPr>
+            <a:r>
+              <a:rPr lang="en-US" sz="1100" b="1" kern="0" spc="200" dirty="0">
                 <a:solidFill>
                   <a:srgbClr val="0E8C7F"/>
                 </a:solidFill>
@@ -8879,7 +8957,7 @@
           <a:bodyPr wrap="square" lIns="0" tIns="0" rIns="0" bIns="0" rtlCol="0" anchor="t"/>
           <a:lstStyle/>
           <a:p>
-            <a:pPr algn="l" marL="152400" indent="-152400">
+            <a:pPr marL="152400" indent="-152400" algn="l">
               <a:spcAft>
                 <a:spcPts val="800"/>
               </a:spcAft>
@@ -8900,7 +8978,7 @@
             <a:endParaRPr lang="en-US" sz="1300" dirty="0"/>
           </a:p>
           <a:p>
-            <a:pPr algn="l" marL="152400" indent="-152400">
+            <a:pPr marL="152400" indent="-152400" algn="l">
               <a:spcAft>
                 <a:spcPts val="800"/>
               </a:spcAft>
@@ -8921,7 +8999,7 @@
             <a:endParaRPr lang="en-US" sz="1300" dirty="0"/>
           </a:p>
           <a:p>
-            <a:pPr algn="l" marL="152400" indent="-152400">
+            <a:pPr marL="152400" indent="-152400" algn="l">
               <a:spcAft>
                 <a:spcPts val="800"/>
               </a:spcAft>
@@ -8964,7 +9042,7 @@
           <a:bodyPr wrap="square" lIns="0" tIns="0" rIns="0" bIns="0" rtlCol="0" anchor="ctr"/>
           <a:lstStyle/>
           <a:p>
-            <a:pPr indent="0" marL="0">
+            <a:pPr marL="0" indent="0">
               <a:buNone/>
             </a:pPr>
             <a:r>
@@ -9003,7 +9081,7 @@
           <a:bodyPr wrap="square" lIns="0" tIns="0" rIns="0" bIns="0" rtlCol="0" anchor="ctr"/>
           <a:lstStyle/>
           <a:p>
-            <a:pPr algn="r" indent="0" marL="0">
+            <a:pPr marL="0" indent="0" algn="r">
               <a:buNone/>
             </a:pPr>
             <a:r>
@@ -9037,6 +9115,7 @@
         <a:solidFill>
           <a:srgbClr val="0B1B3A"/>
         </a:solidFill>
+        <a:effectLst/>
       </p:bgPr>
     </p:bg>
     <p:spTree>
@@ -9074,11 +9153,11 @@
           <a:bodyPr wrap="square" lIns="0" tIns="0" rIns="0" bIns="0" rtlCol="0" anchor="ctr"/>
           <a:lstStyle/>
           <a:p>
-            <a:pPr indent="0" marL="0">
-              <a:buNone/>
-            </a:pPr>
-            <a:r>
-              <a:rPr lang="en-US" sz="1100" b="1" spc="300" kern="0" dirty="0">
+            <a:pPr marL="0" indent="0">
+              <a:buNone/>
+            </a:pPr>
+            <a:r>
+              <a:rPr lang="en-US" sz="1100" b="1" kern="0" spc="300" dirty="0">
                 <a:solidFill>
                   <a:srgbClr val="0E8C7F"/>
                 </a:solidFill>
@@ -9113,7 +9192,7 @@
           <a:bodyPr wrap="square" lIns="0" tIns="0" rIns="0" bIns="0" rtlCol="0" anchor="ctr"/>
           <a:lstStyle/>
           <a:p>
-            <a:pPr indent="0" marL="0">
+            <a:pPr marL="0" indent="0">
               <a:buNone/>
             </a:pPr>
             <a:r>
@@ -9155,6 +9234,13 @@
             <a:prstDash val="solid"/>
           </a:ln>
         </p:spPr>
+        <p:txBody>
+          <a:bodyPr/>
+          <a:lstStyle/>
+          <a:p>
+            <a:endParaRPr lang="en-US"/>
+          </a:p>
+        </p:txBody>
       </p:sp>
       <p:sp>
         <p:nvSpPr>
@@ -9175,6 +9261,13 @@
           </a:solidFill>
           <a:ln/>
         </p:spPr>
+        <p:txBody>
+          <a:bodyPr/>
+          <a:lstStyle/>
+          <a:p>
+            <a:endParaRPr lang="en-US"/>
+          </a:p>
+        </p:txBody>
       </p:sp>
       <p:sp>
         <p:nvSpPr>
@@ -9197,11 +9290,11 @@
           <a:bodyPr wrap="square" lIns="0" tIns="0" rIns="0" bIns="0" rtlCol="0" anchor="ctr"/>
           <a:lstStyle/>
           <a:p>
-            <a:pPr indent="0" marL="0">
-              <a:buNone/>
-            </a:pPr>
-            <a:r>
-              <a:rPr lang="en-US" sz="1200" b="1" spc="200" kern="0" dirty="0">
+            <a:pPr marL="0" indent="0">
+              <a:buNone/>
+            </a:pPr>
+            <a:r>
+              <a:rPr lang="en-US" sz="1200" b="1" kern="0" spc="200" dirty="0">
                 <a:solidFill>
                   <a:srgbClr val="9FE3D8"/>
                 </a:solidFill>
@@ -9236,7 +9329,7 @@
           <a:bodyPr wrap="square" lIns="0" tIns="0" rIns="0" bIns="0" rtlCol="0" anchor="ctr"/>
           <a:lstStyle/>
           <a:p>
-            <a:pPr indent="0" marL="0">
+            <a:pPr marL="0" indent="0">
               <a:buNone/>
             </a:pPr>
             <a:r>
@@ -9256,14 +9349,14 @@
       </p:sp>
       <p:pic>
         <p:nvPicPr>
-          <p:cNvPr id="8" name="Image 0" descr="preencoded.png">    </p:cNvPr>
+          <p:cNvPr id="8" name="Image 0" descr="preencoded.png"/>
           <p:cNvPicPr>
             <a:picLocks noChangeAspect="1"/>
           </p:cNvPicPr>
           <p:nvPr/>
         </p:nvPicPr>
         <p:blipFill>
-          <a:blip r:embed="rId1"/>
+          <a:blip r:embed="rId3"/>
           <a:stretch>
             <a:fillRect/>
           </a:stretch>
@@ -9299,7 +9392,7 @@
           <a:bodyPr wrap="square" lIns="0" tIns="0" rIns="0" bIns="0" rtlCol="0" anchor="ctr"/>
           <a:lstStyle/>
           <a:p>
-            <a:pPr indent="0" marL="0">
+            <a:pPr marL="0" indent="0">
               <a:buNone/>
             </a:pPr>
             <a:r>
@@ -9319,14 +9412,14 @@
       </p:sp>
       <p:pic>
         <p:nvPicPr>
-          <p:cNvPr id="10" name="Image 1" descr="preencoded.png">    </p:cNvPr>
+          <p:cNvPr id="10" name="Image 1" descr="preencoded.png"/>
           <p:cNvPicPr>
             <a:picLocks noChangeAspect="1"/>
           </p:cNvPicPr>
           <p:nvPr/>
         </p:nvPicPr>
         <p:blipFill>
-          <a:blip r:embed="rId2"/>
+          <a:blip r:embed="rId4"/>
           <a:stretch>
             <a:fillRect/>
           </a:stretch>
@@ -9362,7 +9455,7 @@
           <a:bodyPr wrap="square" lIns="0" tIns="0" rIns="0" bIns="0" rtlCol="0" anchor="ctr"/>
           <a:lstStyle/>
           <a:p>
-            <a:pPr indent="0" marL="0">
+            <a:pPr marL="0" indent="0">
               <a:buNone/>
             </a:pPr>
             <a:r>
@@ -9404,6 +9497,13 @@
             <a:prstDash val="solid"/>
           </a:ln>
         </p:spPr>
+        <p:txBody>
+          <a:bodyPr/>
+          <a:lstStyle/>
+          <a:p>
+            <a:endParaRPr lang="en-US"/>
+          </a:p>
+        </p:txBody>
       </p:sp>
       <p:sp>
         <p:nvSpPr>
@@ -9424,6 +9524,13 @@
           </a:solidFill>
           <a:ln/>
         </p:spPr>
+        <p:txBody>
+          <a:bodyPr/>
+          <a:lstStyle/>
+          <a:p>
+            <a:endParaRPr lang="en-US"/>
+          </a:p>
+        </p:txBody>
       </p:sp>
       <p:sp>
         <p:nvSpPr>
@@ -9446,11 +9553,11 @@
           <a:bodyPr wrap="square" lIns="0" tIns="0" rIns="0" bIns="0" rtlCol="0" anchor="ctr"/>
           <a:lstStyle/>
           <a:p>
-            <a:pPr indent="0" marL="0">
-              <a:buNone/>
-            </a:pPr>
-            <a:r>
-              <a:rPr lang="en-US" sz="1200" b="1" spc="200" kern="0" dirty="0">
+            <a:pPr marL="0" indent="0">
+              <a:buNone/>
+            </a:pPr>
+            <a:r>
+              <a:rPr lang="en-US" sz="1200" b="1" kern="0" spc="200" dirty="0">
                 <a:solidFill>
                   <a:srgbClr val="9FE3D8"/>
                 </a:solidFill>
@@ -9485,7 +9592,7 @@
           <a:bodyPr wrap="square" lIns="0" tIns="0" rIns="0" bIns="0" rtlCol="0" anchor="ctr"/>
           <a:lstStyle/>
           <a:p>
-            <a:pPr indent="0" marL="0">
+            <a:pPr marL="0" indent="0">
               <a:buNone/>
             </a:pPr>
             <a:r>
@@ -9505,7 +9612,7 @@
       </p:sp>
       <p:pic>
         <p:nvPicPr>
-          <p:cNvPr id="16" name="Image 2" descr="preencoded.png">    </p:cNvPr>
+          <p:cNvPr id="16" name="Image 2" descr="preencoded.png"/>
           <p:cNvPicPr>
             <a:picLocks noChangeAspect="1"/>
           </p:cNvPicPr>
@@ -9548,7 +9655,7 @@
           <a:bodyPr wrap="square" lIns="0" tIns="0" rIns="0" bIns="0" rtlCol="0" anchor="ctr"/>
           <a:lstStyle/>
           <a:p>
-            <a:pPr indent="0" marL="0">
+            <a:pPr marL="0" indent="0">
               <a:buNone/>
             </a:pPr>
             <a:r>
@@ -9568,7 +9675,7 @@
       </p:sp>
       <p:pic>
         <p:nvPicPr>
-          <p:cNvPr id="18" name="Image 3" descr="preencoded.png">    </p:cNvPr>
+          <p:cNvPr id="18" name="Image 3" descr="preencoded.png"/>
           <p:cNvPicPr>
             <a:picLocks noChangeAspect="1"/>
           </p:cNvPicPr>
@@ -9611,7 +9718,7 @@
           <a:bodyPr wrap="square" lIns="0" tIns="0" rIns="0" bIns="0" rtlCol="0" anchor="ctr"/>
           <a:lstStyle/>
           <a:p>
-            <a:pPr indent="0" marL="0">
+            <a:pPr marL="0" indent="0">
               <a:buNone/>
             </a:pPr>
             <a:r>
@@ -9653,6 +9760,13 @@
             <a:prstDash val="solid"/>
           </a:ln>
         </p:spPr>
+        <p:txBody>
+          <a:bodyPr/>
+          <a:lstStyle/>
+          <a:p>
+            <a:endParaRPr lang="en-US"/>
+          </a:p>
+        </p:txBody>
       </p:sp>
       <p:sp>
         <p:nvSpPr>
@@ -9673,6 +9787,13 @@
           </a:solidFill>
           <a:ln/>
         </p:spPr>
+        <p:txBody>
+          <a:bodyPr/>
+          <a:lstStyle/>
+          <a:p>
+            <a:endParaRPr lang="en-US"/>
+          </a:p>
+        </p:txBody>
       </p:sp>
       <p:sp>
         <p:nvSpPr>
@@ -9695,11 +9816,11 @@
           <a:bodyPr wrap="square" lIns="0" tIns="0" rIns="0" bIns="0" rtlCol="0" anchor="ctr"/>
           <a:lstStyle/>
           <a:p>
-            <a:pPr indent="0" marL="0">
-              <a:buNone/>
-            </a:pPr>
-            <a:r>
-              <a:rPr lang="en-US" sz="1200" b="1" spc="200" kern="0" dirty="0">
+            <a:pPr marL="0" indent="0">
+              <a:buNone/>
+            </a:pPr>
+            <a:r>
+              <a:rPr lang="en-US" sz="1200" b="1" kern="0" spc="200" dirty="0">
                 <a:solidFill>
                   <a:srgbClr val="9FE3D8"/>
                 </a:solidFill>
@@ -9734,7 +9855,7 @@
           <a:bodyPr wrap="square" lIns="0" tIns="0" rIns="0" bIns="0" rtlCol="0" anchor="ctr"/>
           <a:lstStyle/>
           <a:p>
-            <a:pPr indent="0" marL="0">
+            <a:pPr marL="0" indent="0">
               <a:buNone/>
             </a:pPr>
             <a:r>
@@ -9754,14 +9875,14 @@
       </p:sp>
       <p:pic>
         <p:nvPicPr>
-          <p:cNvPr id="24" name="Image 4" descr="preencoded.png">    </p:cNvPr>
+          <p:cNvPr id="24" name="Image 4" descr="preencoded.png"/>
           <p:cNvPicPr>
             <a:picLocks noChangeAspect="1"/>
           </p:cNvPicPr>
           <p:nvPr/>
         </p:nvPicPr>
         <p:blipFill>
-          <a:blip r:embed="rId5"/>
+          <a:blip r:embed="rId3"/>
           <a:stretch>
             <a:fillRect/>
           </a:stretch>
@@ -9797,7 +9918,7 @@
           <a:bodyPr wrap="square" lIns="0" tIns="0" rIns="0" bIns="0" rtlCol="0" anchor="ctr"/>
           <a:lstStyle/>
           <a:p>
-            <a:pPr indent="0" marL="0">
+            <a:pPr marL="0" indent="0">
               <a:buNone/>
             </a:pPr>
             <a:r>
@@ -9817,14 +9938,14 @@
       </p:sp>
       <p:pic>
         <p:nvPicPr>
-          <p:cNvPr id="26" name="Image 5" descr="preencoded.png">    </p:cNvPr>
+          <p:cNvPr id="26" name="Image 5" descr="preencoded.png"/>
           <p:cNvPicPr>
             <a:picLocks noChangeAspect="1"/>
           </p:cNvPicPr>
           <p:nvPr/>
         </p:nvPicPr>
         <p:blipFill>
-          <a:blip r:embed="rId6"/>
+          <a:blip r:embed="rId4"/>
           <a:stretch>
             <a:fillRect/>
           </a:stretch>
@@ -9860,7 +9981,7 @@
           <a:bodyPr wrap="square" lIns="0" tIns="0" rIns="0" bIns="0" rtlCol="0" anchor="ctr"/>
           <a:lstStyle/>
           <a:p>
-            <a:pPr indent="0" marL="0">
+            <a:pPr marL="0" indent="0">
               <a:buNone/>
             </a:pPr>
             <a:r>
@@ -9902,6 +10023,13 @@
             <a:prstDash val="solid"/>
           </a:ln>
         </p:spPr>
+        <p:txBody>
+          <a:bodyPr/>
+          <a:lstStyle/>
+          <a:p>
+            <a:endParaRPr lang="en-US"/>
+          </a:p>
+        </p:txBody>
       </p:sp>
       <p:sp>
         <p:nvSpPr>
@@ -9922,6 +10050,13 @@
           </a:solidFill>
           <a:ln/>
         </p:spPr>
+        <p:txBody>
+          <a:bodyPr/>
+          <a:lstStyle/>
+          <a:p>
+            <a:endParaRPr lang="en-US"/>
+          </a:p>
+        </p:txBody>
       </p:sp>
       <p:sp>
         <p:nvSpPr>
@@ -9944,11 +10079,11 @@
           <a:bodyPr wrap="square" lIns="0" tIns="0" rIns="0" bIns="0" rtlCol="0" anchor="ctr"/>
           <a:lstStyle/>
           <a:p>
-            <a:pPr indent="0" marL="0">
-              <a:buNone/>
-            </a:pPr>
-            <a:r>
-              <a:rPr lang="en-US" sz="1200" b="1" spc="200" kern="0" dirty="0">
+            <a:pPr marL="0" indent="0">
+              <a:buNone/>
+            </a:pPr>
+            <a:r>
+              <a:rPr lang="en-US" sz="1200" b="1" kern="0" spc="200" dirty="0">
                 <a:solidFill>
                   <a:srgbClr val="9FE3D8"/>
                 </a:solidFill>
@@ -9983,7 +10118,7 @@
           <a:bodyPr wrap="square" lIns="0" tIns="0" rIns="0" bIns="0" rtlCol="0" anchor="ctr"/>
           <a:lstStyle/>
           <a:p>
-            <a:pPr indent="0" marL="0">
+            <a:pPr marL="0" indent="0">
               <a:buNone/>
             </a:pPr>
             <a:r>
@@ -10003,14 +10138,14 @@
       </p:sp>
       <p:pic>
         <p:nvPicPr>
-          <p:cNvPr id="32" name="Image 6" descr="preencoded.png">    </p:cNvPr>
+          <p:cNvPr id="32" name="Image 6" descr="preencoded.png"/>
           <p:cNvPicPr>
             <a:picLocks noChangeAspect="1"/>
           </p:cNvPicPr>
           <p:nvPr/>
         </p:nvPicPr>
         <p:blipFill>
-          <a:blip r:embed="rId7"/>
+          <a:blip r:embed="rId3"/>
           <a:stretch>
             <a:fillRect/>
           </a:stretch>
@@ -10046,7 +10181,7 @@
           <a:bodyPr wrap="square" lIns="0" tIns="0" rIns="0" bIns="0" rtlCol="0" anchor="ctr"/>
           <a:lstStyle/>
           <a:p>
-            <a:pPr indent="0" marL="0">
+            <a:pPr marL="0" indent="0">
               <a:buNone/>
             </a:pPr>
             <a:r>
@@ -10066,14 +10201,14 @@
       </p:sp>
       <p:pic>
         <p:nvPicPr>
-          <p:cNvPr id="34" name="Image 7" descr="preencoded.png">    </p:cNvPr>
+          <p:cNvPr id="34" name="Image 7" descr="preencoded.png"/>
           <p:cNvPicPr>
             <a:picLocks noChangeAspect="1"/>
           </p:cNvPicPr>
           <p:nvPr/>
         </p:nvPicPr>
         <p:blipFill>
-          <a:blip r:embed="rId8"/>
+          <a:blip r:embed="rId4"/>
           <a:stretch>
             <a:fillRect/>
           </a:stretch>
@@ -10109,7 +10244,7 @@
           <a:bodyPr wrap="square" lIns="0" tIns="0" rIns="0" bIns="0" rtlCol="0" anchor="ctr"/>
           <a:lstStyle/>
           <a:p>
-            <a:pPr indent="0" marL="0">
+            <a:pPr marL="0" indent="0">
               <a:buNone/>
             </a:pPr>
             <a:r>
@@ -10151,6 +10286,13 @@
             <a:prstDash val="solid"/>
           </a:ln>
         </p:spPr>
+        <p:txBody>
+          <a:bodyPr/>
+          <a:lstStyle/>
+          <a:p>
+            <a:endParaRPr lang="en-US"/>
+          </a:p>
+        </p:txBody>
       </p:sp>
       <p:sp>
         <p:nvSpPr>
@@ -10171,6 +10313,13 @@
           </a:solidFill>
           <a:ln/>
         </p:spPr>
+        <p:txBody>
+          <a:bodyPr/>
+          <a:lstStyle/>
+          <a:p>
+            <a:endParaRPr lang="en-US"/>
+          </a:p>
+        </p:txBody>
       </p:sp>
       <p:sp>
         <p:nvSpPr>
@@ -10193,11 +10342,11 @@
           <a:bodyPr wrap="square" lIns="0" tIns="0" rIns="0" bIns="0" rtlCol="0" anchor="ctr"/>
           <a:lstStyle/>
           <a:p>
-            <a:pPr indent="0" marL="0">
-              <a:buNone/>
-            </a:pPr>
-            <a:r>
-              <a:rPr lang="en-US" sz="1200" b="1" spc="200" kern="0" dirty="0">
+            <a:pPr marL="0" indent="0">
+              <a:buNone/>
+            </a:pPr>
+            <a:r>
+              <a:rPr lang="en-US" sz="1200" b="1" kern="0" spc="200" dirty="0">
                 <a:solidFill>
                   <a:srgbClr val="9FE3D8"/>
                 </a:solidFill>
@@ -10232,7 +10381,7 @@
           <a:bodyPr wrap="square" lIns="0" tIns="0" rIns="0" bIns="0" rtlCol="0" anchor="ctr"/>
           <a:lstStyle/>
           <a:p>
-            <a:pPr indent="0" marL="0">
+            <a:pPr marL="0" indent="0">
               <a:buNone/>
             </a:pPr>
             <a:r>
@@ -10252,14 +10401,14 @@
       </p:sp>
       <p:pic>
         <p:nvPicPr>
-          <p:cNvPr id="40" name="Image 8" descr="preencoded.png">    </p:cNvPr>
+          <p:cNvPr id="40" name="Image 8" descr="preencoded.png"/>
           <p:cNvPicPr>
             <a:picLocks noChangeAspect="1"/>
           </p:cNvPicPr>
           <p:nvPr/>
         </p:nvPicPr>
         <p:blipFill>
-          <a:blip r:embed="rId9"/>
+          <a:blip r:embed="rId3"/>
           <a:stretch>
             <a:fillRect/>
           </a:stretch>
@@ -10295,7 +10444,7 @@
           <a:bodyPr wrap="square" lIns="0" tIns="0" rIns="0" bIns="0" rtlCol="0" anchor="ctr"/>
           <a:lstStyle/>
           <a:p>
-            <a:pPr indent="0" marL="0">
+            <a:pPr marL="0" indent="0">
               <a:buNone/>
             </a:pPr>
             <a:r>
@@ -10315,14 +10464,14 @@
       </p:sp>
       <p:pic>
         <p:nvPicPr>
-          <p:cNvPr id="42" name="Image 9" descr="preencoded.png">    </p:cNvPr>
+          <p:cNvPr id="42" name="Image 9" descr="preencoded.png"/>
           <p:cNvPicPr>
             <a:picLocks noChangeAspect="1"/>
           </p:cNvPicPr>
           <p:nvPr/>
         </p:nvPicPr>
         <p:blipFill>
-          <a:blip r:embed="rId10"/>
+          <a:blip r:embed="rId4"/>
           <a:stretch>
             <a:fillRect/>
           </a:stretch>
@@ -10358,7 +10507,7 @@
           <a:bodyPr wrap="square" lIns="0" tIns="0" rIns="0" bIns="0" rtlCol="0" anchor="ctr"/>
           <a:lstStyle/>
           <a:p>
-            <a:pPr indent="0" marL="0">
+            <a:pPr marL="0" indent="0">
               <a:buNone/>
             </a:pPr>
             <a:r>
@@ -10400,6 +10549,13 @@
             <a:prstDash val="solid"/>
           </a:ln>
         </p:spPr>
+        <p:txBody>
+          <a:bodyPr/>
+          <a:lstStyle/>
+          <a:p>
+            <a:endParaRPr lang="en-US"/>
+          </a:p>
+        </p:txBody>
       </p:sp>
       <p:sp>
         <p:nvSpPr>
@@ -10420,6 +10576,13 @@
           </a:solidFill>
           <a:ln/>
         </p:spPr>
+        <p:txBody>
+          <a:bodyPr/>
+          <a:lstStyle/>
+          <a:p>
+            <a:endParaRPr lang="en-US"/>
+          </a:p>
+        </p:txBody>
       </p:sp>
       <p:sp>
         <p:nvSpPr>
@@ -10442,11 +10605,11 @@
           <a:bodyPr wrap="square" lIns="0" tIns="0" rIns="0" bIns="0" rtlCol="0" anchor="ctr"/>
           <a:lstStyle/>
           <a:p>
-            <a:pPr indent="0" marL="0">
-              <a:buNone/>
-            </a:pPr>
-            <a:r>
-              <a:rPr lang="en-US" sz="1200" b="1" spc="200" kern="0" dirty="0">
+            <a:pPr marL="0" indent="0">
+              <a:buNone/>
+            </a:pPr>
+            <a:r>
+              <a:rPr lang="en-US" sz="1200" b="1" kern="0" spc="200" dirty="0">
                 <a:solidFill>
                   <a:srgbClr val="9FE3D8"/>
                 </a:solidFill>
@@ -10481,7 +10644,7 @@
           <a:bodyPr wrap="square" lIns="0" tIns="0" rIns="0" bIns="0" rtlCol="0" anchor="ctr"/>
           <a:lstStyle/>
           <a:p>
-            <a:pPr indent="0" marL="0">
+            <a:pPr marL="0" indent="0">
               <a:buNone/>
             </a:pPr>
             <a:r>
@@ -10501,14 +10664,14 @@
       </p:sp>
       <p:pic>
         <p:nvPicPr>
-          <p:cNvPr id="48" name="Image 10" descr="preencoded.png">    </p:cNvPr>
+          <p:cNvPr id="48" name="Image 10" descr="preencoded.png"/>
           <p:cNvPicPr>
             <a:picLocks noChangeAspect="1"/>
           </p:cNvPicPr>
           <p:nvPr/>
         </p:nvPicPr>
         <p:blipFill>
-          <a:blip r:embed="rId11"/>
+          <a:blip r:embed="rId3"/>
           <a:stretch>
             <a:fillRect/>
           </a:stretch>
@@ -10544,7 +10707,7 @@
           <a:bodyPr wrap="square" lIns="0" tIns="0" rIns="0" bIns="0" rtlCol="0" anchor="ctr"/>
           <a:lstStyle/>
           <a:p>
-            <a:pPr indent="0" marL="0">
+            <a:pPr marL="0" indent="0">
               <a:buNone/>
             </a:pPr>
             <a:r>
@@ -10564,14 +10727,14 @@
       </p:sp>
       <p:pic>
         <p:nvPicPr>
-          <p:cNvPr id="50" name="Image 11" descr="preencoded.png">    </p:cNvPr>
+          <p:cNvPr id="50" name="Image 11" descr="preencoded.png"/>
           <p:cNvPicPr>
             <a:picLocks noChangeAspect="1"/>
           </p:cNvPicPr>
           <p:nvPr/>
         </p:nvPicPr>
         <p:blipFill>
-          <a:blip r:embed="rId12"/>
+          <a:blip r:embed="rId4"/>
           <a:stretch>
             <a:fillRect/>
           </a:stretch>
@@ -10607,7 +10770,7 @@
           <a:bodyPr wrap="square" lIns="0" tIns="0" rIns="0" bIns="0" rtlCol="0" anchor="ctr"/>
           <a:lstStyle/>
           <a:p>
-            <a:pPr indent="0" marL="0">
+            <a:pPr marL="0" indent="0">
               <a:buNone/>
             </a:pPr>
             <a:r>
@@ -10646,7 +10809,7 @@
           <a:bodyPr wrap="square" lIns="0" tIns="0" rIns="0" bIns="0" rtlCol="0" anchor="ctr"/>
           <a:lstStyle/>
           <a:p>
-            <a:pPr indent="0" marL="0">
+            <a:pPr marL="0" indent="0">
               <a:buNone/>
             </a:pPr>
             <a:r>
@@ -10680,6 +10843,7 @@
         <a:solidFill>
           <a:srgbClr val="0B1B3A"/>
         </a:solidFill>
+        <a:effectLst/>
       </p:bgPr>
     </p:bg>
     <p:spTree>
@@ -10717,11 +10881,11 @@
           <a:bodyPr wrap="square" lIns="0" tIns="0" rIns="0" bIns="0" rtlCol="0" anchor="ctr"/>
           <a:lstStyle/>
           <a:p>
-            <a:pPr indent="0" marL="0">
-              <a:buNone/>
-            </a:pPr>
-            <a:r>
-              <a:rPr lang="en-US" sz="1100" b="1" spc="300" kern="0" dirty="0">
+            <a:pPr marL="0" indent="0">
+              <a:buNone/>
+            </a:pPr>
+            <a:r>
+              <a:rPr lang="en-US" sz="1100" b="1" kern="0" spc="300" dirty="0">
                 <a:solidFill>
                   <a:srgbClr val="0E8C7F"/>
                 </a:solidFill>
@@ -10756,7 +10920,7 @@
           <a:bodyPr wrap="square" lIns="0" tIns="0" rIns="0" bIns="0" rtlCol="0" anchor="t"/>
           <a:lstStyle/>
           <a:p>
-            <a:pPr algn="l" indent="0" marL="0">
+            <a:pPr marL="0" indent="0" algn="l">
               <a:lnSpc>
                 <a:spcPct val="112000"/>
               </a:lnSpc>
@@ -10776,7 +10940,7 @@
             <a:endParaRPr lang="en-US" sz="3300" dirty="0"/>
           </a:p>
           <a:p>
-            <a:pPr algn="l" indent="0" marL="0">
+            <a:pPr marL="0" indent="0" algn="l">
               <a:lnSpc>
                 <a:spcPct val="112000"/>
               </a:lnSpc>
@@ -10796,7 +10960,7 @@
             <a:endParaRPr lang="en-US" sz="3300" dirty="0"/>
           </a:p>
           <a:p>
-            <a:pPr algn="l" indent="0" marL="0">
+            <a:pPr marL="0" indent="0" algn="l">
               <a:lnSpc>
                 <a:spcPct val="112000"/>
               </a:lnSpc>
@@ -10841,6 +11005,13 @@
             <a:prstDash val="solid"/>
           </a:ln>
         </p:spPr>
+        <p:txBody>
+          <a:bodyPr/>
+          <a:lstStyle/>
+          <a:p>
+            <a:endParaRPr lang="en-US"/>
+          </a:p>
+        </p:txBody>
       </p:sp>
       <p:sp>
         <p:nvSpPr>
@@ -10861,6 +11032,13 @@
           </a:solidFill>
           <a:ln/>
         </p:spPr>
+        <p:txBody>
+          <a:bodyPr/>
+          <a:lstStyle/>
+          <a:p>
+            <a:endParaRPr lang="en-US"/>
+          </a:p>
+        </p:txBody>
       </p:sp>
       <p:sp>
         <p:nvSpPr>
@@ -10883,7 +11061,7 @@
           <a:bodyPr wrap="square" lIns="0" tIns="0" rIns="0" bIns="0" rtlCol="0" anchor="ctr"/>
           <a:lstStyle/>
           <a:p>
-            <a:pPr algn="l" indent="0" marL="0">
+            <a:pPr marL="0" indent="0" algn="l">
               <a:buNone/>
             </a:pPr>
             <a:r>
@@ -10922,7 +11100,7 @@
           <a:bodyPr wrap="square" lIns="0" tIns="0" rIns="0" bIns="0" rtlCol="0" anchor="t"/>
           <a:lstStyle/>
           <a:p>
-            <a:pPr algn="l" indent="0" marL="0">
+            <a:pPr marL="0" indent="0" algn="l">
               <a:buNone/>
             </a:pPr>
             <a:r>
@@ -10964,6 +11142,13 @@
             <a:prstDash val="solid"/>
           </a:ln>
         </p:spPr>
+        <p:txBody>
+          <a:bodyPr/>
+          <a:lstStyle/>
+          <a:p>
+            <a:endParaRPr lang="en-US"/>
+          </a:p>
+        </p:txBody>
       </p:sp>
       <p:sp>
         <p:nvSpPr>
@@ -10984,6 +11169,13 @@
           </a:solidFill>
           <a:ln/>
         </p:spPr>
+        <p:txBody>
+          <a:bodyPr/>
+          <a:lstStyle/>
+          <a:p>
+            <a:endParaRPr lang="en-US"/>
+          </a:p>
+        </p:txBody>
       </p:sp>
       <p:sp>
         <p:nvSpPr>
@@ -11006,7 +11198,7 @@
           <a:bodyPr wrap="square" lIns="0" tIns="0" rIns="0" bIns="0" rtlCol="0" anchor="ctr"/>
           <a:lstStyle/>
           <a:p>
-            <a:pPr algn="l" indent="0" marL="0">
+            <a:pPr marL="0" indent="0" algn="l">
               <a:buNone/>
             </a:pPr>
             <a:r>
@@ -11045,7 +11237,7 @@
           <a:bodyPr wrap="square" lIns="0" tIns="0" rIns="0" bIns="0" rtlCol="0" anchor="t"/>
           <a:lstStyle/>
           <a:p>
-            <a:pPr algn="l" indent="0" marL="0">
+            <a:pPr marL="0" indent="0" algn="l">
               <a:buNone/>
             </a:pPr>
             <a:r>
@@ -11087,6 +11279,13 @@
             <a:prstDash val="solid"/>
           </a:ln>
         </p:spPr>
+        <p:txBody>
+          <a:bodyPr/>
+          <a:lstStyle/>
+          <a:p>
+            <a:endParaRPr lang="en-US"/>
+          </a:p>
+        </p:txBody>
       </p:sp>
       <p:sp>
         <p:nvSpPr>
@@ -11107,6 +11306,13 @@
           </a:solidFill>
           <a:ln/>
         </p:spPr>
+        <p:txBody>
+          <a:bodyPr/>
+          <a:lstStyle/>
+          <a:p>
+            <a:endParaRPr lang="en-US"/>
+          </a:p>
+        </p:txBody>
       </p:sp>
       <p:sp>
         <p:nvSpPr>
@@ -11129,7 +11335,7 @@
           <a:bodyPr wrap="square" lIns="0" tIns="0" rIns="0" bIns="0" rtlCol="0" anchor="ctr"/>
           <a:lstStyle/>
           <a:p>
-            <a:pPr algn="l" indent="0" marL="0">
+            <a:pPr marL="0" indent="0" algn="l">
               <a:buNone/>
             </a:pPr>
             <a:r>
@@ -11168,7 +11374,7 @@
           <a:bodyPr wrap="square" lIns="0" tIns="0" rIns="0" bIns="0" rtlCol="0" anchor="t"/>
           <a:lstStyle/>
           <a:p>
-            <a:pPr algn="l" indent="0" marL="0">
+            <a:pPr marL="0" indent="0" algn="l">
               <a:buNone/>
             </a:pPr>
             <a:r>
@@ -11207,7 +11413,7 @@
           <a:bodyPr wrap="square" lIns="0" tIns="0" rIns="0" bIns="0" rtlCol="0" anchor="ctr"/>
           <a:lstStyle/>
           <a:p>
-            <a:pPr indent="0" marL="0">
+            <a:pPr marL="0" indent="0">
               <a:buNone/>
             </a:pPr>
             <a:r>
@@ -11246,7 +11452,7 @@
           <a:bodyPr wrap="square" lIns="0" tIns="0" rIns="0" bIns="0" rtlCol="0" anchor="ctr"/>
           <a:lstStyle/>
           <a:p>
-            <a:pPr algn="r" indent="0" marL="0">
+            <a:pPr marL="0" indent="0" algn="r">
               <a:buNone/>
             </a:pPr>
             <a:r>
@@ -11280,6 +11486,7 @@
         <a:solidFill>
           <a:srgbClr val="FFFFFF"/>
         </a:solidFill>
+        <a:effectLst/>
       </p:bgPr>
     </p:bg>
     <p:spTree>
@@ -11317,11 +11524,11 @@
           <a:bodyPr wrap="square" lIns="0" tIns="0" rIns="0" bIns="0" rtlCol="0" anchor="ctr"/>
           <a:lstStyle/>
           <a:p>
-            <a:pPr algn="l" indent="0" marL="0">
-              <a:buNone/>
-            </a:pPr>
-            <a:r>
-              <a:rPr lang="en-US" sz="1100" b="1" spc="300" kern="0" dirty="0">
+            <a:pPr marL="0" indent="0" algn="l">
+              <a:buNone/>
+            </a:pPr>
+            <a:r>
+              <a:rPr lang="en-US" sz="1100" b="1" kern="0" spc="300" dirty="0">
                 <a:solidFill>
                   <a:srgbClr val="0E8C7F"/>
                 </a:solidFill>
@@ -11356,7 +11563,7 @@
           <a:bodyPr wrap="square" lIns="0" tIns="0" rIns="0" bIns="0" rtlCol="0" anchor="ctr"/>
           <a:lstStyle/>
           <a:p>
-            <a:pPr algn="l" indent="0" marL="0">
+            <a:pPr marL="0" indent="0" algn="l">
               <a:buNone/>
             </a:pPr>
             <a:r>
@@ -11393,6 +11600,13 @@
           </a:solidFill>
           <a:ln/>
         </p:spPr>
+        <p:txBody>
+          <a:bodyPr/>
+          <a:lstStyle/>
+          <a:p>
+            <a:endParaRPr lang="en-US"/>
+          </a:p>
+        </p:txBody>
       </p:sp>
       <p:sp>
         <p:nvSpPr>
@@ -11415,7 +11629,7 @@
           <a:bodyPr wrap="square" lIns="0" tIns="0" rIns="0" bIns="0" rtlCol="0" anchor="ctr"/>
           <a:lstStyle/>
           <a:p>
-            <a:pPr algn="l" indent="0" marL="0">
+            <a:pPr marL="0" indent="0" algn="l">
               <a:lnSpc>
                 <a:spcPct val="110000"/>
               </a:lnSpc>
@@ -11432,12 +11646,6 @@
               </a:rPr>
               <a:t>Transakt is the documentary credit rail for SMEs — </a:t>
             </a:r>
-            <a:pPr algn="l" indent="0" marL="0">
-              <a:lnSpc>
-                <a:spcPct val="110000"/>
-              </a:lnSpc>
-              <a:buNone/>
-            </a:pPr>
             <a:r>
               <a:rPr lang="en-US" sz="2300" b="1" dirty="0">
                 <a:solidFill>
@@ -11477,13 +11685,20 @@
             <a:prstDash val="solid"/>
           </a:ln>
           <a:effectLst>
-            <a:outerShdw sx="100000" sy="100000" kx="0" ky="0" algn="bl" rotWithShape="0" blurRad="63500" dist="25400" dir="8100000">
+            <a:outerShdw blurRad="63500" dist="25400" dir="8100000" algn="bl" rotWithShape="0">
               <a:srgbClr val="000000">
                 <a:alpha val="10000"/>
               </a:srgbClr>
             </a:outerShdw>
           </a:effectLst>
         </p:spPr>
+        <p:txBody>
+          <a:bodyPr/>
+          <a:lstStyle/>
+          <a:p>
+            <a:endParaRPr lang="en-US"/>
+          </a:p>
+        </p:txBody>
       </p:sp>
       <p:sp>
         <p:nvSpPr>
@@ -11504,17 +11719,24 @@
           </a:solidFill>
           <a:ln/>
         </p:spPr>
+        <p:txBody>
+          <a:bodyPr/>
+          <a:lstStyle/>
+          <a:p>
+            <a:endParaRPr lang="en-US"/>
+          </a:p>
+        </p:txBody>
       </p:sp>
       <p:pic>
         <p:nvPicPr>
-          <p:cNvPr id="8" name="Image 0" descr="preencoded.png">    </p:cNvPr>
+          <p:cNvPr id="8" name="Image 0" descr="preencoded.png"/>
           <p:cNvPicPr>
             <a:picLocks noChangeAspect="1"/>
           </p:cNvPicPr>
           <p:nvPr/>
         </p:nvPicPr>
         <p:blipFill>
-          <a:blip r:embed="rId1"/>
+          <a:blip r:embed="rId3"/>
           <a:stretch>
             <a:fillRect/>
           </a:stretch>
@@ -11550,7 +11772,7 @@
           <a:bodyPr wrap="square" lIns="0" tIns="0" rIns="0" bIns="0" rtlCol="0" anchor="t"/>
           <a:lstStyle/>
           <a:p>
-            <a:pPr algn="l" indent="0" marL="0">
+            <a:pPr marL="0" indent="0" algn="l">
               <a:buNone/>
             </a:pPr>
             <a:r>
@@ -11589,7 +11811,7 @@
           <a:bodyPr wrap="square" lIns="0" tIns="0" rIns="0" bIns="0" rtlCol="0" anchor="t"/>
           <a:lstStyle/>
           <a:p>
-            <a:pPr algn="l" indent="0" marL="0">
+            <a:pPr marL="0" indent="0" algn="l">
               <a:lnSpc>
                 <a:spcPct val="108000"/>
               </a:lnSpc>
@@ -11634,13 +11856,20 @@
             <a:prstDash val="solid"/>
           </a:ln>
           <a:effectLst>
-            <a:outerShdw sx="100000" sy="100000" kx="0" ky="0" algn="bl" rotWithShape="0" blurRad="63500" dist="25400" dir="8100000">
+            <a:outerShdw blurRad="63500" dist="25400" dir="8100000" algn="bl" rotWithShape="0">
               <a:srgbClr val="000000">
                 <a:alpha val="10000"/>
               </a:srgbClr>
             </a:outerShdw>
           </a:effectLst>
         </p:spPr>
+        <p:txBody>
+          <a:bodyPr/>
+          <a:lstStyle/>
+          <a:p>
+            <a:endParaRPr lang="en-US"/>
+          </a:p>
+        </p:txBody>
       </p:sp>
       <p:sp>
         <p:nvSpPr>
@@ -11661,17 +11890,24 @@
           </a:solidFill>
           <a:ln/>
         </p:spPr>
+        <p:txBody>
+          <a:bodyPr/>
+          <a:lstStyle/>
+          <a:p>
+            <a:endParaRPr lang="en-US"/>
+          </a:p>
+        </p:txBody>
       </p:sp>
       <p:pic>
         <p:nvPicPr>
-          <p:cNvPr id="13" name="Image 1" descr="preencoded.png">    </p:cNvPr>
+          <p:cNvPr id="13" name="Image 1" descr="preencoded.png"/>
           <p:cNvPicPr>
             <a:picLocks noChangeAspect="1"/>
           </p:cNvPicPr>
           <p:nvPr/>
         </p:nvPicPr>
         <p:blipFill>
-          <a:blip r:embed="rId2"/>
+          <a:blip r:embed="rId4"/>
           <a:stretch>
             <a:fillRect/>
           </a:stretch>
@@ -11707,7 +11943,7 @@
           <a:bodyPr wrap="square" lIns="0" tIns="0" rIns="0" bIns="0" rtlCol="0" anchor="t"/>
           <a:lstStyle/>
           <a:p>
-            <a:pPr algn="l" indent="0" marL="0">
+            <a:pPr marL="0" indent="0" algn="l">
               <a:buNone/>
             </a:pPr>
             <a:r>
@@ -11746,7 +11982,7 @@
           <a:bodyPr wrap="square" lIns="0" tIns="0" rIns="0" bIns="0" rtlCol="0" anchor="t"/>
           <a:lstStyle/>
           <a:p>
-            <a:pPr algn="l" indent="0" marL="0">
+            <a:pPr marL="0" indent="0" algn="l">
               <a:lnSpc>
                 <a:spcPct val="108000"/>
               </a:lnSpc>
@@ -11791,13 +12027,20 @@
             <a:prstDash val="solid"/>
           </a:ln>
           <a:effectLst>
-            <a:outerShdw sx="100000" sy="100000" kx="0" ky="0" algn="bl" rotWithShape="0" blurRad="63500" dist="25400" dir="8100000">
+            <a:outerShdw blurRad="63500" dist="25400" dir="8100000" algn="bl" rotWithShape="0">
               <a:srgbClr val="000000">
                 <a:alpha val="10000"/>
               </a:srgbClr>
             </a:outerShdw>
           </a:effectLst>
         </p:spPr>
+        <p:txBody>
+          <a:bodyPr/>
+          <a:lstStyle/>
+          <a:p>
+            <a:endParaRPr lang="en-US"/>
+          </a:p>
+        </p:txBody>
       </p:sp>
       <p:sp>
         <p:nvSpPr>
@@ -11818,17 +12061,24 @@
           </a:solidFill>
           <a:ln/>
         </p:spPr>
+        <p:txBody>
+          <a:bodyPr/>
+          <a:lstStyle/>
+          <a:p>
+            <a:endParaRPr lang="en-US"/>
+          </a:p>
+        </p:txBody>
       </p:sp>
       <p:pic>
         <p:nvPicPr>
-          <p:cNvPr id="18" name="Image 2" descr="preencoded.png">    </p:cNvPr>
+          <p:cNvPr id="18" name="Image 2" descr="preencoded.png"/>
           <p:cNvPicPr>
             <a:picLocks noChangeAspect="1"/>
           </p:cNvPicPr>
           <p:nvPr/>
         </p:nvPicPr>
         <p:blipFill>
-          <a:blip r:embed="rId3"/>
+          <a:blip r:embed="rId5"/>
           <a:stretch>
             <a:fillRect/>
           </a:stretch>
@@ -11864,7 +12114,7 @@
           <a:bodyPr wrap="square" lIns="0" tIns="0" rIns="0" bIns="0" rtlCol="0" anchor="t"/>
           <a:lstStyle/>
           <a:p>
-            <a:pPr algn="l" indent="0" marL="0">
+            <a:pPr marL="0" indent="0" algn="l">
               <a:buNone/>
             </a:pPr>
             <a:r>
@@ -11903,7 +12153,7 @@
           <a:bodyPr wrap="square" lIns="0" tIns="0" rIns="0" bIns="0" rtlCol="0" anchor="t"/>
           <a:lstStyle/>
           <a:p>
-            <a:pPr algn="l" indent="0" marL="0">
+            <a:pPr marL="0" indent="0" algn="l">
               <a:lnSpc>
                 <a:spcPct val="108000"/>
               </a:lnSpc>
@@ -11945,11 +12195,11 @@
           <a:bodyPr wrap="square" lIns="0" tIns="0" rIns="0" bIns="0" rtlCol="0" anchor="ctr"/>
           <a:lstStyle/>
           <a:p>
-            <a:pPr algn="l" indent="0" marL="0">
-              <a:buNone/>
-            </a:pPr>
-            <a:r>
-              <a:rPr lang="en-US" sz="850" spc="200" kern="0" dirty="0">
+            <a:pPr marL="0" indent="0" algn="l">
+              <a:buNone/>
+            </a:pPr>
+            <a:r>
+              <a:rPr lang="en-US" sz="850" kern="0" spc="200" dirty="0" err="1">
                 <a:solidFill>
                   <a:srgbClr val="6B7280"/>
                 </a:solidFill>
@@ -11957,7 +12207,7 @@
                 <a:ea typeface="Georgia" pitchFamily="34" charset="-122"/>
                 <a:cs typeface="Georgia" pitchFamily="34" charset="-120"/>
               </a:rPr>
-              <a:t>TRANSAKT</a:t>
+              <a:t>BlockMed</a:t>
             </a:r>
             <a:endParaRPr lang="en-US" sz="850" dirty="0"/>
           </a:p>
@@ -11984,7 +12234,7 @@
           <a:bodyPr wrap="square" lIns="0" tIns="0" rIns="0" bIns="0" rtlCol="0" anchor="ctr"/>
           <a:lstStyle/>
           <a:p>
-            <a:pPr algn="r" indent="0" marL="0">
+            <a:pPr marL="0" indent="0" algn="r">
               <a:buNone/>
             </a:pPr>
             <a:r>
@@ -12018,6 +12268,7 @@
         <a:solidFill>
           <a:srgbClr val="FFFFFF"/>
         </a:solidFill>
+        <a:effectLst/>
       </p:bgPr>
     </p:bg>
     <p:spTree>
@@ -12055,11 +12306,11 @@
           <a:bodyPr wrap="square" lIns="0" tIns="0" rIns="0" bIns="0" rtlCol="0" anchor="ctr"/>
           <a:lstStyle/>
           <a:p>
-            <a:pPr algn="l" indent="0" marL="0">
-              <a:buNone/>
-            </a:pPr>
-            <a:r>
-              <a:rPr lang="en-US" sz="1100" b="1" spc="300" kern="0" dirty="0">
+            <a:pPr marL="0" indent="0" algn="l">
+              <a:buNone/>
+            </a:pPr>
+            <a:r>
+              <a:rPr lang="en-US" sz="1100" b="1" kern="0" spc="300" dirty="0">
                 <a:solidFill>
                   <a:srgbClr val="0E8C7F"/>
                 </a:solidFill>
@@ -12094,7 +12345,7 @@
           <a:bodyPr wrap="square" lIns="0" tIns="0" rIns="0" bIns="0" rtlCol="0" anchor="ctr"/>
           <a:lstStyle/>
           <a:p>
-            <a:pPr algn="l" indent="0" marL="0">
+            <a:pPr marL="0" indent="0" algn="l">
               <a:buNone/>
             </a:pPr>
             <a:r>
@@ -12136,6 +12387,13 @@
             <a:prstDash val="solid"/>
           </a:ln>
         </p:spPr>
+        <p:txBody>
+          <a:bodyPr/>
+          <a:lstStyle/>
+          <a:p>
+            <a:endParaRPr lang="en-US"/>
+          </a:p>
+        </p:txBody>
       </p:sp>
       <p:sp>
         <p:nvSpPr>
@@ -12161,6 +12419,13 @@
             <a:prstDash val="solid"/>
           </a:ln>
         </p:spPr>
+        <p:txBody>
+          <a:bodyPr/>
+          <a:lstStyle/>
+          <a:p>
+            <a:endParaRPr lang="en-US"/>
+          </a:p>
+        </p:txBody>
       </p:sp>
       <p:sp>
         <p:nvSpPr>
@@ -12186,6 +12451,13 @@
             <a:prstDash val="solid"/>
           </a:ln>
         </p:spPr>
+        <p:txBody>
+          <a:bodyPr/>
+          <a:lstStyle/>
+          <a:p>
+            <a:endParaRPr lang="en-US"/>
+          </a:p>
+        </p:txBody>
       </p:sp>
       <p:sp>
         <p:nvSpPr>
@@ -12208,7 +12480,7 @@
           <a:bodyPr wrap="square" lIns="0" tIns="0" rIns="0" bIns="0" rtlCol="0" anchor="ctr"/>
           <a:lstStyle/>
           <a:p>
-            <a:pPr algn="ctr" indent="0" marL="0">
+            <a:pPr marL="0" indent="0" algn="ctr">
               <a:buNone/>
             </a:pPr>
             <a:r>
@@ -12247,7 +12519,7 @@
           <a:bodyPr wrap="square" lIns="0" tIns="0" rIns="0" bIns="0" rtlCol="0" anchor="ctr"/>
           <a:lstStyle/>
           <a:p>
-            <a:pPr algn="ctr" indent="0" marL="0">
+            <a:pPr marL="0" indent="0" algn="ctr">
               <a:buNone/>
             </a:pPr>
             <a:r>
@@ -12286,7 +12558,7 @@
           <a:bodyPr wrap="square" lIns="0" tIns="0" rIns="0" bIns="0" rtlCol="0" anchor="ctr"/>
           <a:lstStyle/>
           <a:p>
-            <a:pPr algn="ctr" indent="0" marL="0">
+            <a:pPr marL="0" indent="0" algn="ctr">
               <a:buNone/>
             </a:pPr>
             <a:r>
@@ -12328,6 +12600,13 @@
             <a:prstDash val="solid"/>
           </a:ln>
         </p:spPr>
+        <p:txBody>
+          <a:bodyPr/>
+          <a:lstStyle/>
+          <a:p>
+            <a:endParaRPr lang="en-US"/>
+          </a:p>
+        </p:txBody>
       </p:sp>
       <p:sp>
         <p:nvSpPr>
@@ -12348,6 +12627,13 @@
           </a:solidFill>
           <a:ln/>
         </p:spPr>
+        <p:txBody>
+          <a:bodyPr/>
+          <a:lstStyle/>
+          <a:p>
+            <a:endParaRPr lang="en-US"/>
+          </a:p>
+        </p:txBody>
       </p:sp>
       <p:sp>
         <p:nvSpPr>
@@ -12370,11 +12656,11 @@
           <a:bodyPr wrap="square" lIns="0" tIns="0" rIns="0" bIns="0" rtlCol="0" anchor="ctr"/>
           <a:lstStyle/>
           <a:p>
-            <a:pPr indent="0" marL="0">
-              <a:buNone/>
-            </a:pPr>
-            <a:r>
-              <a:rPr lang="en-US" sz="1300" b="1" spc="200" kern="0" dirty="0">
+            <a:pPr marL="0" indent="0">
+              <a:buNone/>
+            </a:pPr>
+            <a:r>
+              <a:rPr lang="en-US" sz="1300" b="1" kern="0" spc="200" dirty="0">
                 <a:solidFill>
                   <a:srgbClr val="1F6FB2"/>
                 </a:solidFill>
@@ -12409,7 +12695,7 @@
           <a:bodyPr wrap="square" lIns="0" tIns="0" rIns="0" bIns="0" rtlCol="0" anchor="ctr"/>
           <a:lstStyle/>
           <a:p>
-            <a:pPr algn="r" indent="0" marL="0">
+            <a:pPr marL="0" indent="0" algn="r">
               <a:buNone/>
             </a:pPr>
             <a:r>
@@ -12448,7 +12734,7 @@
           <a:bodyPr wrap="square" lIns="0" tIns="0" rIns="0" bIns="0" rtlCol="0" anchor="t"/>
           <a:lstStyle/>
           <a:p>
-            <a:pPr algn="l" indent="0" marL="0">
+            <a:pPr marL="0" indent="0" algn="l">
               <a:buNone/>
             </a:pPr>
             <a:r>
@@ -12490,6 +12776,13 @@
             <a:prstDash val="solid"/>
           </a:ln>
         </p:spPr>
+        <p:txBody>
+          <a:bodyPr/>
+          <a:lstStyle/>
+          <a:p>
+            <a:endParaRPr lang="en-US"/>
+          </a:p>
+        </p:txBody>
       </p:sp>
       <p:sp>
         <p:nvSpPr>
@@ -12510,6 +12803,13 @@
           </a:solidFill>
           <a:ln/>
         </p:spPr>
+        <p:txBody>
+          <a:bodyPr/>
+          <a:lstStyle/>
+          <a:p>
+            <a:endParaRPr lang="en-US"/>
+          </a:p>
+        </p:txBody>
       </p:sp>
       <p:sp>
         <p:nvSpPr>
@@ -12532,11 +12832,11 @@
           <a:bodyPr wrap="square" lIns="0" tIns="0" rIns="0" bIns="0" rtlCol="0" anchor="ctr"/>
           <a:lstStyle/>
           <a:p>
-            <a:pPr indent="0" marL="0">
-              <a:buNone/>
-            </a:pPr>
-            <a:r>
-              <a:rPr lang="en-US" sz="1300" b="1" spc="200" kern="0" dirty="0">
+            <a:pPr marL="0" indent="0">
+              <a:buNone/>
+            </a:pPr>
+            <a:r>
+              <a:rPr lang="en-US" sz="1300" b="1" kern="0" spc="200" dirty="0">
                 <a:solidFill>
                   <a:srgbClr val="0E8C7F"/>
                 </a:solidFill>
@@ -12571,7 +12871,7 @@
           <a:bodyPr wrap="square" lIns="0" tIns="0" rIns="0" bIns="0" rtlCol="0" anchor="ctr"/>
           <a:lstStyle/>
           <a:p>
-            <a:pPr algn="r" indent="0" marL="0">
+            <a:pPr marL="0" indent="0" algn="r">
               <a:buNone/>
             </a:pPr>
             <a:r>
@@ -12610,7 +12910,7 @@
           <a:bodyPr wrap="square" lIns="0" tIns="0" rIns="0" bIns="0" rtlCol="0" anchor="t"/>
           <a:lstStyle/>
           <a:p>
-            <a:pPr algn="l" indent="0" marL="0">
+            <a:pPr marL="0" indent="0" algn="l">
               <a:buNone/>
             </a:pPr>
             <a:r>
@@ -12652,6 +12952,13 @@
             <a:prstDash val="solid"/>
           </a:ln>
         </p:spPr>
+        <p:txBody>
+          <a:bodyPr/>
+          <a:lstStyle/>
+          <a:p>
+            <a:endParaRPr lang="en-US"/>
+          </a:p>
+        </p:txBody>
       </p:sp>
       <p:sp>
         <p:nvSpPr>
@@ -12672,6 +12979,13 @@
           </a:solidFill>
           <a:ln/>
         </p:spPr>
+        <p:txBody>
+          <a:bodyPr/>
+          <a:lstStyle/>
+          <a:p>
+            <a:endParaRPr lang="en-US"/>
+          </a:p>
+        </p:txBody>
       </p:sp>
       <p:sp>
         <p:nvSpPr>
@@ -12694,11 +13008,11 @@
           <a:bodyPr wrap="square" lIns="0" tIns="0" rIns="0" bIns="0" rtlCol="0" anchor="ctr"/>
           <a:lstStyle/>
           <a:p>
-            <a:pPr indent="0" marL="0">
-              <a:buNone/>
-            </a:pPr>
-            <a:r>
-              <a:rPr lang="en-US" sz="1300" b="1" spc="200" kern="0" dirty="0">
+            <a:pPr marL="0" indent="0">
+              <a:buNone/>
+            </a:pPr>
+            <a:r>
+              <a:rPr lang="en-US" sz="1300" b="1" kern="0" spc="200" dirty="0">
                 <a:solidFill>
                   <a:srgbClr val="0B1B3A"/>
                 </a:solidFill>
@@ -12733,7 +13047,7 @@
           <a:bodyPr wrap="square" lIns="0" tIns="0" rIns="0" bIns="0" rtlCol="0" anchor="ctr"/>
           <a:lstStyle/>
           <a:p>
-            <a:pPr algn="r" indent="0" marL="0">
+            <a:pPr marL="0" indent="0" algn="r">
               <a:buNone/>
             </a:pPr>
             <a:r>
@@ -12772,7 +13086,7 @@
           <a:bodyPr wrap="square" lIns="0" tIns="0" rIns="0" bIns="0" rtlCol="0" anchor="t"/>
           <a:lstStyle/>
           <a:p>
-            <a:pPr algn="l" indent="0" marL="0">
+            <a:pPr marL="0" indent="0" algn="l">
               <a:buNone/>
             </a:pPr>
             <a:r>
@@ -12811,7 +13125,7 @@
           <a:bodyPr wrap="square" lIns="0" tIns="0" rIns="0" bIns="0" rtlCol="0" anchor="t"/>
           <a:lstStyle/>
           <a:p>
-            <a:pPr algn="l" indent="0" marL="0">
+            <a:pPr marL="0" indent="0" algn="l">
               <a:lnSpc>
                 <a:spcPct val="100000"/>
               </a:lnSpc>
@@ -12853,7 +13167,7 @@
           <a:bodyPr wrap="square" lIns="0" tIns="0" rIns="0" bIns="0" rtlCol="0" anchor="ctr"/>
           <a:lstStyle/>
           <a:p>
-            <a:pPr indent="0" marL="0">
+            <a:pPr marL="0" indent="0">
               <a:buNone/>
             </a:pPr>
             <a:r>
@@ -12892,7 +13206,7 @@
           <a:bodyPr wrap="square" lIns="0" tIns="0" rIns="0" bIns="0" rtlCol="0" anchor="ctr"/>
           <a:lstStyle/>
           <a:p>
-            <a:pPr algn="r" indent="0" marL="0">
+            <a:pPr marL="0" indent="0" algn="r">
               <a:buNone/>
             </a:pPr>
             <a:r>
@@ -12926,6 +13240,7 @@
         <a:solidFill>
           <a:srgbClr val="FFFFFF"/>
         </a:solidFill>
+        <a:effectLst/>
       </p:bgPr>
     </p:bg>
     <p:spTree>
@@ -12963,11 +13278,11 @@
           <a:bodyPr wrap="square" lIns="0" tIns="0" rIns="0" bIns="0" rtlCol="0" anchor="ctr"/>
           <a:lstStyle/>
           <a:p>
-            <a:pPr algn="l" indent="0" marL="0">
-              <a:buNone/>
-            </a:pPr>
-            <a:r>
-              <a:rPr lang="en-US" sz="1100" b="1" spc="300" kern="0" dirty="0">
+            <a:pPr marL="0" indent="0" algn="l">
+              <a:buNone/>
+            </a:pPr>
+            <a:r>
+              <a:rPr lang="en-US" sz="1100" b="1" kern="0" spc="300" dirty="0">
                 <a:solidFill>
                   <a:srgbClr val="0E8C7F"/>
                 </a:solidFill>
@@ -13002,7 +13317,7 @@
           <a:bodyPr wrap="square" lIns="0" tIns="0" rIns="0" bIns="0" rtlCol="0" anchor="ctr"/>
           <a:lstStyle/>
           <a:p>
-            <a:pPr algn="l" indent="0" marL="0">
+            <a:pPr marL="0" indent="0" algn="l">
               <a:buNone/>
             </a:pPr>
             <a:r>
@@ -13041,7 +13356,7 @@
           <a:bodyPr wrap="square" lIns="0" tIns="0" rIns="0" bIns="0" rtlCol="0" anchor="ctr"/>
           <a:lstStyle/>
           <a:p>
-            <a:pPr algn="ctr" indent="0" marL="0">
+            <a:pPr marL="0" indent="0" algn="ctr">
               <a:buNone/>
             </a:pPr>
             <a:r>
@@ -13080,7 +13395,7 @@
           <a:bodyPr wrap="square" lIns="0" tIns="0" rIns="0" bIns="0" rtlCol="0" anchor="ctr"/>
           <a:lstStyle/>
           <a:p>
-            <a:pPr algn="ctr" indent="0" marL="0">
+            <a:pPr marL="0" indent="0" algn="ctr">
               <a:buNone/>
             </a:pPr>
             <a:r>
@@ -13117,6 +13432,13 @@
           </a:solidFill>
           <a:ln/>
         </p:spPr>
+        <p:txBody>
+          <a:bodyPr/>
+          <a:lstStyle/>
+          <a:p>
+            <a:endParaRPr lang="en-US"/>
+          </a:p>
+        </p:txBody>
       </p:sp>
       <p:sp>
         <p:nvSpPr>
@@ -13139,11 +13461,11 @@
           <a:bodyPr wrap="square" lIns="0" tIns="0" rIns="0" bIns="0" rtlCol="0" anchor="ctr"/>
           <a:lstStyle/>
           <a:p>
-            <a:pPr algn="ctr" indent="0" marL="0">
-              <a:buNone/>
-            </a:pPr>
-            <a:r>
-              <a:rPr lang="en-US" sz="1200" b="1" spc="100" kern="0" dirty="0">
+            <a:pPr marL="0" indent="0" algn="ctr">
+              <a:buNone/>
+            </a:pPr>
+            <a:r>
+              <a:rPr lang="en-US" sz="1200" b="1" kern="0" spc="100" dirty="0" err="1">
                 <a:solidFill>
                   <a:srgbClr val="FFFFFF"/>
                 </a:solidFill>
@@ -13151,7 +13473,18 @@
                 <a:ea typeface="Calibri" pitchFamily="34" charset="-122"/>
                 <a:cs typeface="Calibri" pitchFamily="34" charset="-120"/>
               </a:rPr>
-              <a:t>TRANSAKT  ·  escrow + verification + settlement</a:t>
+              <a:t>BlockMed</a:t>
+            </a:r>
+            <a:r>
+              <a:rPr lang="en-US" sz="1200" b="1" kern="0" spc="100" dirty="0">
+                <a:solidFill>
+                  <a:srgbClr val="FFFFFF"/>
+                </a:solidFill>
+                <a:latin typeface="Calibri" pitchFamily="34" charset="0"/>
+                <a:ea typeface="Calibri" pitchFamily="34" charset="-122"/>
+                <a:cs typeface="Calibri" pitchFamily="34" charset="-120"/>
+              </a:rPr>
+              <a:t>  ·  escrow + verification + settlement</a:t>
             </a:r>
             <a:endParaRPr lang="en-US" sz="1200" dirty="0"/>
           </a:p>
@@ -13181,6 +13514,13 @@
             <a:prstDash val="solid"/>
           </a:ln>
         </p:spPr>
+        <p:txBody>
+          <a:bodyPr/>
+          <a:lstStyle/>
+          <a:p>
+            <a:endParaRPr lang="en-US"/>
+          </a:p>
+        </p:txBody>
       </p:sp>
       <p:sp>
         <p:nvSpPr>
@@ -13203,7 +13543,7 @@
           <a:bodyPr wrap="square" lIns="0" tIns="0" rIns="0" bIns="0" rtlCol="0" anchor="ctr"/>
           <a:lstStyle/>
           <a:p>
-            <a:pPr algn="ctr" indent="0" marL="0">
+            <a:pPr marL="0" indent="0" algn="ctr">
               <a:buNone/>
             </a:pPr>
             <a:r>
@@ -13245,6 +13585,13 @@
             <a:prstDash val="solid"/>
           </a:ln>
         </p:spPr>
+        <p:txBody>
+          <a:bodyPr/>
+          <a:lstStyle/>
+          <a:p>
+            <a:endParaRPr lang="en-US"/>
+          </a:p>
+        </p:txBody>
       </p:sp>
       <p:sp>
         <p:nvSpPr>
@@ -13267,7 +13614,7 @@
           <a:bodyPr wrap="square" lIns="0" tIns="0" rIns="0" bIns="0" rtlCol="0" anchor="ctr"/>
           <a:lstStyle/>
           <a:p>
-            <a:pPr algn="ctr" indent="0" marL="0">
+            <a:pPr marL="0" indent="0" algn="ctr">
               <a:buNone/>
             </a:pPr>
             <a:r>
@@ -13309,6 +13656,13 @@
             <a:prstDash val="solid"/>
           </a:ln>
         </p:spPr>
+        <p:txBody>
+          <a:bodyPr/>
+          <a:lstStyle/>
+          <a:p>
+            <a:endParaRPr lang="en-US"/>
+          </a:p>
+        </p:txBody>
       </p:sp>
       <p:sp>
         <p:nvSpPr>
@@ -13331,7 +13685,7 @@
           <a:bodyPr wrap="square" lIns="0" tIns="0" rIns="0" bIns="0" rtlCol="0" anchor="ctr"/>
           <a:lstStyle/>
           <a:p>
-            <a:pPr algn="ctr" indent="0" marL="0">
+            <a:pPr marL="0" indent="0" algn="ctr">
               <a:buNone/>
             </a:pPr>
             <a:r>
@@ -13373,6 +13727,13 @@
             <a:prstDash val="solid"/>
           </a:ln>
         </p:spPr>
+        <p:txBody>
+          <a:bodyPr/>
+          <a:lstStyle/>
+          <a:p>
+            <a:endParaRPr lang="en-US"/>
+          </a:p>
+        </p:txBody>
       </p:sp>
       <p:sp>
         <p:nvSpPr>
@@ -13395,7 +13756,7 @@
           <a:bodyPr wrap="square" lIns="0" tIns="0" rIns="0" bIns="0" rtlCol="0" anchor="ctr"/>
           <a:lstStyle/>
           <a:p>
-            <a:pPr algn="ctr" indent="0" marL="0">
+            <a:pPr marL="0" indent="0" algn="ctr">
               <a:buNone/>
             </a:pPr>
             <a:r>
@@ -13437,6 +13798,13 @@
             <a:prstDash val="solid"/>
           </a:ln>
         </p:spPr>
+        <p:txBody>
+          <a:bodyPr/>
+          <a:lstStyle/>
+          <a:p>
+            <a:endParaRPr lang="en-US"/>
+          </a:p>
+        </p:txBody>
       </p:sp>
       <p:sp>
         <p:nvSpPr>
@@ -13459,7 +13827,7 @@
           <a:bodyPr wrap="square" lIns="0" tIns="0" rIns="0" bIns="0" rtlCol="0" anchor="ctr"/>
           <a:lstStyle/>
           <a:p>
-            <a:pPr algn="ctr" indent="0" marL="0">
+            <a:pPr marL="0" indent="0" algn="ctr">
               <a:buNone/>
             </a:pPr>
             <a:r>
@@ -13501,6 +13869,13 @@
             <a:prstDash val="solid"/>
           </a:ln>
         </p:spPr>
+        <p:txBody>
+          <a:bodyPr/>
+          <a:lstStyle/>
+          <a:p>
+            <a:endParaRPr lang="en-US"/>
+          </a:p>
+        </p:txBody>
       </p:sp>
       <p:sp>
         <p:nvSpPr>
@@ -13523,7 +13898,7 @@
           <a:bodyPr wrap="square" lIns="0" tIns="0" rIns="0" bIns="0" rtlCol="0" anchor="ctr"/>
           <a:lstStyle/>
           <a:p>
-            <a:pPr algn="ctr" indent="0" marL="0">
+            <a:pPr marL="0" indent="0" algn="ctr">
               <a:buNone/>
             </a:pPr>
             <a:r>
@@ -13565,6 +13940,13 @@
             <a:prstDash val="solid"/>
           </a:ln>
         </p:spPr>
+        <p:txBody>
+          <a:bodyPr/>
+          <a:lstStyle/>
+          <a:p>
+            <a:endParaRPr lang="en-US"/>
+          </a:p>
+        </p:txBody>
       </p:sp>
       <p:sp>
         <p:nvSpPr>
@@ -13587,7 +13969,7 @@
           <a:bodyPr wrap="square" lIns="0" tIns="0" rIns="0" bIns="0" rtlCol="0" anchor="ctr"/>
           <a:lstStyle/>
           <a:p>
-            <a:pPr algn="ctr" indent="0" marL="0">
+            <a:pPr marL="0" indent="0" algn="ctr">
               <a:buNone/>
             </a:pPr>
             <a:r>
@@ -13629,6 +14011,13 @@
             <a:prstDash val="solid"/>
           </a:ln>
         </p:spPr>
+        <p:txBody>
+          <a:bodyPr/>
+          <a:lstStyle/>
+          <a:p>
+            <a:endParaRPr lang="en-US"/>
+          </a:p>
+        </p:txBody>
       </p:sp>
       <p:sp>
         <p:nvSpPr>
@@ -13651,7 +14040,7 @@
           <a:bodyPr wrap="square" lIns="0" tIns="0" rIns="0" bIns="0" rtlCol="0" anchor="ctr"/>
           <a:lstStyle/>
           <a:p>
-            <a:pPr algn="ctr" indent="0" marL="0">
+            <a:pPr marL="0" indent="0" algn="ctr">
               <a:buNone/>
             </a:pPr>
             <a:r>
@@ -13693,6 +14082,13 @@
             <a:prstDash val="solid"/>
           </a:ln>
         </p:spPr>
+        <p:txBody>
+          <a:bodyPr/>
+          <a:lstStyle/>
+          <a:p>
+            <a:endParaRPr lang="en-US"/>
+          </a:p>
+        </p:txBody>
       </p:sp>
       <p:sp>
         <p:nvSpPr>
@@ -13715,7 +14111,7 @@
           <a:bodyPr wrap="square" lIns="0" tIns="0" rIns="0" bIns="0" rtlCol="0" anchor="ctr"/>
           <a:lstStyle/>
           <a:p>
-            <a:pPr algn="ctr" indent="0" marL="0">
+            <a:pPr marL="0" indent="0" algn="ctr">
               <a:buNone/>
             </a:pPr>
             <a:r>
@@ -13757,6 +14153,13 @@
             <a:prstDash val="solid"/>
           </a:ln>
         </p:spPr>
+        <p:txBody>
+          <a:bodyPr/>
+          <a:lstStyle/>
+          <a:p>
+            <a:endParaRPr lang="en-US"/>
+          </a:p>
+        </p:txBody>
       </p:sp>
       <p:sp>
         <p:nvSpPr>
@@ -13779,7 +14182,7 @@
           <a:bodyPr wrap="square" lIns="0" tIns="0" rIns="0" bIns="0" rtlCol="0" anchor="ctr"/>
           <a:lstStyle/>
           <a:p>
-            <a:pPr algn="ctr" indent="0" marL="0">
+            <a:pPr marL="0" indent="0" algn="ctr">
               <a:buNone/>
             </a:pPr>
             <a:r>
@@ -13821,6 +14224,13 @@
             <a:prstDash val="solid"/>
           </a:ln>
         </p:spPr>
+        <p:txBody>
+          <a:bodyPr/>
+          <a:lstStyle/>
+          <a:p>
+            <a:endParaRPr lang="en-US"/>
+          </a:p>
+        </p:txBody>
       </p:sp>
       <p:sp>
         <p:nvSpPr>
@@ -13843,7 +14253,7 @@
           <a:bodyPr wrap="square" lIns="0" tIns="0" rIns="0" bIns="0" rtlCol="0" anchor="ctr"/>
           <a:lstStyle/>
           <a:p>
-            <a:pPr algn="ctr" indent="0" marL="0">
+            <a:pPr marL="0" indent="0" algn="ctr">
               <a:buNone/>
             </a:pPr>
             <a:r>
@@ -13885,6 +14295,13 @@
             <a:prstDash val="solid"/>
           </a:ln>
         </p:spPr>
+        <p:txBody>
+          <a:bodyPr/>
+          <a:lstStyle/>
+          <a:p>
+            <a:endParaRPr lang="en-US"/>
+          </a:p>
+        </p:txBody>
       </p:sp>
       <p:sp>
         <p:nvSpPr>
@@ -13907,7 +14324,7 @@
           <a:bodyPr wrap="square" lIns="0" tIns="0" rIns="0" bIns="0" rtlCol="0" anchor="ctr"/>
           <a:lstStyle/>
           <a:p>
-            <a:pPr algn="ctr" indent="0" marL="0">
+            <a:pPr marL="0" indent="0" algn="ctr">
               <a:buNone/>
             </a:pPr>
             <a:r>
@@ -13949,6 +14366,13 @@
             <a:prstDash val="solid"/>
           </a:ln>
         </p:spPr>
+        <p:txBody>
+          <a:bodyPr/>
+          <a:lstStyle/>
+          <a:p>
+            <a:endParaRPr lang="en-US"/>
+          </a:p>
+        </p:txBody>
       </p:sp>
       <p:sp>
         <p:nvSpPr>
@@ -13971,7 +14395,7 @@
           <a:bodyPr wrap="square" lIns="0" tIns="0" rIns="0" bIns="0" rtlCol="0" anchor="ctr"/>
           <a:lstStyle/>
           <a:p>
-            <a:pPr algn="ctr" indent="0" marL="0">
+            <a:pPr marL="0" indent="0" algn="ctr">
               <a:buNone/>
             </a:pPr>
             <a:r>
@@ -14013,6 +14437,13 @@
             <a:prstDash val="solid"/>
           </a:ln>
         </p:spPr>
+        <p:txBody>
+          <a:bodyPr/>
+          <a:lstStyle/>
+          <a:p>
+            <a:endParaRPr lang="en-US"/>
+          </a:p>
+        </p:txBody>
       </p:sp>
       <p:sp>
         <p:nvSpPr>
@@ -14035,7 +14466,7 @@
           <a:bodyPr wrap="square" lIns="0" tIns="0" rIns="0" bIns="0" rtlCol="0" anchor="ctr"/>
           <a:lstStyle/>
           <a:p>
-            <a:pPr algn="ctr" indent="0" marL="0">
+            <a:pPr marL="0" indent="0" algn="ctr">
               <a:buNone/>
             </a:pPr>
             <a:r>
@@ -14077,6 +14508,13 @@
             <a:prstDash val="solid"/>
           </a:ln>
         </p:spPr>
+        <p:txBody>
+          <a:bodyPr/>
+          <a:lstStyle/>
+          <a:p>
+            <a:endParaRPr lang="en-US"/>
+          </a:p>
+        </p:txBody>
       </p:sp>
       <p:sp>
         <p:nvSpPr>
@@ -14099,7 +14537,7 @@
           <a:bodyPr wrap="square" lIns="0" tIns="0" rIns="0" bIns="0" rtlCol="0" anchor="ctr"/>
           <a:lstStyle/>
           <a:p>
-            <a:pPr algn="l" indent="0" marL="0">
+            <a:pPr marL="0" indent="0" algn="l">
               <a:buNone/>
             </a:pPr>
             <a:r>
@@ -14113,9 +14551,6 @@
               </a:rPr>
               <a:t>Seller chooses tier at intake:  </a:t>
             </a:r>
-            <a:pPr algn="l" indent="0" marL="0">
-              <a:buNone/>
-            </a:pPr>
             <a:r>
               <a:rPr lang="en-US" sz="1250" dirty="0">
                 <a:solidFill>
@@ -14152,11 +14587,11 @@
           <a:bodyPr wrap="square" lIns="0" tIns="0" rIns="0" bIns="0" rtlCol="0" anchor="ctr"/>
           <a:lstStyle/>
           <a:p>
-            <a:pPr algn="l" indent="0" marL="0">
-              <a:buNone/>
-            </a:pPr>
-            <a:r>
-              <a:rPr lang="en-US" sz="850" spc="200" kern="0" dirty="0">
+            <a:pPr marL="0" indent="0" algn="l">
+              <a:buNone/>
+            </a:pPr>
+            <a:r>
+              <a:rPr lang="en-US" sz="850" kern="0" spc="200" dirty="0" err="1">
                 <a:solidFill>
                   <a:srgbClr val="6B7280"/>
                 </a:solidFill>
@@ -14164,7 +14599,7 @@
                 <a:ea typeface="Georgia" pitchFamily="34" charset="-122"/>
                 <a:cs typeface="Georgia" pitchFamily="34" charset="-120"/>
               </a:rPr>
-              <a:t>TRANSAKT</a:t>
+              <a:t>BlockMed</a:t>
             </a:r>
             <a:endParaRPr lang="en-US" sz="850" dirty="0"/>
           </a:p>
@@ -14191,7 +14626,7 @@
           <a:bodyPr wrap="square" lIns="0" tIns="0" rIns="0" bIns="0" rtlCol="0" anchor="ctr"/>
           <a:lstStyle/>
           <a:p>
-            <a:pPr algn="r" indent="0" marL="0">
+            <a:pPr marL="0" indent="0" algn="r">
               <a:buNone/>
             </a:pPr>
             <a:r>
@@ -14225,6 +14660,7 @@
         <a:solidFill>
           <a:srgbClr val="FFFFFF"/>
         </a:solidFill>
+        <a:effectLst/>
       </p:bgPr>
     </p:bg>
     <p:spTree>
@@ -14262,7 +14698,7 @@
           <a:bodyPr wrap="square" lIns="0" tIns="0" rIns="0" bIns="0" rtlCol="0" anchor="ctr"/>
           <a:lstStyle/>
           <a:p>
-            <a:pPr indent="0" marL="0">
+            <a:pPr marL="0" indent="0">
               <a:buNone/>
             </a:pPr>
             <a:r>
@@ -14301,9 +14737,20 @@
           <a:bodyPr wrap="square" lIns="0" tIns="0" rIns="0" bIns="0" rtlCol="0" anchor="ctr"/>
           <a:lstStyle/>
           <a:p>
-            <a:pPr algn="r" indent="0" marL="0">
-              <a:buNone/>
-            </a:pPr>
+            <a:pPr marL="0" indent="0" algn="r">
+              <a:buNone/>
+            </a:pPr>
+            <a:r>
+              <a:rPr lang="en-US" sz="1200" i="1" dirty="0" err="1">
+                <a:solidFill>
+                  <a:srgbClr val="6B7280"/>
+                </a:solidFill>
+                <a:latin typeface="Calibri" pitchFamily="34" charset="0"/>
+                <a:ea typeface="Calibri" pitchFamily="34" charset="-122"/>
+                <a:cs typeface="Calibri" pitchFamily="34" charset="-120"/>
+              </a:rPr>
+              <a:t>BlockMed</a:t>
+            </a:r>
             <a:r>
               <a:rPr lang="en-US" sz="1200" i="1" dirty="0">
                 <a:solidFill>
@@ -14313,7 +14760,7 @@
                 <a:ea typeface="Calibri" pitchFamily="34" charset="-122"/>
                 <a:cs typeface="Calibri" pitchFamily="34" charset="-120"/>
               </a:rPr>
-              <a:t>Transakt — Pitch Deck</a:t>
+              <a:t> — Pitch Deck</a:t>
             </a:r>
             <a:endParaRPr lang="en-US" sz="1200" dirty="0"/>
           </a:p>
@@ -14343,6 +14790,13 @@
             <a:prstDash val="solid"/>
           </a:ln>
         </p:spPr>
+        <p:txBody>
+          <a:bodyPr/>
+          <a:lstStyle/>
+          <a:p>
+            <a:endParaRPr lang="en-US"/>
+          </a:p>
+        </p:txBody>
       </p:sp>
       <p:sp>
         <p:nvSpPr>
@@ -14363,6 +14817,13 @@
           </a:solidFill>
           <a:ln/>
         </p:spPr>
+        <p:txBody>
+          <a:bodyPr/>
+          <a:lstStyle/>
+          <a:p>
+            <a:endParaRPr lang="en-US"/>
+          </a:p>
+        </p:txBody>
       </p:sp>
       <p:sp>
         <p:nvSpPr>
@@ -14385,7 +14846,7 @@
           <a:bodyPr wrap="square" lIns="0" tIns="0" rIns="0" bIns="0" rtlCol="0" anchor="ctr"/>
           <a:lstStyle/>
           <a:p>
-            <a:pPr indent="0" marL="0">
+            <a:pPr marL="0" indent="0">
               <a:buNone/>
             </a:pPr>
             <a:r>
@@ -14424,7 +14885,7 @@
           <a:bodyPr wrap="square" lIns="0" tIns="0" rIns="0" bIns="0" rtlCol="0" anchor="t"/>
           <a:lstStyle/>
           <a:p>
-            <a:pPr algn="l" indent="0" marL="0">
+            <a:pPr marL="0" indent="0" algn="l">
               <a:lnSpc>
                 <a:spcPct val="98000"/>
               </a:lnSpc>
@@ -14466,7 +14927,7 @@
           <a:bodyPr wrap="square" lIns="0" tIns="0" rIns="0" bIns="0" rtlCol="0" anchor="t"/>
           <a:lstStyle/>
           <a:p>
-            <a:pPr algn="l" marL="127000" indent="-127000">
+            <a:pPr marL="127000" indent="-127000" algn="l">
               <a:lnSpc>
                 <a:spcPct val="98000"/>
               </a:lnSpc>
@@ -14490,7 +14951,7 @@
             <a:endParaRPr lang="en-US" sz="930" dirty="0"/>
           </a:p>
           <a:p>
-            <a:pPr algn="l" marL="127000" indent="-127000">
+            <a:pPr marL="127000" indent="-127000" algn="l">
               <a:lnSpc>
                 <a:spcPct val="98000"/>
               </a:lnSpc>
@@ -14514,7 +14975,7 @@
             <a:endParaRPr lang="en-US" sz="930" dirty="0"/>
           </a:p>
           <a:p>
-            <a:pPr algn="l" marL="127000" indent="-127000">
+            <a:pPr marL="127000" indent="-127000" algn="l">
               <a:lnSpc>
                 <a:spcPct val="98000"/>
               </a:lnSpc>
@@ -14538,7 +14999,7 @@
             <a:endParaRPr lang="en-US" sz="930" dirty="0"/>
           </a:p>
           <a:p>
-            <a:pPr algn="l" marL="127000" indent="-127000">
+            <a:pPr marL="127000" indent="-127000" algn="l">
               <a:lnSpc>
                 <a:spcPct val="98000"/>
               </a:lnSpc>
@@ -14587,6 +15048,13 @@
             <a:prstDash val="solid"/>
           </a:ln>
         </p:spPr>
+        <p:txBody>
+          <a:bodyPr/>
+          <a:lstStyle/>
+          <a:p>
+            <a:endParaRPr lang="en-US"/>
+          </a:p>
+        </p:txBody>
       </p:sp>
       <p:sp>
         <p:nvSpPr>
@@ -14607,6 +15075,13 @@
           </a:solidFill>
           <a:ln/>
         </p:spPr>
+        <p:txBody>
+          <a:bodyPr/>
+          <a:lstStyle/>
+          <a:p>
+            <a:endParaRPr lang="en-US"/>
+          </a:p>
+        </p:txBody>
       </p:sp>
       <p:sp>
         <p:nvSpPr>
@@ -14629,7 +15104,7 @@
           <a:bodyPr wrap="square" lIns="0" tIns="0" rIns="0" bIns="0" rtlCol="0" anchor="ctr"/>
           <a:lstStyle/>
           <a:p>
-            <a:pPr indent="0" marL="0">
+            <a:pPr marL="0" indent="0">
               <a:buNone/>
             </a:pPr>
             <a:r>
@@ -14668,7 +15143,7 @@
           <a:bodyPr wrap="square" lIns="0" tIns="0" rIns="0" bIns="0" rtlCol="0" anchor="t"/>
           <a:lstStyle/>
           <a:p>
-            <a:pPr algn="l" indent="0" marL="0">
+            <a:pPr marL="0" indent="0" algn="l">
               <a:lnSpc>
                 <a:spcPct val="98000"/>
               </a:lnSpc>
@@ -14710,7 +15185,7 @@
           <a:bodyPr wrap="square" lIns="0" tIns="0" rIns="0" bIns="0" rtlCol="0" anchor="t"/>
           <a:lstStyle/>
           <a:p>
-            <a:pPr algn="l" marL="127000" indent="-127000">
+            <a:pPr marL="127000" indent="-127000" algn="l">
               <a:lnSpc>
                 <a:spcPct val="98000"/>
               </a:lnSpc>
@@ -14734,7 +15209,7 @@
             <a:endParaRPr lang="en-US" sz="930" dirty="0"/>
           </a:p>
           <a:p>
-            <a:pPr algn="l" marL="127000" indent="-127000">
+            <a:pPr marL="127000" indent="-127000" algn="l">
               <a:lnSpc>
                 <a:spcPct val="98000"/>
               </a:lnSpc>
@@ -14758,7 +15233,7 @@
             <a:endParaRPr lang="en-US" sz="930" dirty="0"/>
           </a:p>
           <a:p>
-            <a:pPr algn="l" marL="127000" indent="-127000">
+            <a:pPr marL="127000" indent="-127000" algn="l">
               <a:lnSpc>
                 <a:spcPct val="98000"/>
               </a:lnSpc>
@@ -14782,7 +15257,7 @@
             <a:endParaRPr lang="en-US" sz="930" dirty="0"/>
           </a:p>
           <a:p>
-            <a:pPr algn="l" marL="127000" indent="-127000">
+            <a:pPr marL="127000" indent="-127000" algn="l">
               <a:lnSpc>
                 <a:spcPct val="98000"/>
               </a:lnSpc>
@@ -14831,6 +15306,13 @@
             <a:prstDash val="solid"/>
           </a:ln>
         </p:spPr>
+        <p:txBody>
+          <a:bodyPr/>
+          <a:lstStyle/>
+          <a:p>
+            <a:endParaRPr lang="en-US"/>
+          </a:p>
+        </p:txBody>
       </p:sp>
       <p:sp>
         <p:nvSpPr>
@@ -14851,6 +15333,13 @@
           </a:solidFill>
           <a:ln/>
         </p:spPr>
+        <p:txBody>
+          <a:bodyPr/>
+          <a:lstStyle/>
+          <a:p>
+            <a:endParaRPr lang="en-US"/>
+          </a:p>
+        </p:txBody>
       </p:sp>
       <p:sp>
         <p:nvSpPr>
@@ -14873,7 +15362,7 @@
           <a:bodyPr wrap="square" lIns="0" tIns="0" rIns="0" bIns="0" rtlCol="0" anchor="ctr"/>
           <a:lstStyle/>
           <a:p>
-            <a:pPr indent="0" marL="0">
+            <a:pPr marL="0" indent="0">
               <a:buNone/>
             </a:pPr>
             <a:r>
@@ -14912,7 +15401,7 @@
           <a:bodyPr wrap="square" lIns="0" tIns="0" rIns="0" bIns="0" rtlCol="0" anchor="t"/>
           <a:lstStyle/>
           <a:p>
-            <a:pPr algn="l" indent="0" marL="0">
+            <a:pPr marL="0" indent="0" algn="l">
               <a:lnSpc>
                 <a:spcPct val="98000"/>
               </a:lnSpc>
@@ -14954,7 +15443,7 @@
           <a:bodyPr wrap="square" lIns="0" tIns="0" rIns="0" bIns="0" rtlCol="0" anchor="t"/>
           <a:lstStyle/>
           <a:p>
-            <a:pPr algn="l" marL="127000" indent="-127000">
+            <a:pPr marL="127000" indent="-127000" algn="l">
               <a:lnSpc>
                 <a:spcPct val="98000"/>
               </a:lnSpc>
@@ -14978,7 +15467,7 @@
             <a:endParaRPr lang="en-US" sz="930" dirty="0"/>
           </a:p>
           <a:p>
-            <a:pPr algn="l" marL="127000" indent="-127000">
+            <a:pPr marL="127000" indent="-127000" algn="l">
               <a:lnSpc>
                 <a:spcPct val="98000"/>
               </a:lnSpc>
@@ -15002,7 +15491,7 @@
             <a:endParaRPr lang="en-US" sz="930" dirty="0"/>
           </a:p>
           <a:p>
-            <a:pPr algn="l" marL="127000" indent="-127000">
+            <a:pPr marL="127000" indent="-127000" algn="l">
               <a:lnSpc>
                 <a:spcPct val="98000"/>
               </a:lnSpc>
@@ -15026,7 +15515,7 @@
             <a:endParaRPr lang="en-US" sz="930" dirty="0"/>
           </a:p>
           <a:p>
-            <a:pPr algn="l" marL="127000" indent="-127000">
+            <a:pPr marL="127000" indent="-127000" algn="l">
               <a:lnSpc>
                 <a:spcPct val="98000"/>
               </a:lnSpc>
@@ -15075,6 +15564,13 @@
             <a:prstDash val="solid"/>
           </a:ln>
         </p:spPr>
+        <p:txBody>
+          <a:bodyPr/>
+          <a:lstStyle/>
+          <a:p>
+            <a:endParaRPr lang="en-US"/>
+          </a:p>
+        </p:txBody>
       </p:sp>
       <p:sp>
         <p:nvSpPr>
@@ -15095,6 +15591,13 @@
           </a:solidFill>
           <a:ln/>
         </p:spPr>
+        <p:txBody>
+          <a:bodyPr/>
+          <a:lstStyle/>
+          <a:p>
+            <a:endParaRPr lang="en-US"/>
+          </a:p>
+        </p:txBody>
       </p:sp>
       <p:sp>
         <p:nvSpPr>
@@ -15117,7 +15620,7 @@
           <a:bodyPr wrap="square" lIns="0" tIns="0" rIns="0" bIns="0" rtlCol="0" anchor="ctr"/>
           <a:lstStyle/>
           <a:p>
-            <a:pPr indent="0" marL="0">
+            <a:pPr marL="0" indent="0">
               <a:buNone/>
             </a:pPr>
             <a:r>
@@ -15156,7 +15659,7 @@
           <a:bodyPr wrap="square" lIns="0" tIns="0" rIns="0" bIns="0" rtlCol="0" anchor="t"/>
           <a:lstStyle/>
           <a:p>
-            <a:pPr algn="l" indent="0" marL="0">
+            <a:pPr marL="0" indent="0" algn="l">
               <a:lnSpc>
                 <a:spcPct val="98000"/>
               </a:lnSpc>
@@ -15198,7 +15701,7 @@
           <a:bodyPr wrap="square" lIns="0" tIns="0" rIns="0" bIns="0" rtlCol="0" anchor="t"/>
           <a:lstStyle/>
           <a:p>
-            <a:pPr algn="l" marL="127000" indent="-127000">
+            <a:pPr marL="127000" indent="-127000" algn="l">
               <a:lnSpc>
                 <a:spcPct val="98000"/>
               </a:lnSpc>
@@ -15222,7 +15725,7 @@
             <a:endParaRPr lang="en-US" sz="930" dirty="0"/>
           </a:p>
           <a:p>
-            <a:pPr algn="l" marL="127000" indent="-127000">
+            <a:pPr marL="127000" indent="-127000" algn="l">
               <a:lnSpc>
                 <a:spcPct val="98000"/>
               </a:lnSpc>
@@ -15246,7 +15749,7 @@
             <a:endParaRPr lang="en-US" sz="930" dirty="0"/>
           </a:p>
           <a:p>
-            <a:pPr algn="l" marL="127000" indent="-127000">
+            <a:pPr marL="127000" indent="-127000" algn="l">
               <a:lnSpc>
                 <a:spcPct val="98000"/>
               </a:lnSpc>
@@ -15270,7 +15773,7 @@
             <a:endParaRPr lang="en-US" sz="930" dirty="0"/>
           </a:p>
           <a:p>
-            <a:pPr algn="l" marL="127000" indent="-127000">
+            <a:pPr marL="127000" indent="-127000" algn="l">
               <a:lnSpc>
                 <a:spcPct val="98000"/>
               </a:lnSpc>
@@ -15319,6 +15822,13 @@
             <a:prstDash val="solid"/>
           </a:ln>
         </p:spPr>
+        <p:txBody>
+          <a:bodyPr/>
+          <a:lstStyle/>
+          <a:p>
+            <a:endParaRPr lang="en-US"/>
+          </a:p>
+        </p:txBody>
       </p:sp>
       <p:sp>
         <p:nvSpPr>
@@ -15339,6 +15849,13 @@
           </a:solidFill>
           <a:ln/>
         </p:spPr>
+        <p:txBody>
+          <a:bodyPr/>
+          <a:lstStyle/>
+          <a:p>
+            <a:endParaRPr lang="en-US"/>
+          </a:p>
+        </p:txBody>
       </p:sp>
       <p:sp>
         <p:nvSpPr>
@@ -15361,7 +15878,7 @@
           <a:bodyPr wrap="square" lIns="0" tIns="0" rIns="0" bIns="0" rtlCol="0" anchor="ctr"/>
           <a:lstStyle/>
           <a:p>
-            <a:pPr indent="0" marL="0">
+            <a:pPr marL="0" indent="0">
               <a:buNone/>
             </a:pPr>
             <a:r>
@@ -15400,7 +15917,7 @@
           <a:bodyPr wrap="square" lIns="0" tIns="0" rIns="0" bIns="0" rtlCol="0" anchor="t"/>
           <a:lstStyle/>
           <a:p>
-            <a:pPr algn="l" indent="0" marL="0">
+            <a:pPr marL="0" indent="0" algn="l">
               <a:lnSpc>
                 <a:spcPct val="98000"/>
               </a:lnSpc>
@@ -15442,7 +15959,7 @@
           <a:bodyPr wrap="square" lIns="0" tIns="0" rIns="0" bIns="0" rtlCol="0" anchor="t"/>
           <a:lstStyle/>
           <a:p>
-            <a:pPr algn="l" marL="127000" indent="-127000">
+            <a:pPr marL="127000" indent="-127000" algn="l">
               <a:lnSpc>
                 <a:spcPct val="98000"/>
               </a:lnSpc>
@@ -15466,7 +15983,7 @@
             <a:endParaRPr lang="en-US" sz="930" dirty="0"/>
           </a:p>
           <a:p>
-            <a:pPr algn="l" marL="127000" indent="-127000">
+            <a:pPr marL="127000" indent="-127000" algn="l">
               <a:lnSpc>
                 <a:spcPct val="98000"/>
               </a:lnSpc>
@@ -15490,7 +16007,7 @@
             <a:endParaRPr lang="en-US" sz="930" dirty="0"/>
           </a:p>
           <a:p>
-            <a:pPr algn="l" marL="127000" indent="-127000">
+            <a:pPr marL="127000" indent="-127000" algn="l">
               <a:lnSpc>
                 <a:spcPct val="98000"/>
               </a:lnSpc>
@@ -15514,7 +16031,7 @@
             <a:endParaRPr lang="en-US" sz="930" dirty="0"/>
           </a:p>
           <a:p>
-            <a:pPr algn="l" marL="127000" indent="-127000">
+            <a:pPr marL="127000" indent="-127000" algn="l">
               <a:lnSpc>
                 <a:spcPct val="98000"/>
               </a:lnSpc>
@@ -15563,6 +16080,13 @@
             <a:prstDash val="solid"/>
           </a:ln>
         </p:spPr>
+        <p:txBody>
+          <a:bodyPr/>
+          <a:lstStyle/>
+          <a:p>
+            <a:endParaRPr lang="en-US"/>
+          </a:p>
+        </p:txBody>
       </p:sp>
       <p:sp>
         <p:nvSpPr>
@@ -15583,6 +16107,13 @@
           </a:solidFill>
           <a:ln/>
         </p:spPr>
+        <p:txBody>
+          <a:bodyPr/>
+          <a:lstStyle/>
+          <a:p>
+            <a:endParaRPr lang="en-US"/>
+          </a:p>
+        </p:txBody>
       </p:sp>
       <p:sp>
         <p:nvSpPr>
@@ -15605,7 +16136,7 @@
           <a:bodyPr wrap="square" lIns="0" tIns="0" rIns="0" bIns="0" rtlCol="0" anchor="ctr"/>
           <a:lstStyle/>
           <a:p>
-            <a:pPr indent="0" marL="0">
+            <a:pPr marL="0" indent="0">
               <a:buNone/>
             </a:pPr>
             <a:r>
@@ -15644,7 +16175,7 @@
           <a:bodyPr wrap="square" lIns="0" tIns="0" rIns="0" bIns="0" rtlCol="0" anchor="t"/>
           <a:lstStyle/>
           <a:p>
-            <a:pPr algn="l" indent="0" marL="0">
+            <a:pPr marL="0" indent="0" algn="l">
               <a:lnSpc>
                 <a:spcPct val="98000"/>
               </a:lnSpc>
@@ -15686,7 +16217,7 @@
           <a:bodyPr wrap="square" lIns="0" tIns="0" rIns="0" bIns="0" rtlCol="0" anchor="t"/>
           <a:lstStyle/>
           <a:p>
-            <a:pPr algn="l" marL="127000" indent="-127000">
+            <a:pPr marL="127000" indent="-127000" algn="l">
               <a:lnSpc>
                 <a:spcPct val="98000"/>
               </a:lnSpc>
@@ -15710,7 +16241,7 @@
             <a:endParaRPr lang="en-US" sz="930" dirty="0"/>
           </a:p>
           <a:p>
-            <a:pPr algn="l" marL="127000" indent="-127000">
+            <a:pPr marL="127000" indent="-127000" algn="l">
               <a:lnSpc>
                 <a:spcPct val="98000"/>
               </a:lnSpc>
@@ -15734,7 +16265,7 @@
             <a:endParaRPr lang="en-US" sz="930" dirty="0"/>
           </a:p>
           <a:p>
-            <a:pPr algn="l" marL="127000" indent="-127000">
+            <a:pPr marL="127000" indent="-127000" algn="l">
               <a:lnSpc>
                 <a:spcPct val="98000"/>
               </a:lnSpc>
@@ -15758,7 +16289,7 @@
             <a:endParaRPr lang="en-US" sz="930" dirty="0"/>
           </a:p>
           <a:p>
-            <a:pPr algn="l" marL="127000" indent="-127000">
+            <a:pPr marL="127000" indent="-127000" algn="l">
               <a:lnSpc>
                 <a:spcPct val="98000"/>
               </a:lnSpc>
@@ -15807,6 +16338,13 @@
             <a:prstDash val="solid"/>
           </a:ln>
         </p:spPr>
+        <p:txBody>
+          <a:bodyPr/>
+          <a:lstStyle/>
+          <a:p>
+            <a:endParaRPr lang="en-US"/>
+          </a:p>
+        </p:txBody>
       </p:sp>
       <p:sp>
         <p:nvSpPr>
@@ -15827,6 +16365,13 @@
           </a:solidFill>
           <a:ln/>
         </p:spPr>
+        <p:txBody>
+          <a:bodyPr/>
+          <a:lstStyle/>
+          <a:p>
+            <a:endParaRPr lang="en-US"/>
+          </a:p>
+        </p:txBody>
       </p:sp>
       <p:sp>
         <p:nvSpPr>
@@ -15849,7 +16394,7 @@
           <a:bodyPr wrap="square" lIns="0" tIns="0" rIns="0" bIns="0" rtlCol="0" anchor="ctr"/>
           <a:lstStyle/>
           <a:p>
-            <a:pPr indent="0" marL="0">
+            <a:pPr marL="0" indent="0">
               <a:buNone/>
             </a:pPr>
             <a:r>
@@ -15888,7 +16433,7 @@
           <a:bodyPr wrap="square" lIns="0" tIns="0" rIns="0" bIns="0" rtlCol="0" anchor="t"/>
           <a:lstStyle/>
           <a:p>
-            <a:pPr algn="l" indent="0" marL="0">
+            <a:pPr marL="0" indent="0" algn="l">
               <a:lnSpc>
                 <a:spcPct val="98000"/>
               </a:lnSpc>
@@ -15930,7 +16475,7 @@
           <a:bodyPr wrap="square" lIns="0" tIns="0" rIns="0" bIns="0" rtlCol="0" anchor="t"/>
           <a:lstStyle/>
           <a:p>
-            <a:pPr algn="l" marL="127000" indent="-127000">
+            <a:pPr marL="127000" indent="-127000" algn="l">
               <a:lnSpc>
                 <a:spcPct val="98000"/>
               </a:lnSpc>
@@ -15954,7 +16499,7 @@
             <a:endParaRPr lang="en-US" sz="930" dirty="0"/>
           </a:p>
           <a:p>
-            <a:pPr algn="l" marL="127000" indent="-127000">
+            <a:pPr marL="127000" indent="-127000" algn="l">
               <a:lnSpc>
                 <a:spcPct val="98000"/>
               </a:lnSpc>
@@ -15978,7 +16523,7 @@
             <a:endParaRPr lang="en-US" sz="930" dirty="0"/>
           </a:p>
           <a:p>
-            <a:pPr algn="l" marL="127000" indent="-127000">
+            <a:pPr marL="127000" indent="-127000" algn="l">
               <a:lnSpc>
                 <a:spcPct val="98000"/>
               </a:lnSpc>
@@ -16002,7 +16547,7 @@
             <a:endParaRPr lang="en-US" sz="930" dirty="0"/>
           </a:p>
           <a:p>
-            <a:pPr algn="l" marL="127000" indent="-127000">
+            <a:pPr marL="127000" indent="-127000" algn="l">
               <a:lnSpc>
                 <a:spcPct val="98000"/>
               </a:lnSpc>
@@ -16051,6 +16596,13 @@
             <a:prstDash val="solid"/>
           </a:ln>
         </p:spPr>
+        <p:txBody>
+          <a:bodyPr/>
+          <a:lstStyle/>
+          <a:p>
+            <a:endParaRPr lang="en-US"/>
+          </a:p>
+        </p:txBody>
       </p:sp>
       <p:sp>
         <p:nvSpPr>
@@ -16071,6 +16623,13 @@
           </a:solidFill>
           <a:ln/>
         </p:spPr>
+        <p:txBody>
+          <a:bodyPr/>
+          <a:lstStyle/>
+          <a:p>
+            <a:endParaRPr lang="en-US"/>
+          </a:p>
+        </p:txBody>
       </p:sp>
       <p:sp>
         <p:nvSpPr>
@@ -16093,7 +16652,7 @@
           <a:bodyPr wrap="square" lIns="0" tIns="0" rIns="0" bIns="0" rtlCol="0" anchor="ctr"/>
           <a:lstStyle/>
           <a:p>
-            <a:pPr indent="0" marL="0">
+            <a:pPr marL="0" indent="0">
               <a:buNone/>
             </a:pPr>
             <a:r>
@@ -16132,7 +16691,7 @@
           <a:bodyPr wrap="square" lIns="0" tIns="0" rIns="0" bIns="0" rtlCol="0" anchor="t"/>
           <a:lstStyle/>
           <a:p>
-            <a:pPr algn="l" indent="0" marL="0">
+            <a:pPr marL="0" indent="0" algn="l">
               <a:lnSpc>
                 <a:spcPct val="98000"/>
               </a:lnSpc>
@@ -16174,7 +16733,7 @@
           <a:bodyPr wrap="square" lIns="0" tIns="0" rIns="0" bIns="0" rtlCol="0" anchor="t"/>
           <a:lstStyle/>
           <a:p>
-            <a:pPr algn="l" marL="127000" indent="-127000">
+            <a:pPr marL="127000" indent="-127000" algn="l">
               <a:lnSpc>
                 <a:spcPct val="98000"/>
               </a:lnSpc>
@@ -16198,7 +16757,7 @@
             <a:endParaRPr lang="en-US" sz="930" dirty="0"/>
           </a:p>
           <a:p>
-            <a:pPr algn="l" marL="127000" indent="-127000">
+            <a:pPr marL="127000" indent="-127000" algn="l">
               <a:lnSpc>
                 <a:spcPct val="98000"/>
               </a:lnSpc>
@@ -16222,7 +16781,7 @@
             <a:endParaRPr lang="en-US" sz="930" dirty="0"/>
           </a:p>
           <a:p>
-            <a:pPr algn="l" marL="127000" indent="-127000">
+            <a:pPr marL="127000" indent="-127000" algn="l">
               <a:lnSpc>
                 <a:spcPct val="98000"/>
               </a:lnSpc>
@@ -16246,7 +16805,7 @@
             <a:endParaRPr lang="en-US" sz="930" dirty="0"/>
           </a:p>
           <a:p>
-            <a:pPr algn="l" marL="127000" indent="-127000">
+            <a:pPr marL="127000" indent="-127000" algn="l">
               <a:lnSpc>
                 <a:spcPct val="98000"/>
               </a:lnSpc>
@@ -16292,7 +16851,7 @@
           <a:bodyPr wrap="square" lIns="0" tIns="0" rIns="0" bIns="0" rtlCol="0" anchor="ctr"/>
           <a:lstStyle/>
           <a:p>
-            <a:pPr indent="0" marL="0">
+            <a:pPr marL="0" indent="0">
               <a:buNone/>
             </a:pPr>
             <a:r>
@@ -16331,7 +16890,7 @@
           <a:bodyPr wrap="square" lIns="0" tIns="0" rIns="0" bIns="0" rtlCol="0" anchor="ctr"/>
           <a:lstStyle/>
           <a:p>
-            <a:pPr algn="r" indent="0" marL="0">
+            <a:pPr marL="0" indent="0" algn="r">
               <a:buNone/>
             </a:pPr>
             <a:r>
@@ -16365,6 +16924,7 @@
         <a:solidFill>
           <a:srgbClr val="FFFFFF"/>
         </a:solidFill>
+        <a:effectLst/>
       </p:bgPr>
     </p:bg>
     <p:spTree>
@@ -16402,11 +16962,11 @@
           <a:bodyPr wrap="square" lIns="0" tIns="0" rIns="0" bIns="0" rtlCol="0" anchor="ctr"/>
           <a:lstStyle/>
           <a:p>
-            <a:pPr algn="l" indent="0" marL="0">
-              <a:buNone/>
-            </a:pPr>
-            <a:r>
-              <a:rPr lang="en-US" sz="1100" b="1" spc="300" kern="0" dirty="0">
+            <a:pPr marL="0" indent="0" algn="l">
+              <a:buNone/>
+            </a:pPr>
+            <a:r>
+              <a:rPr lang="en-US" sz="1100" b="1" kern="0" spc="300" dirty="0">
                 <a:solidFill>
                   <a:srgbClr val="0E8C7F"/>
                 </a:solidFill>
@@ -16441,7 +17001,7 @@
           <a:bodyPr wrap="square" lIns="0" tIns="0" rIns="0" bIns="0" rtlCol="0" anchor="ctr"/>
           <a:lstStyle/>
           <a:p>
-            <a:pPr algn="l" indent="0" marL="0">
+            <a:pPr marL="0" indent="0" algn="l">
               <a:buNone/>
             </a:pPr>
             <a:r>
@@ -16483,6 +17043,13 @@
             <a:prstDash val="solid"/>
           </a:ln>
         </p:spPr>
+        <p:txBody>
+          <a:bodyPr/>
+          <a:lstStyle/>
+          <a:p>
+            <a:endParaRPr lang="en-US"/>
+          </a:p>
+        </p:txBody>
       </p:sp>
       <p:sp>
         <p:nvSpPr>
@@ -16503,6 +17070,13 @@
           </a:solidFill>
           <a:ln/>
         </p:spPr>
+        <p:txBody>
+          <a:bodyPr/>
+          <a:lstStyle/>
+          <a:p>
+            <a:endParaRPr lang="en-US"/>
+          </a:p>
+        </p:txBody>
       </p:sp>
       <p:sp>
         <p:nvSpPr>
@@ -16525,11 +17099,11 @@
           <a:bodyPr wrap="square" lIns="0" tIns="0" rIns="0" bIns="0" rtlCol="0" anchor="ctr"/>
           <a:lstStyle/>
           <a:p>
-            <a:pPr indent="0" marL="0">
-              <a:buNone/>
-            </a:pPr>
-            <a:r>
-              <a:rPr lang="en-US" sz="1200" b="1" spc="200" kern="0" dirty="0">
+            <a:pPr marL="0" indent="0">
+              <a:buNone/>
+            </a:pPr>
+            <a:r>
+              <a:rPr lang="en-US" sz="1200" b="1" kern="0" spc="200" dirty="0">
                 <a:solidFill>
                   <a:srgbClr val="FFFFFF"/>
                 </a:solidFill>
@@ -16564,7 +17138,7 @@
           <a:bodyPr wrap="square" lIns="0" tIns="0" rIns="0" bIns="0" rtlCol="0" anchor="t"/>
           <a:lstStyle/>
           <a:p>
-            <a:pPr algn="l" indent="0" marL="0">
+            <a:pPr marL="0" indent="0" algn="l">
               <a:lnSpc>
                 <a:spcPct val="98000"/>
               </a:lnSpc>
@@ -16581,13 +17155,60 @@
               </a:rPr>
               <a:t>Team  </a:t>
             </a:r>
-            <a:pPr algn="l" indent="0" marL="0">
+            <a:r>
+              <a:rPr lang="en-US" sz="1150" dirty="0">
+                <a:solidFill>
+                  <a:srgbClr val="2A2F3A"/>
+                </a:solidFill>
+                <a:latin typeface="Calibri" pitchFamily="34" charset="0"/>
+                <a:ea typeface="Calibri" pitchFamily="34" charset="-122"/>
+                <a:cs typeface="Calibri" pitchFamily="34" charset="-120"/>
+              </a:rPr>
+              <a:t>Six co-founders, roles assigned — CEO, CTO, CFO, COO, CCO, CRO</a:t>
+            </a:r>
+            <a:endParaRPr lang="en-US" sz="1150" dirty="0"/>
+          </a:p>
+        </p:txBody>
+      </p:sp>
+      <p:sp>
+        <p:nvSpPr>
+          <p:cNvPr id="8" name="Text 6"/>
+          <p:cNvSpPr/>
+          <p:nvPr/>
+        </p:nvSpPr>
+        <p:spPr>
+          <a:xfrm>
+            <a:off x="777240" y="3026664"/>
+            <a:ext cx="4846320" cy="566928"/>
+          </a:xfrm>
+          <a:prstGeom prst="rect">
+            <a:avLst/>
+          </a:prstGeom>
+          <a:noFill/>
+          <a:ln/>
+        </p:spPr>
+        <p:txBody>
+          <a:bodyPr wrap="square" lIns="0" tIns="0" rIns="0" bIns="0" rtlCol="0" anchor="t"/>
+          <a:lstStyle/>
+          <a:p>
+            <a:pPr marL="0" indent="0" algn="l">
               <a:lnSpc>
                 <a:spcPct val="98000"/>
               </a:lnSpc>
               <a:buNone/>
             </a:pPr>
             <a:r>
+              <a:rPr lang="en-US" sz="1150" b="1" dirty="0">
+                <a:solidFill>
+                  <a:srgbClr val="0B1B3A"/>
+                </a:solidFill>
+                <a:latin typeface="Calibri" pitchFamily="34" charset="0"/>
+                <a:ea typeface="Calibri" pitchFamily="34" charset="-122"/>
+                <a:cs typeface="Calibri" pitchFamily="34" charset="-120"/>
+              </a:rPr>
+              <a:t>Spec  </a:t>
+            </a:r>
+            <a:r>
               <a:rPr lang="en-US" sz="1150" dirty="0">
                 <a:solidFill>
                   <a:srgbClr val="2A2F3A"/>
@@ -16596,7 +17217,7 @@
                 <a:ea typeface="Calibri" pitchFamily="34" charset="-122"/>
                 <a:cs typeface="Calibri" pitchFamily="34" charset="-120"/>
               </a:rPr>
-              <a:t>Six co-founders, roles assigned — CEO, CTO, CFO, COO, CCO, CRO</a:t>
+              <a:t>End-to-end product spec — Phase 0 escrow + Phase 1 trust / custody / dispute</a:t>
             </a:r>
             <a:endParaRPr lang="en-US" sz="1150" dirty="0"/>
           </a:p>
@@ -16604,13 +17225,13 @@
       </p:sp>
       <p:sp>
         <p:nvSpPr>
-          <p:cNvPr id="8" name="Text 6"/>
-          <p:cNvSpPr/>
-          <p:nvPr/>
-        </p:nvSpPr>
-        <p:spPr>
-          <a:xfrm>
-            <a:off x="777240" y="3026664"/>
+          <p:cNvPr id="9" name="Text 7"/>
+          <p:cNvSpPr/>
+          <p:nvPr/>
+        </p:nvSpPr>
+        <p:spPr>
+          <a:xfrm>
+            <a:off x="777240" y="3611880"/>
             <a:ext cx="4846320" cy="566928"/>
           </a:xfrm>
           <a:prstGeom prst="rect">
@@ -16623,7 +17244,7 @@
           <a:bodyPr wrap="square" lIns="0" tIns="0" rIns="0" bIns="0" rtlCol="0" anchor="t"/>
           <a:lstStyle/>
           <a:p>
-            <a:pPr algn="l" indent="0" marL="0">
+            <a:pPr marL="0" indent="0" algn="l">
               <a:lnSpc>
                 <a:spcPct val="98000"/>
               </a:lnSpc>
@@ -16638,15 +17259,62 @@
                 <a:ea typeface="Calibri" pitchFamily="34" charset="-122"/>
                 <a:cs typeface="Calibri" pitchFamily="34" charset="-120"/>
               </a:rPr>
-              <a:t>Spec  </a:t>
-            </a:r>
-            <a:pPr algn="l" indent="0" marL="0">
+              <a:t>System flow  </a:t>
+            </a:r>
+            <a:r>
+              <a:rPr lang="en-US" sz="1150" dirty="0">
+                <a:solidFill>
+                  <a:srgbClr val="2A2F3A"/>
+                </a:solidFill>
+                <a:latin typeface="Calibri" pitchFamily="34" charset="0"/>
+                <a:ea typeface="Calibri" pitchFamily="34" charset="-122"/>
+                <a:cs typeface="Calibri" pitchFamily="34" charset="-120"/>
+              </a:rPr>
+              <a:t>Intake → verification → settlement → dispute, mapped end-to-end</a:t>
+            </a:r>
+            <a:endParaRPr lang="en-US" sz="1150" dirty="0"/>
+          </a:p>
+        </p:txBody>
+      </p:sp>
+      <p:sp>
+        <p:nvSpPr>
+          <p:cNvPr id="10" name="Text 8"/>
+          <p:cNvSpPr/>
+          <p:nvPr/>
+        </p:nvSpPr>
+        <p:spPr>
+          <a:xfrm>
+            <a:off x="777240" y="4197096"/>
+            <a:ext cx="4846320" cy="566928"/>
+          </a:xfrm>
+          <a:prstGeom prst="rect">
+            <a:avLst/>
+          </a:prstGeom>
+          <a:noFill/>
+          <a:ln/>
+        </p:spPr>
+        <p:txBody>
+          <a:bodyPr wrap="square" lIns="0" tIns="0" rIns="0" bIns="0" rtlCol="0" anchor="t"/>
+          <a:lstStyle/>
+          <a:p>
+            <a:pPr marL="0" indent="0" algn="l">
               <a:lnSpc>
                 <a:spcPct val="98000"/>
               </a:lnSpc>
               <a:buNone/>
             </a:pPr>
             <a:r>
+              <a:rPr lang="en-US" sz="1150" b="1" dirty="0">
+                <a:solidFill>
+                  <a:srgbClr val="0B1B3A"/>
+                </a:solidFill>
+                <a:latin typeface="Calibri" pitchFamily="34" charset="0"/>
+                <a:ea typeface="Calibri" pitchFamily="34" charset="-122"/>
+                <a:cs typeface="Calibri" pitchFamily="34" charset="-120"/>
+              </a:rPr>
+              <a:t>Brand  </a:t>
+            </a:r>
+            <a:r>
               <a:rPr lang="en-US" sz="1150" dirty="0">
                 <a:solidFill>
                   <a:srgbClr val="2A2F3A"/>
@@ -16655,7 +17323,7 @@
                 <a:ea typeface="Calibri" pitchFamily="34" charset="-122"/>
                 <a:cs typeface="Calibri" pitchFamily="34" charset="-120"/>
               </a:rPr>
-              <a:t>End-to-end product spec — Phase 0 escrow + Phase 1 trust / custody / dispute</a:t>
+              <a:t>Name, tagline, palette, pitch deck (Slides 1–6)</a:t>
             </a:r>
             <a:endParaRPr lang="en-US" sz="1150" dirty="0"/>
           </a:p>
@@ -16663,13 +17331,13 @@
       </p:sp>
       <p:sp>
         <p:nvSpPr>
-          <p:cNvPr id="9" name="Text 7"/>
-          <p:cNvSpPr/>
-          <p:nvPr/>
-        </p:nvSpPr>
-        <p:spPr>
-          <a:xfrm>
-            <a:off x="777240" y="3611880"/>
+          <p:cNvPr id="11" name="Text 9"/>
+          <p:cNvSpPr/>
+          <p:nvPr/>
+        </p:nvSpPr>
+        <p:spPr>
+          <a:xfrm>
+            <a:off x="777240" y="4782312"/>
             <a:ext cx="4846320" cy="566928"/>
           </a:xfrm>
           <a:prstGeom prst="rect">
@@ -16682,7 +17350,7 @@
           <a:bodyPr wrap="square" lIns="0" tIns="0" rIns="0" bIns="0" rtlCol="0" anchor="t"/>
           <a:lstStyle/>
           <a:p>
-            <a:pPr algn="l" indent="0" marL="0">
+            <a:pPr marL="0" indent="0" algn="l">
               <a:lnSpc>
                 <a:spcPct val="98000"/>
               </a:lnSpc>
@@ -16697,132 +17365,8 @@
                 <a:ea typeface="Calibri" pitchFamily="34" charset="-122"/>
                 <a:cs typeface="Calibri" pitchFamily="34" charset="-120"/>
               </a:rPr>
-              <a:t>System flow  </a:t>
-            </a:r>
-            <a:pPr algn="l" indent="0" marL="0">
-              <a:lnSpc>
-                <a:spcPct val="98000"/>
-              </a:lnSpc>
-              <a:buNone/>
-            </a:pPr>
-            <a:r>
-              <a:rPr lang="en-US" sz="1150" dirty="0">
-                <a:solidFill>
-                  <a:srgbClr val="2A2F3A"/>
-                </a:solidFill>
-                <a:latin typeface="Calibri" pitchFamily="34" charset="0"/>
-                <a:ea typeface="Calibri" pitchFamily="34" charset="-122"/>
-                <a:cs typeface="Calibri" pitchFamily="34" charset="-120"/>
-              </a:rPr>
-              <a:t>Intake → verification → settlement → dispute, mapped end-to-end</a:t>
-            </a:r>
-            <a:endParaRPr lang="en-US" sz="1150" dirty="0"/>
-          </a:p>
-        </p:txBody>
-      </p:sp>
-      <p:sp>
-        <p:nvSpPr>
-          <p:cNvPr id="10" name="Text 8"/>
-          <p:cNvSpPr/>
-          <p:nvPr/>
-        </p:nvSpPr>
-        <p:spPr>
-          <a:xfrm>
-            <a:off x="777240" y="4197096"/>
-            <a:ext cx="4846320" cy="566928"/>
-          </a:xfrm>
-          <a:prstGeom prst="rect">
-            <a:avLst/>
-          </a:prstGeom>
-          <a:noFill/>
-          <a:ln/>
-        </p:spPr>
-        <p:txBody>
-          <a:bodyPr wrap="square" lIns="0" tIns="0" rIns="0" bIns="0" rtlCol="0" anchor="t"/>
-          <a:lstStyle/>
-          <a:p>
-            <a:pPr algn="l" indent="0" marL="0">
-              <a:lnSpc>
-                <a:spcPct val="98000"/>
-              </a:lnSpc>
-              <a:buNone/>
-            </a:pPr>
-            <a:r>
-              <a:rPr lang="en-US" sz="1150" b="1" dirty="0">
-                <a:solidFill>
-                  <a:srgbClr val="0B1B3A"/>
-                </a:solidFill>
-                <a:latin typeface="Calibri" pitchFamily="34" charset="0"/>
-                <a:ea typeface="Calibri" pitchFamily="34" charset="-122"/>
-                <a:cs typeface="Calibri" pitchFamily="34" charset="-120"/>
-              </a:rPr>
-              <a:t>Brand  </a:t>
-            </a:r>
-            <a:pPr algn="l" indent="0" marL="0">
-              <a:lnSpc>
-                <a:spcPct val="98000"/>
-              </a:lnSpc>
-              <a:buNone/>
-            </a:pPr>
-            <a:r>
-              <a:rPr lang="en-US" sz="1150" dirty="0">
-                <a:solidFill>
-                  <a:srgbClr val="2A2F3A"/>
-                </a:solidFill>
-                <a:latin typeface="Calibri" pitchFamily="34" charset="0"/>
-                <a:ea typeface="Calibri" pitchFamily="34" charset="-122"/>
-                <a:cs typeface="Calibri" pitchFamily="34" charset="-120"/>
-              </a:rPr>
-              <a:t>Name, tagline, palette, pitch deck (Slides 1–6)</a:t>
-            </a:r>
-            <a:endParaRPr lang="en-US" sz="1150" dirty="0"/>
-          </a:p>
-        </p:txBody>
-      </p:sp>
-      <p:sp>
-        <p:nvSpPr>
-          <p:cNvPr id="11" name="Text 9"/>
-          <p:cNvSpPr/>
-          <p:nvPr/>
-        </p:nvSpPr>
-        <p:spPr>
-          <a:xfrm>
-            <a:off x="777240" y="4782312"/>
-            <a:ext cx="4846320" cy="566928"/>
-          </a:xfrm>
-          <a:prstGeom prst="rect">
-            <a:avLst/>
-          </a:prstGeom>
-          <a:noFill/>
-          <a:ln/>
-        </p:spPr>
-        <p:txBody>
-          <a:bodyPr wrap="square" lIns="0" tIns="0" rIns="0" bIns="0" rtlCol="0" anchor="t"/>
-          <a:lstStyle/>
-          <a:p>
-            <a:pPr algn="l" indent="0" marL="0">
-              <a:lnSpc>
-                <a:spcPct val="98000"/>
-              </a:lnSpc>
-              <a:buNone/>
-            </a:pPr>
-            <a:r>
-              <a:rPr lang="en-US" sz="1150" b="1" dirty="0">
-                <a:solidFill>
-                  <a:srgbClr val="0B1B3A"/>
-                </a:solidFill>
-                <a:latin typeface="Calibri" pitchFamily="34" charset="0"/>
-                <a:ea typeface="Calibri" pitchFamily="34" charset="-122"/>
-                <a:cs typeface="Calibri" pitchFamily="34" charset="-120"/>
-              </a:rPr>
               <a:t>Market signal  </a:t>
             </a:r>
-            <a:pPr algn="l" indent="0" marL="0">
-              <a:lnSpc>
-                <a:spcPct val="98000"/>
-              </a:lnSpc>
-              <a:buNone/>
-            </a:pPr>
             <a:r>
               <a:rPr lang="en-US" sz="1150" dirty="0">
                 <a:solidFill>
@@ -16862,6 +17406,13 @@
             <a:prstDash val="solid"/>
           </a:ln>
         </p:spPr>
+        <p:txBody>
+          <a:bodyPr/>
+          <a:lstStyle/>
+          <a:p>
+            <a:endParaRPr lang="en-US"/>
+          </a:p>
+        </p:txBody>
       </p:sp>
       <p:sp>
         <p:nvSpPr>
@@ -16882,6 +17433,13 @@
           </a:solidFill>
           <a:ln/>
         </p:spPr>
+        <p:txBody>
+          <a:bodyPr/>
+          <a:lstStyle/>
+          <a:p>
+            <a:endParaRPr lang="en-US"/>
+          </a:p>
+        </p:txBody>
       </p:sp>
       <p:sp>
         <p:nvSpPr>
@@ -16904,11 +17462,11 @@
           <a:bodyPr wrap="square" lIns="0" tIns="0" rIns="0" bIns="0" rtlCol="0" anchor="ctr"/>
           <a:lstStyle/>
           <a:p>
-            <a:pPr indent="0" marL="0">
-              <a:buNone/>
-            </a:pPr>
-            <a:r>
-              <a:rPr lang="en-US" sz="1200" b="1" spc="100" kern="0" dirty="0">
+            <a:pPr marL="0" indent="0">
+              <a:buNone/>
+            </a:pPr>
+            <a:r>
+              <a:rPr lang="en-US" sz="1200" b="1" kern="0" spc="100" dirty="0">
                 <a:solidFill>
                   <a:srgbClr val="FFFFFF"/>
                 </a:solidFill>
@@ -16943,7 +17501,7 @@
           <a:bodyPr wrap="square" lIns="0" tIns="0" rIns="0" bIns="0" rtlCol="0" anchor="t"/>
           <a:lstStyle/>
           <a:p>
-            <a:pPr algn="l" indent="0" marL="0">
+            <a:pPr marL="0" indent="0" algn="l">
               <a:lnSpc>
                 <a:spcPct val="98000"/>
               </a:lnSpc>
@@ -16960,13 +17518,60 @@
               </a:rPr>
               <a:t>Engineering  </a:t>
             </a:r>
-            <a:pPr algn="l" indent="0" marL="0">
+            <a:r>
+              <a:rPr lang="en-US" sz="1150" dirty="0">
+                <a:solidFill>
+                  <a:srgbClr val="2A2F3A"/>
+                </a:solidFill>
+                <a:latin typeface="Calibri" pitchFamily="34" charset="0"/>
+                <a:ea typeface="Calibri" pitchFamily="34" charset="-122"/>
+                <a:cs typeface="Calibri" pitchFamily="34" charset="-120"/>
+              </a:rPr>
+              <a:t>Smart-contract escrow (testnet), deal intake UI, document review console</a:t>
+            </a:r>
+            <a:endParaRPr lang="en-US" sz="1150" dirty="0"/>
+          </a:p>
+        </p:txBody>
+      </p:sp>
+      <p:sp>
+        <p:nvSpPr>
+          <p:cNvPr id="16" name="Text 14"/>
+          <p:cNvSpPr/>
+          <p:nvPr/>
+        </p:nvSpPr>
+        <p:spPr>
+          <a:xfrm>
+            <a:off x="6565392" y="3026664"/>
+            <a:ext cx="4846320" cy="566928"/>
+          </a:xfrm>
+          <a:prstGeom prst="rect">
+            <a:avLst/>
+          </a:prstGeom>
+          <a:noFill/>
+          <a:ln/>
+        </p:spPr>
+        <p:txBody>
+          <a:bodyPr wrap="square" lIns="0" tIns="0" rIns="0" bIns="0" rtlCol="0" anchor="t"/>
+          <a:lstStyle/>
+          <a:p>
+            <a:pPr marL="0" indent="0" algn="l">
               <a:lnSpc>
                 <a:spcPct val="98000"/>
               </a:lnSpc>
               <a:buNone/>
             </a:pPr>
             <a:r>
+              <a:rPr lang="en-US" sz="1150" b="1" dirty="0">
+                <a:solidFill>
+                  <a:srgbClr val="0A5F55"/>
+                </a:solidFill>
+                <a:latin typeface="Calibri" pitchFamily="34" charset="0"/>
+                <a:ea typeface="Calibri" pitchFamily="34" charset="-122"/>
+                <a:cs typeface="Calibri" pitchFamily="34" charset="-120"/>
+              </a:rPr>
+              <a:t>Compliance + partners  </a:t>
+            </a:r>
+            <a:r>
               <a:rPr lang="en-US" sz="1150" dirty="0">
                 <a:solidFill>
                   <a:srgbClr val="2A2F3A"/>
@@ -16975,7 +17580,7 @@
                 <a:ea typeface="Calibri" pitchFamily="34" charset="-122"/>
                 <a:cs typeface="Calibri" pitchFamily="34" charset="-120"/>
               </a:rPr>
-              <a:t>Smart-contract escrow (testnet), deal intake UI, document review console</a:t>
+              <a:t>Document forensics outreach, carrier API research, KYB / KYC scoping</a:t>
             </a:r>
             <a:endParaRPr lang="en-US" sz="1150" dirty="0"/>
           </a:p>
@@ -16983,13 +17588,13 @@
       </p:sp>
       <p:sp>
         <p:nvSpPr>
-          <p:cNvPr id="16" name="Text 14"/>
-          <p:cNvSpPr/>
-          <p:nvPr/>
-        </p:nvSpPr>
-        <p:spPr>
-          <a:xfrm>
-            <a:off x="6565392" y="3026664"/>
+          <p:cNvPr id="17" name="Text 15"/>
+          <p:cNvSpPr/>
+          <p:nvPr/>
+        </p:nvSpPr>
+        <p:spPr>
+          <a:xfrm>
+            <a:off x="6565392" y="3611880"/>
             <a:ext cx="4846320" cy="566928"/>
           </a:xfrm>
           <a:prstGeom prst="rect">
@@ -17002,7 +17607,7 @@
           <a:bodyPr wrap="square" lIns="0" tIns="0" rIns="0" bIns="0" rtlCol="0" anchor="t"/>
           <a:lstStyle/>
           <a:p>
-            <a:pPr algn="l" indent="0" marL="0">
+            <a:pPr marL="0" indent="0" algn="l">
               <a:lnSpc>
                 <a:spcPct val="98000"/>
               </a:lnSpc>
@@ -17017,15 +17622,62 @@
                 <a:ea typeface="Calibri" pitchFamily="34" charset="-122"/>
                 <a:cs typeface="Calibri" pitchFamily="34" charset="-120"/>
               </a:rPr>
-              <a:t>Compliance + partners  </a:t>
-            </a:r>
-            <a:pPr algn="l" indent="0" marL="0">
+              <a:t>Regulatory  </a:t>
+            </a:r>
+            <a:r>
+              <a:rPr lang="en-US" sz="1150" dirty="0">
+                <a:solidFill>
+                  <a:srgbClr val="2A2F3A"/>
+                </a:solidFill>
+                <a:latin typeface="Calibri" pitchFamily="34" charset="0"/>
+                <a:ea typeface="Calibri" pitchFamily="34" charset="-122"/>
+                <a:cs typeface="Calibri" pitchFamily="34" charset="-120"/>
+              </a:rPr>
+              <a:t>DIFC FinTech Hive / ADGM RegLab exploratory conversations</a:t>
+            </a:r>
+            <a:endParaRPr lang="en-US" sz="1150" dirty="0"/>
+          </a:p>
+        </p:txBody>
+      </p:sp>
+      <p:sp>
+        <p:nvSpPr>
+          <p:cNvPr id="18" name="Text 16"/>
+          <p:cNvSpPr/>
+          <p:nvPr/>
+        </p:nvSpPr>
+        <p:spPr>
+          <a:xfrm>
+            <a:off x="6565392" y="4197096"/>
+            <a:ext cx="4846320" cy="566928"/>
+          </a:xfrm>
+          <a:prstGeom prst="rect">
+            <a:avLst/>
+          </a:prstGeom>
+          <a:noFill/>
+          <a:ln/>
+        </p:spPr>
+        <p:txBody>
+          <a:bodyPr wrap="square" lIns="0" tIns="0" rIns="0" bIns="0" rtlCol="0" anchor="t"/>
+          <a:lstStyle/>
+          <a:p>
+            <a:pPr marL="0" indent="0" algn="l">
               <a:lnSpc>
                 <a:spcPct val="98000"/>
               </a:lnSpc>
               <a:buNone/>
             </a:pPr>
             <a:r>
+              <a:rPr lang="en-US" sz="1150" b="1" dirty="0">
+                <a:solidFill>
+                  <a:srgbClr val="0A5F55"/>
+                </a:solidFill>
+                <a:latin typeface="Calibri" pitchFamily="34" charset="0"/>
+                <a:ea typeface="Calibri" pitchFamily="34" charset="-122"/>
+                <a:cs typeface="Calibri" pitchFamily="34" charset="-120"/>
+              </a:rPr>
+              <a:t>Customer dev  </a:t>
+            </a:r>
+            <a:r>
               <a:rPr lang="en-US" sz="1150" dirty="0">
                 <a:solidFill>
                   <a:srgbClr val="2A2F3A"/>
@@ -17034,7 +17686,7 @@
                 <a:ea typeface="Calibri" pitchFamily="34" charset="-122"/>
                 <a:cs typeface="Calibri" pitchFamily="34" charset="-120"/>
               </a:rPr>
-              <a:t>Document forensics outreach, carrier API research, KYB / KYC scoping</a:t>
+              <a:t>Gulf chambers, freight-forwarder referrals</a:t>
             </a:r>
             <a:endParaRPr lang="en-US" sz="1150" dirty="0"/>
           </a:p>
@@ -17042,13 +17694,13 @@
       </p:sp>
       <p:sp>
         <p:nvSpPr>
-          <p:cNvPr id="17" name="Text 15"/>
-          <p:cNvSpPr/>
-          <p:nvPr/>
-        </p:nvSpPr>
-        <p:spPr>
-          <a:xfrm>
-            <a:off x="6565392" y="3611880"/>
+          <p:cNvPr id="19" name="Text 17"/>
+          <p:cNvSpPr/>
+          <p:nvPr/>
+        </p:nvSpPr>
+        <p:spPr>
+          <a:xfrm>
+            <a:off x="6565392" y="4782312"/>
             <a:ext cx="4846320" cy="566928"/>
           </a:xfrm>
           <a:prstGeom prst="rect">
@@ -17061,7 +17713,7 @@
           <a:bodyPr wrap="square" lIns="0" tIns="0" rIns="0" bIns="0" rtlCol="0" anchor="t"/>
           <a:lstStyle/>
           <a:p>
-            <a:pPr algn="l" indent="0" marL="0">
+            <a:pPr marL="0" indent="0" algn="l">
               <a:lnSpc>
                 <a:spcPct val="98000"/>
               </a:lnSpc>
@@ -17076,132 +17728,8 @@
                 <a:ea typeface="Calibri" pitchFamily="34" charset="-122"/>
                 <a:cs typeface="Calibri" pitchFamily="34" charset="-120"/>
               </a:rPr>
-              <a:t>Regulatory  </a:t>
-            </a:r>
-            <a:pPr algn="l" indent="0" marL="0">
-              <a:lnSpc>
-                <a:spcPct val="98000"/>
-              </a:lnSpc>
-              <a:buNone/>
-            </a:pPr>
-            <a:r>
-              <a:rPr lang="en-US" sz="1150" dirty="0">
-                <a:solidFill>
-                  <a:srgbClr val="2A2F3A"/>
-                </a:solidFill>
-                <a:latin typeface="Calibri" pitchFamily="34" charset="0"/>
-                <a:ea typeface="Calibri" pitchFamily="34" charset="-122"/>
-                <a:cs typeface="Calibri" pitchFamily="34" charset="-120"/>
-              </a:rPr>
-              <a:t>DIFC FinTech Hive / ADGM RegLab exploratory conversations</a:t>
-            </a:r>
-            <a:endParaRPr lang="en-US" sz="1150" dirty="0"/>
-          </a:p>
-        </p:txBody>
-      </p:sp>
-      <p:sp>
-        <p:nvSpPr>
-          <p:cNvPr id="18" name="Text 16"/>
-          <p:cNvSpPr/>
-          <p:nvPr/>
-        </p:nvSpPr>
-        <p:spPr>
-          <a:xfrm>
-            <a:off x="6565392" y="4197096"/>
-            <a:ext cx="4846320" cy="566928"/>
-          </a:xfrm>
-          <a:prstGeom prst="rect">
-            <a:avLst/>
-          </a:prstGeom>
-          <a:noFill/>
-          <a:ln/>
-        </p:spPr>
-        <p:txBody>
-          <a:bodyPr wrap="square" lIns="0" tIns="0" rIns="0" bIns="0" rtlCol="0" anchor="t"/>
-          <a:lstStyle/>
-          <a:p>
-            <a:pPr algn="l" indent="0" marL="0">
-              <a:lnSpc>
-                <a:spcPct val="98000"/>
-              </a:lnSpc>
-              <a:buNone/>
-            </a:pPr>
-            <a:r>
-              <a:rPr lang="en-US" sz="1150" b="1" dirty="0">
-                <a:solidFill>
-                  <a:srgbClr val="0A5F55"/>
-                </a:solidFill>
-                <a:latin typeface="Calibri" pitchFamily="34" charset="0"/>
-                <a:ea typeface="Calibri" pitchFamily="34" charset="-122"/>
-                <a:cs typeface="Calibri" pitchFamily="34" charset="-120"/>
-              </a:rPr>
-              <a:t>Customer dev  </a:t>
-            </a:r>
-            <a:pPr algn="l" indent="0" marL="0">
-              <a:lnSpc>
-                <a:spcPct val="98000"/>
-              </a:lnSpc>
-              <a:buNone/>
-            </a:pPr>
-            <a:r>
-              <a:rPr lang="en-US" sz="1150" dirty="0">
-                <a:solidFill>
-                  <a:srgbClr val="2A2F3A"/>
-                </a:solidFill>
-                <a:latin typeface="Calibri" pitchFamily="34" charset="0"/>
-                <a:ea typeface="Calibri" pitchFamily="34" charset="-122"/>
-                <a:cs typeface="Calibri" pitchFamily="34" charset="-120"/>
-              </a:rPr>
-              <a:t>Gulf chambers, freight-forwarder referrals</a:t>
-            </a:r>
-            <a:endParaRPr lang="en-US" sz="1150" dirty="0"/>
-          </a:p>
-        </p:txBody>
-      </p:sp>
-      <p:sp>
-        <p:nvSpPr>
-          <p:cNvPr id="19" name="Text 17"/>
-          <p:cNvSpPr/>
-          <p:nvPr/>
-        </p:nvSpPr>
-        <p:spPr>
-          <a:xfrm>
-            <a:off x="6565392" y="4782312"/>
-            <a:ext cx="4846320" cy="566928"/>
-          </a:xfrm>
-          <a:prstGeom prst="rect">
-            <a:avLst/>
-          </a:prstGeom>
-          <a:noFill/>
-          <a:ln/>
-        </p:spPr>
-        <p:txBody>
-          <a:bodyPr wrap="square" lIns="0" tIns="0" rIns="0" bIns="0" rtlCol="0" anchor="t"/>
-          <a:lstStyle/>
-          <a:p>
-            <a:pPr algn="l" indent="0" marL="0">
-              <a:lnSpc>
-                <a:spcPct val="98000"/>
-              </a:lnSpc>
-              <a:buNone/>
-            </a:pPr>
-            <a:r>
-              <a:rPr lang="en-US" sz="1150" b="1" dirty="0">
-                <a:solidFill>
-                  <a:srgbClr val="0A5F55"/>
-                </a:solidFill>
-                <a:latin typeface="Calibri" pitchFamily="34" charset="0"/>
-                <a:ea typeface="Calibri" pitchFamily="34" charset="-122"/>
-                <a:cs typeface="Calibri" pitchFamily="34" charset="-120"/>
-              </a:rPr>
               <a:t>Milestones  </a:t>
             </a:r>
-            <a:pPr algn="l" indent="0" marL="0">
-              <a:lnSpc>
-                <a:spcPct val="98000"/>
-              </a:lnSpc>
-              <a:buNone/>
-            </a:pPr>
             <a:r>
               <a:rPr lang="en-US" sz="1150" dirty="0">
                 <a:solidFill>
@@ -17236,6 +17764,13 @@
           </a:solidFill>
           <a:ln/>
         </p:spPr>
+        <p:txBody>
+          <a:bodyPr/>
+          <a:lstStyle/>
+          <a:p>
+            <a:endParaRPr lang="en-US"/>
+          </a:p>
+        </p:txBody>
       </p:sp>
       <p:sp>
         <p:nvSpPr>
@@ -17258,7 +17793,7 @@
           <a:bodyPr wrap="square" lIns="0" tIns="0" rIns="0" bIns="0" rtlCol="0" anchor="ctr"/>
           <a:lstStyle/>
           <a:p>
-            <a:pPr algn="ctr" indent="0" marL="0">
+            <a:pPr marL="0" indent="0" algn="ctr">
               <a:buNone/>
             </a:pPr>
             <a:r>
@@ -17297,11 +17832,8 @@
           <a:bodyPr wrap="square" lIns="0" tIns="0" rIns="0" bIns="0" rtlCol="0" anchor="ctr"/>
           <a:lstStyle/>
           <a:p>
-            <a:pPr algn="l" indent="0" marL="0">
-              <a:buNone/>
-            </a:pPr>
-            <a:r>
-              <a:rPr lang="en-US" sz="850" spc="200" kern="0" dirty="0">
+            <a:r>
+              <a:rPr lang="en-US" sz="850" kern="0" spc="200" dirty="0" err="1">
                 <a:solidFill>
                   <a:srgbClr val="6B7280"/>
                 </a:solidFill>
@@ -17309,7 +17841,7 @@
                 <a:ea typeface="Georgia" pitchFamily="34" charset="-122"/>
                 <a:cs typeface="Georgia" pitchFamily="34" charset="-120"/>
               </a:rPr>
-              <a:t>TRANSAKT</a:t>
+              <a:t>BlockMed</a:t>
             </a:r>
             <a:endParaRPr lang="en-US" sz="850" dirty="0"/>
           </a:p>
@@ -17336,7 +17868,7 @@
           <a:bodyPr wrap="square" lIns="0" tIns="0" rIns="0" bIns="0" rtlCol="0" anchor="ctr"/>
           <a:lstStyle/>
           <a:p>
-            <a:pPr algn="r" indent="0" marL="0">
+            <a:pPr marL="0" indent="0" algn="r">
               <a:buNone/>
             </a:pPr>
             <a:r>
@@ -17370,6 +17902,7 @@
         <a:solidFill>
           <a:srgbClr val="FFFFFF"/>
         </a:solidFill>
+        <a:effectLst/>
       </p:bgPr>
     </p:bg>
     <p:spTree>
@@ -17407,11 +17940,11 @@
           <a:bodyPr wrap="square" lIns="0" tIns="0" rIns="0" bIns="0" rtlCol="0" anchor="ctr"/>
           <a:lstStyle/>
           <a:p>
-            <a:pPr algn="l" indent="0" marL="0">
-              <a:buNone/>
-            </a:pPr>
-            <a:r>
-              <a:rPr lang="en-US" sz="1100" b="1" spc="300" kern="0" dirty="0">
+            <a:pPr marL="0" indent="0" algn="l">
+              <a:buNone/>
+            </a:pPr>
+            <a:r>
+              <a:rPr lang="en-US" sz="1100" b="1" kern="0" spc="300" dirty="0">
                 <a:solidFill>
                   <a:srgbClr val="0E8C7F"/>
                 </a:solidFill>
@@ -17446,7 +17979,7 @@
           <a:bodyPr wrap="square" lIns="0" tIns="0" rIns="0" bIns="0" rtlCol="0" anchor="ctr"/>
           <a:lstStyle/>
           <a:p>
-            <a:pPr algn="l" indent="0" marL="0">
+            <a:pPr marL="0" indent="0" algn="l">
               <a:buNone/>
             </a:pPr>
             <a:r>
@@ -17488,13 +18021,20 @@
             <a:prstDash val="solid"/>
           </a:ln>
           <a:effectLst>
-            <a:outerShdw sx="100000" sy="100000" kx="0" ky="0" algn="bl" rotWithShape="0" blurRad="63500" dist="25400" dir="8100000">
+            <a:outerShdw blurRad="63500" dist="25400" dir="8100000" algn="bl" rotWithShape="0">
               <a:srgbClr val="000000">
                 <a:alpha val="10000"/>
               </a:srgbClr>
             </a:outerShdw>
           </a:effectLst>
         </p:spPr>
+        <p:txBody>
+          <a:bodyPr/>
+          <a:lstStyle/>
+          <a:p>
+            <a:endParaRPr lang="en-US"/>
+          </a:p>
+        </p:txBody>
       </p:sp>
       <p:sp>
         <p:nvSpPr>
@@ -17515,17 +18055,24 @@
           </a:solidFill>
           <a:ln/>
         </p:spPr>
+        <p:txBody>
+          <a:bodyPr/>
+          <a:lstStyle/>
+          <a:p>
+            <a:endParaRPr lang="en-US"/>
+          </a:p>
+        </p:txBody>
       </p:sp>
       <p:pic>
         <p:nvPicPr>
-          <p:cNvPr id="6" name="Image 0" descr="preencoded.png">    </p:cNvPr>
+          <p:cNvPr id="6" name="Image 0" descr="preencoded.png"/>
           <p:cNvPicPr>
             <a:picLocks noChangeAspect="1"/>
           </p:cNvPicPr>
           <p:nvPr/>
         </p:nvPicPr>
         <p:blipFill>
-          <a:blip r:embed="rId1"/>
+          <a:blip r:embed="rId3"/>
           <a:stretch>
             <a:fillRect/>
           </a:stretch>
@@ -17561,7 +18108,7 @@
           <a:bodyPr wrap="square" lIns="0" tIns="0" rIns="0" bIns="0" rtlCol="0" anchor="ctr"/>
           <a:lstStyle/>
           <a:p>
-            <a:pPr indent="0" marL="0">
+            <a:pPr marL="0" indent="0">
               <a:buNone/>
             </a:pPr>
             <a:r>
@@ -17600,7 +18147,7 @@
           <a:bodyPr wrap="square" lIns="0" tIns="0" rIns="0" bIns="0" rtlCol="0" anchor="t"/>
           <a:lstStyle/>
           <a:p>
-            <a:pPr algn="l" marL="152400" indent="-152400">
+            <a:pPr marL="152400" indent="-152400" algn="l">
               <a:lnSpc>
                 <a:spcPct val="100000"/>
               </a:lnSpc>
@@ -17624,7 +18171,7 @@
             <a:endParaRPr lang="en-US" sz="1130" dirty="0"/>
           </a:p>
           <a:p>
-            <a:pPr algn="l" marL="152400" indent="-152400">
+            <a:pPr marL="152400" indent="-152400" algn="l">
               <a:lnSpc>
                 <a:spcPct val="100000"/>
               </a:lnSpc>
@@ -17648,7 +18195,7 @@
             <a:endParaRPr lang="en-US" sz="1130" dirty="0"/>
           </a:p>
           <a:p>
-            <a:pPr algn="l" marL="152400" indent="-152400">
+            <a:pPr marL="152400" indent="-152400" algn="l">
               <a:lnSpc>
                 <a:spcPct val="100000"/>
               </a:lnSpc>
@@ -17697,13 +18244,20 @@
             <a:prstDash val="solid"/>
           </a:ln>
           <a:effectLst>
-            <a:outerShdw sx="100000" sy="100000" kx="0" ky="0" algn="bl" rotWithShape="0" blurRad="63500" dist="25400" dir="8100000">
+            <a:outerShdw blurRad="63500" dist="25400" dir="8100000" algn="bl" rotWithShape="0">
               <a:srgbClr val="000000">
                 <a:alpha val="10000"/>
               </a:srgbClr>
             </a:outerShdw>
           </a:effectLst>
         </p:spPr>
+        <p:txBody>
+          <a:bodyPr/>
+          <a:lstStyle/>
+          <a:p>
+            <a:endParaRPr lang="en-US"/>
+          </a:p>
+        </p:txBody>
       </p:sp>
       <p:sp>
         <p:nvSpPr>
@@ -17724,17 +18278,24 @@
           </a:solidFill>
           <a:ln/>
         </p:spPr>
+        <p:txBody>
+          <a:bodyPr/>
+          <a:lstStyle/>
+          <a:p>
+            <a:endParaRPr lang="en-US"/>
+          </a:p>
+        </p:txBody>
       </p:sp>
       <p:pic>
         <p:nvPicPr>
-          <p:cNvPr id="11" name="Image 1" descr="preencoded.png">    </p:cNvPr>
+          <p:cNvPr id="11" name="Image 1" descr="preencoded.png"/>
           <p:cNvPicPr>
             <a:picLocks noChangeAspect="1"/>
           </p:cNvPicPr>
           <p:nvPr/>
         </p:nvPicPr>
         <p:blipFill>
-          <a:blip r:embed="rId2"/>
+          <a:blip r:embed="rId4"/>
           <a:stretch>
             <a:fillRect/>
           </a:stretch>
@@ -17770,7 +18331,7 @@
           <a:bodyPr wrap="square" lIns="0" tIns="0" rIns="0" bIns="0" rtlCol="0" anchor="ctr"/>
           <a:lstStyle/>
           <a:p>
-            <a:pPr indent="0" marL="0">
+            <a:pPr marL="0" indent="0">
               <a:buNone/>
             </a:pPr>
             <a:r>
@@ -17809,7 +18370,7 @@
           <a:bodyPr wrap="square" lIns="0" tIns="0" rIns="0" bIns="0" rtlCol="0" anchor="t"/>
           <a:lstStyle/>
           <a:p>
-            <a:pPr algn="l" marL="152400" indent="-152400">
+            <a:pPr marL="152400" indent="-152400" algn="l">
               <a:lnSpc>
                 <a:spcPct val="100000"/>
               </a:lnSpc>
@@ -17833,7 +18394,7 @@
             <a:endParaRPr lang="en-US" sz="1130" dirty="0"/>
           </a:p>
           <a:p>
-            <a:pPr algn="l" marL="152400" indent="-152400">
+            <a:pPr marL="152400" indent="-152400" algn="l">
               <a:lnSpc>
                 <a:spcPct val="100000"/>
               </a:lnSpc>
@@ -17857,7 +18418,7 @@
             <a:endParaRPr lang="en-US" sz="1130" dirty="0"/>
           </a:p>
           <a:p>
-            <a:pPr algn="l" marL="152400" indent="-152400">
+            <a:pPr marL="152400" indent="-152400" algn="l">
               <a:lnSpc>
                 <a:spcPct val="100000"/>
               </a:lnSpc>
@@ -17906,13 +18467,20 @@
             <a:prstDash val="solid"/>
           </a:ln>
           <a:effectLst>
-            <a:outerShdw sx="100000" sy="100000" kx="0" ky="0" algn="bl" rotWithShape="0" blurRad="63500" dist="25400" dir="8100000">
+            <a:outerShdw blurRad="63500" dist="25400" dir="8100000" algn="bl" rotWithShape="0">
               <a:srgbClr val="000000">
                 <a:alpha val="10000"/>
               </a:srgbClr>
             </a:outerShdw>
           </a:effectLst>
         </p:spPr>
+        <p:txBody>
+          <a:bodyPr/>
+          <a:lstStyle/>
+          <a:p>
+            <a:endParaRPr lang="en-US"/>
+          </a:p>
+        </p:txBody>
       </p:sp>
       <p:sp>
         <p:nvSpPr>
@@ -17933,17 +18501,24 @@
           </a:solidFill>
           <a:ln/>
         </p:spPr>
+        <p:txBody>
+          <a:bodyPr/>
+          <a:lstStyle/>
+          <a:p>
+            <a:endParaRPr lang="en-US"/>
+          </a:p>
+        </p:txBody>
       </p:sp>
       <p:pic>
         <p:nvPicPr>
-          <p:cNvPr id="16" name="Image 2" descr="preencoded.png">    </p:cNvPr>
+          <p:cNvPr id="16" name="Image 2" descr="preencoded.png"/>
           <p:cNvPicPr>
             <a:picLocks noChangeAspect="1"/>
           </p:cNvPicPr>
           <p:nvPr/>
         </p:nvPicPr>
         <p:blipFill>
-          <a:blip r:embed="rId3"/>
+          <a:blip r:embed="rId5"/>
           <a:stretch>
             <a:fillRect/>
           </a:stretch>
@@ -17979,7 +18554,7 @@
           <a:bodyPr wrap="square" lIns="0" tIns="0" rIns="0" bIns="0" rtlCol="0" anchor="ctr"/>
           <a:lstStyle/>
           <a:p>
-            <a:pPr indent="0" marL="0">
+            <a:pPr marL="0" indent="0">
               <a:buNone/>
             </a:pPr>
             <a:r>
@@ -18018,7 +18593,7 @@
           <a:bodyPr wrap="square" lIns="0" tIns="0" rIns="0" bIns="0" rtlCol="0" anchor="t"/>
           <a:lstStyle/>
           <a:p>
-            <a:pPr algn="l" marL="152400" indent="-152400">
+            <a:pPr marL="152400" indent="-152400" algn="l">
               <a:lnSpc>
                 <a:spcPct val="100000"/>
               </a:lnSpc>
@@ -18042,7 +18617,7 @@
             <a:endParaRPr lang="en-US" sz="1130" dirty="0"/>
           </a:p>
           <a:p>
-            <a:pPr algn="l" marL="152400" indent="-152400">
+            <a:pPr marL="152400" indent="-152400" algn="l">
               <a:lnSpc>
                 <a:spcPct val="100000"/>
               </a:lnSpc>
@@ -18066,7 +18641,7 @@
             <a:endParaRPr lang="en-US" sz="1130" dirty="0"/>
           </a:p>
           <a:p>
-            <a:pPr algn="l" marL="152400" indent="-152400">
+            <a:pPr marL="152400" indent="-152400" algn="l">
               <a:lnSpc>
                 <a:spcPct val="100000"/>
               </a:lnSpc>
@@ -18115,13 +18690,20 @@
             <a:prstDash val="solid"/>
           </a:ln>
           <a:effectLst>
-            <a:outerShdw sx="100000" sy="100000" kx="0" ky="0" algn="bl" rotWithShape="0" blurRad="63500" dist="25400" dir="8100000">
+            <a:outerShdw blurRad="63500" dist="25400" dir="8100000" algn="bl" rotWithShape="0">
               <a:srgbClr val="000000">
                 <a:alpha val="10000"/>
               </a:srgbClr>
             </a:outerShdw>
           </a:effectLst>
         </p:spPr>
+        <p:txBody>
+          <a:bodyPr/>
+          <a:lstStyle/>
+          <a:p>
+            <a:endParaRPr lang="en-US"/>
+          </a:p>
+        </p:txBody>
       </p:sp>
       <p:sp>
         <p:nvSpPr>
@@ -18142,17 +18724,24 @@
           </a:solidFill>
           <a:ln/>
         </p:spPr>
+        <p:txBody>
+          <a:bodyPr/>
+          <a:lstStyle/>
+          <a:p>
+            <a:endParaRPr lang="en-US"/>
+          </a:p>
+        </p:txBody>
       </p:sp>
       <p:pic>
         <p:nvPicPr>
-          <p:cNvPr id="21" name="Image 3" descr="preencoded.png">    </p:cNvPr>
+          <p:cNvPr id="21" name="Image 3" descr="preencoded.png"/>
           <p:cNvPicPr>
             <a:picLocks noChangeAspect="1"/>
           </p:cNvPicPr>
           <p:nvPr/>
         </p:nvPicPr>
         <p:blipFill>
-          <a:blip r:embed="rId4"/>
+          <a:blip r:embed="rId6"/>
           <a:stretch>
             <a:fillRect/>
           </a:stretch>
@@ -18188,7 +18777,7 @@
           <a:bodyPr wrap="square" lIns="0" tIns="0" rIns="0" bIns="0" rtlCol="0" anchor="ctr"/>
           <a:lstStyle/>
           <a:p>
-            <a:pPr indent="0" marL="0">
+            <a:pPr marL="0" indent="0">
               <a:buNone/>
             </a:pPr>
             <a:r>
@@ -18227,7 +18816,7 @@
           <a:bodyPr wrap="square" lIns="0" tIns="0" rIns="0" bIns="0" rtlCol="0" anchor="t"/>
           <a:lstStyle/>
           <a:p>
-            <a:pPr algn="l" marL="152400" indent="-152400">
+            <a:pPr marL="152400" indent="-152400" algn="l">
               <a:lnSpc>
                 <a:spcPct val="100000"/>
               </a:lnSpc>
@@ -18251,7 +18840,7 @@
             <a:endParaRPr lang="en-US" sz="1130" dirty="0"/>
           </a:p>
           <a:p>
-            <a:pPr algn="l" marL="152400" indent="-152400">
+            <a:pPr marL="152400" indent="-152400" algn="l">
               <a:lnSpc>
                 <a:spcPct val="100000"/>
               </a:lnSpc>
@@ -18275,7 +18864,7 @@
             <a:endParaRPr lang="en-US" sz="1130" dirty="0"/>
           </a:p>
           <a:p>
-            <a:pPr algn="l" marL="152400" indent="-152400">
+            <a:pPr marL="152400" indent="-152400" algn="l">
               <a:lnSpc>
                 <a:spcPct val="100000"/>
               </a:lnSpc>
@@ -18321,7 +18910,7 @@
           <a:bodyPr wrap="square" lIns="0" tIns="0" rIns="0" bIns="0" rtlCol="0" anchor="ctr"/>
           <a:lstStyle/>
           <a:p>
-            <a:pPr indent="0" marL="0">
+            <a:pPr marL="0" indent="0">
               <a:buNone/>
             </a:pPr>
             <a:r>
@@ -18360,11 +18949,11 @@
           <a:bodyPr wrap="square" lIns="0" tIns="0" rIns="0" bIns="0" rtlCol="0" anchor="ctr"/>
           <a:lstStyle/>
           <a:p>
-            <a:pPr algn="l" indent="0" marL="0">
-              <a:buNone/>
-            </a:pPr>
-            <a:r>
-              <a:rPr lang="en-US" sz="850" spc="200" kern="0" dirty="0">
+            <a:pPr marL="0" indent="0" algn="l">
+              <a:buNone/>
+            </a:pPr>
+            <a:r>
+              <a:rPr lang="en-US" sz="850" kern="0" spc="200" dirty="0" err="1">
                 <a:solidFill>
                   <a:srgbClr val="6B7280"/>
                 </a:solidFill>
@@ -18372,7 +18961,7 @@
                 <a:ea typeface="Georgia" pitchFamily="34" charset="-122"/>
                 <a:cs typeface="Georgia" pitchFamily="34" charset="-120"/>
               </a:rPr>
-              <a:t>TRANSAKT</a:t>
+              <a:t>BlockMed</a:t>
             </a:r>
             <a:endParaRPr lang="en-US" sz="850" dirty="0"/>
           </a:p>
@@ -18399,7 +18988,7 @@
           <a:bodyPr wrap="square" lIns="0" tIns="0" rIns="0" bIns="0" rtlCol="0" anchor="ctr"/>
           <a:lstStyle/>
           <a:p>
-            <a:pPr algn="r" indent="0" marL="0">
+            <a:pPr marL="0" indent="0" algn="r">
               <a:buNone/>
             </a:pPr>
             <a:r>
@@ -18433,6 +19022,7 @@
         <a:solidFill>
           <a:srgbClr val="FFFFFF"/>
         </a:solidFill>
+        <a:effectLst/>
       </p:bgPr>
     </p:bg>
     <p:spTree>
@@ -18470,11 +19060,11 @@
           <a:bodyPr wrap="square" lIns="0" tIns="0" rIns="0" bIns="0" rtlCol="0" anchor="ctr"/>
           <a:lstStyle/>
           <a:p>
-            <a:pPr algn="l" indent="0" marL="0">
-              <a:buNone/>
-            </a:pPr>
-            <a:r>
-              <a:rPr lang="en-US" sz="1100" b="1" spc="300" kern="0" dirty="0">
+            <a:pPr marL="0" indent="0" algn="l">
+              <a:buNone/>
+            </a:pPr>
+            <a:r>
+              <a:rPr lang="en-US" sz="1100" b="1" kern="0" spc="300" dirty="0">
                 <a:solidFill>
                   <a:srgbClr val="0E8C7F"/>
                 </a:solidFill>
@@ -18509,7 +19099,7 @@
           <a:bodyPr wrap="square" lIns="0" tIns="0" rIns="0" bIns="0" rtlCol="0" anchor="ctr"/>
           <a:lstStyle/>
           <a:p>
-            <a:pPr algn="l" indent="0" marL="0">
+            <a:pPr marL="0" indent="0" algn="l">
               <a:buNone/>
             </a:pPr>
             <a:r>
@@ -18546,6 +19136,13 @@
           </a:solidFill>
           <a:ln/>
         </p:spPr>
+        <p:txBody>
+          <a:bodyPr/>
+          <a:lstStyle/>
+          <a:p>
+            <a:endParaRPr lang="en-US"/>
+          </a:p>
+        </p:txBody>
       </p:sp>
       <p:sp>
         <p:nvSpPr>
@@ -18568,7 +19165,7 @@
           <a:bodyPr wrap="square" lIns="0" tIns="0" rIns="0" bIns="0" rtlCol="0" anchor="ctr"/>
           <a:lstStyle/>
           <a:p>
-            <a:pPr algn="l" indent="0" marL="0">
+            <a:pPr marL="0" indent="0" algn="l">
               <a:buNone/>
             </a:pPr>
             <a:r>
@@ -18605,6 +19202,13 @@
           </a:solidFill>
           <a:ln/>
         </p:spPr>
+        <p:txBody>
+          <a:bodyPr/>
+          <a:lstStyle/>
+          <a:p>
+            <a:endParaRPr lang="en-US"/>
+          </a:p>
+        </p:txBody>
       </p:sp>
       <p:sp>
         <p:nvSpPr>
@@ -18627,7 +19231,7 @@
           <a:bodyPr wrap="square" lIns="0" tIns="0" rIns="0" bIns="0" rtlCol="0" anchor="ctr"/>
           <a:lstStyle/>
           <a:p>
-            <a:pPr algn="ctr" indent="0" marL="0">
+            <a:pPr marL="0" indent="0" algn="ctr">
               <a:buNone/>
             </a:pPr>
             <a:r>
@@ -18664,6 +19268,13 @@
           </a:solidFill>
           <a:ln/>
         </p:spPr>
+        <p:txBody>
+          <a:bodyPr/>
+          <a:lstStyle/>
+          <a:p>
+            <a:endParaRPr lang="en-US"/>
+          </a:p>
+        </p:txBody>
       </p:sp>
       <p:sp>
         <p:nvSpPr>
@@ -18686,7 +19297,7 @@
           <a:bodyPr wrap="square" lIns="0" tIns="0" rIns="0" bIns="0" rtlCol="0" anchor="ctr"/>
           <a:lstStyle/>
           <a:p>
-            <a:pPr algn="ctr" indent="0" marL="0">
+            <a:pPr marL="0" indent="0" algn="ctr">
               <a:buNone/>
             </a:pPr>
             <a:r>
@@ -18723,6 +19334,13 @@
           </a:solidFill>
           <a:ln/>
         </p:spPr>
+        <p:txBody>
+          <a:bodyPr/>
+          <a:lstStyle/>
+          <a:p>
+            <a:endParaRPr lang="en-US"/>
+          </a:p>
+        </p:txBody>
       </p:sp>
       <p:sp>
         <p:nvSpPr>
@@ -18745,7 +19363,7 @@
           <a:bodyPr wrap="square" lIns="0" tIns="0" rIns="0" bIns="0" rtlCol="0" anchor="ctr"/>
           <a:lstStyle/>
           <a:p>
-            <a:pPr algn="ctr" indent="0" marL="0">
+            <a:pPr marL="0" indent="0" algn="ctr">
               <a:buNone/>
             </a:pPr>
             <a:r>
@@ -18782,6 +19400,13 @@
           </a:solidFill>
           <a:ln/>
         </p:spPr>
+        <p:txBody>
+          <a:bodyPr/>
+          <a:lstStyle/>
+          <a:p>
+            <a:endParaRPr lang="en-US"/>
+          </a:p>
+        </p:txBody>
       </p:sp>
       <p:sp>
         <p:nvSpPr>
@@ -18804,7 +19429,7 @@
           <a:bodyPr wrap="square" lIns="0" tIns="0" rIns="0" bIns="0" rtlCol="0" anchor="ctr"/>
           <a:lstStyle/>
           <a:p>
-            <a:pPr algn="ctr" indent="0" marL="0">
+            <a:pPr marL="0" indent="0" algn="ctr">
               <a:buNone/>
             </a:pPr>
             <a:r>
@@ -18846,6 +19471,13 @@
             <a:prstDash val="solid"/>
           </a:ln>
         </p:spPr>
+        <p:txBody>
+          <a:bodyPr/>
+          <a:lstStyle/>
+          <a:p>
+            <a:endParaRPr lang="en-US"/>
+          </a:p>
+        </p:txBody>
       </p:sp>
       <p:sp>
         <p:nvSpPr>
@@ -18868,7 +19500,7 @@
           <a:bodyPr wrap="square" lIns="0" tIns="0" rIns="0" bIns="0" rtlCol="0" anchor="ctr"/>
           <a:lstStyle/>
           <a:p>
-            <a:pPr algn="l" indent="0" marL="0">
+            <a:pPr marL="0" indent="0" algn="l">
               <a:buNone/>
             </a:pPr>
             <a:r>
@@ -18910,6 +19542,13 @@
             <a:prstDash val="solid"/>
           </a:ln>
         </p:spPr>
+        <p:txBody>
+          <a:bodyPr/>
+          <a:lstStyle/>
+          <a:p>
+            <a:endParaRPr lang="en-US"/>
+          </a:p>
+        </p:txBody>
       </p:sp>
       <p:sp>
         <p:nvSpPr>
@@ -18932,7 +19571,7 @@
           <a:bodyPr wrap="square" lIns="0" tIns="0" rIns="0" bIns="0" rtlCol="0" anchor="ctr"/>
           <a:lstStyle/>
           <a:p>
-            <a:pPr algn="ctr" indent="0" marL="0">
+            <a:pPr marL="0" indent="0" algn="ctr">
               <a:buNone/>
             </a:pPr>
             <a:r>
@@ -18974,6 +19613,13 @@
             <a:prstDash val="solid"/>
           </a:ln>
         </p:spPr>
+        <p:txBody>
+          <a:bodyPr/>
+          <a:lstStyle/>
+          <a:p>
+            <a:endParaRPr lang="en-US"/>
+          </a:p>
+        </p:txBody>
       </p:sp>
       <p:sp>
         <p:nvSpPr>
@@ -18996,7 +19642,7 @@
           <a:bodyPr wrap="square" lIns="0" tIns="0" rIns="0" bIns="0" rtlCol="0" anchor="ctr"/>
           <a:lstStyle/>
           <a:p>
-            <a:pPr algn="ctr" indent="0" marL="0">
+            <a:pPr marL="0" indent="0" algn="ctr">
               <a:buNone/>
             </a:pPr>
             <a:r>
@@ -19038,6 +19684,13 @@
             <a:prstDash val="solid"/>
           </a:ln>
         </p:spPr>
+        <p:txBody>
+          <a:bodyPr/>
+          <a:lstStyle/>
+          <a:p>
+            <a:endParaRPr lang="en-US"/>
+          </a:p>
+        </p:txBody>
       </p:sp>
       <p:sp>
         <p:nvSpPr>
@@ -19060,7 +19713,7 @@
           <a:bodyPr wrap="square" lIns="0" tIns="0" rIns="0" bIns="0" rtlCol="0" anchor="ctr"/>
           <a:lstStyle/>
           <a:p>
-            <a:pPr algn="ctr" indent="0" marL="0">
+            <a:pPr marL="0" indent="0" algn="ctr">
               <a:buNone/>
             </a:pPr>
             <a:r>
@@ -19102,6 +19755,13 @@
             <a:prstDash val="solid"/>
           </a:ln>
         </p:spPr>
+        <p:txBody>
+          <a:bodyPr/>
+          <a:lstStyle/>
+          <a:p>
+            <a:endParaRPr lang="en-US"/>
+          </a:p>
+        </p:txBody>
       </p:sp>
       <p:sp>
         <p:nvSpPr>
@@ -19124,7 +19784,7 @@
           <a:bodyPr wrap="square" lIns="0" tIns="0" rIns="0" bIns="0" rtlCol="0" anchor="ctr"/>
           <a:lstStyle/>
           <a:p>
-            <a:pPr algn="ctr" indent="0" marL="0">
+            <a:pPr marL="0" indent="0" algn="ctr">
               <a:buNone/>
             </a:pPr>
             <a:r>
@@ -19166,6 +19826,13 @@
             <a:prstDash val="solid"/>
           </a:ln>
         </p:spPr>
+        <p:txBody>
+          <a:bodyPr/>
+          <a:lstStyle/>
+          <a:p>
+            <a:endParaRPr lang="en-US"/>
+          </a:p>
+        </p:txBody>
       </p:sp>
       <p:sp>
         <p:nvSpPr>
@@ -19188,7 +19855,7 @@
           <a:bodyPr wrap="square" lIns="0" tIns="0" rIns="0" bIns="0" rtlCol="0" anchor="ctr"/>
           <a:lstStyle/>
           <a:p>
-            <a:pPr algn="l" indent="0" marL="0">
+            <a:pPr marL="0" indent="0" algn="l">
               <a:buNone/>
             </a:pPr>
             <a:r>
@@ -19230,6 +19897,13 @@
             <a:prstDash val="solid"/>
           </a:ln>
         </p:spPr>
+        <p:txBody>
+          <a:bodyPr/>
+          <a:lstStyle/>
+          <a:p>
+            <a:endParaRPr lang="en-US"/>
+          </a:p>
+        </p:txBody>
       </p:sp>
       <p:sp>
         <p:nvSpPr>
@@ -19252,7 +19926,7 @@
           <a:bodyPr wrap="square" lIns="0" tIns="0" rIns="0" bIns="0" rtlCol="0" anchor="ctr"/>
           <a:lstStyle/>
           <a:p>
-            <a:pPr algn="ctr" indent="0" marL="0">
+            <a:pPr marL="0" indent="0" algn="ctr">
               <a:buNone/>
             </a:pPr>
             <a:r>
@@ -19294,6 +19968,13 @@
             <a:prstDash val="solid"/>
           </a:ln>
         </p:spPr>
+        <p:txBody>
+          <a:bodyPr/>
+          <a:lstStyle/>
+          <a:p>
+            <a:endParaRPr lang="en-US"/>
+          </a:p>
+        </p:txBody>
       </p:sp>
       <p:sp>
         <p:nvSpPr>
@@ -19316,7 +19997,7 @@
           <a:bodyPr wrap="square" lIns="0" tIns="0" rIns="0" bIns="0" rtlCol="0" anchor="ctr"/>
           <a:lstStyle/>
           <a:p>
-            <a:pPr algn="ctr" indent="0" marL="0">
+            <a:pPr marL="0" indent="0" algn="ctr">
               <a:buNone/>
             </a:pPr>
             <a:r>
@@ -19358,6 +20039,13 @@
             <a:prstDash val="solid"/>
           </a:ln>
         </p:spPr>
+        <p:txBody>
+          <a:bodyPr/>
+          <a:lstStyle/>
+          <a:p>
+            <a:endParaRPr lang="en-US"/>
+          </a:p>
+        </p:txBody>
       </p:sp>
       <p:sp>
         <p:nvSpPr>
@@ -19380,7 +20068,7 @@
           <a:bodyPr wrap="square" lIns="0" tIns="0" rIns="0" bIns="0" rtlCol="0" anchor="ctr"/>
           <a:lstStyle/>
           <a:p>
-            <a:pPr algn="ctr" indent="0" marL="0">
+            <a:pPr marL="0" indent="0" algn="ctr">
               <a:buNone/>
             </a:pPr>
             <a:r>
@@ -19422,6 +20110,13 @@
             <a:prstDash val="solid"/>
           </a:ln>
         </p:spPr>
+        <p:txBody>
+          <a:bodyPr/>
+          <a:lstStyle/>
+          <a:p>
+            <a:endParaRPr lang="en-US"/>
+          </a:p>
+        </p:txBody>
       </p:sp>
       <p:sp>
         <p:nvSpPr>
@@ -19444,7 +20139,7 @@
           <a:bodyPr wrap="square" lIns="0" tIns="0" rIns="0" bIns="0" rtlCol="0" anchor="ctr"/>
           <a:lstStyle/>
           <a:p>
-            <a:pPr algn="ctr" indent="0" marL="0">
+            <a:pPr marL="0" indent="0" algn="ctr">
               <a:buNone/>
             </a:pPr>
             <a:r>
@@ -19486,6 +20181,13 @@
             <a:prstDash val="solid"/>
           </a:ln>
         </p:spPr>
+        <p:txBody>
+          <a:bodyPr/>
+          <a:lstStyle/>
+          <a:p>
+            <a:endParaRPr lang="en-US"/>
+          </a:p>
+        </p:txBody>
       </p:sp>
       <p:sp>
         <p:nvSpPr>
@@ -19508,7 +20210,7 @@
           <a:bodyPr wrap="square" lIns="0" tIns="0" rIns="0" bIns="0" rtlCol="0" anchor="ctr"/>
           <a:lstStyle/>
           <a:p>
-            <a:pPr algn="l" indent="0" marL="0">
+            <a:pPr marL="0" indent="0" algn="l">
               <a:buNone/>
             </a:pPr>
             <a:r>
@@ -19550,6 +20252,13 @@
             <a:prstDash val="solid"/>
           </a:ln>
         </p:spPr>
+        <p:txBody>
+          <a:bodyPr/>
+          <a:lstStyle/>
+          <a:p>
+            <a:endParaRPr lang="en-US"/>
+          </a:p>
+        </p:txBody>
       </p:sp>
       <p:sp>
         <p:nvSpPr>
@@ -19572,7 +20281,7 @@
           <a:bodyPr wrap="square" lIns="0" tIns="0" rIns="0" bIns="0" rtlCol="0" anchor="ctr"/>
           <a:lstStyle/>
           <a:p>
-            <a:pPr algn="ctr" indent="0" marL="0">
+            <a:pPr marL="0" indent="0" algn="ctr">
               <a:buNone/>
             </a:pPr>
             <a:r>
@@ -19614,6 +20323,13 @@
             <a:prstDash val="solid"/>
           </a:ln>
         </p:spPr>
+        <p:txBody>
+          <a:bodyPr/>
+          <a:lstStyle/>
+          <a:p>
+            <a:endParaRPr lang="en-US"/>
+          </a:p>
+        </p:txBody>
       </p:sp>
       <p:sp>
         <p:nvSpPr>
@@ -19636,7 +20352,7 @@
           <a:bodyPr wrap="square" lIns="0" tIns="0" rIns="0" bIns="0" rtlCol="0" anchor="ctr"/>
           <a:lstStyle/>
           <a:p>
-            <a:pPr algn="ctr" indent="0" marL="0">
+            <a:pPr marL="0" indent="0" algn="ctr">
               <a:buNone/>
             </a:pPr>
             <a:r>
@@ -19678,6 +20394,13 @@
             <a:prstDash val="solid"/>
           </a:ln>
         </p:spPr>
+        <p:txBody>
+          <a:bodyPr/>
+          <a:lstStyle/>
+          <a:p>
+            <a:endParaRPr lang="en-US"/>
+          </a:p>
+        </p:txBody>
       </p:sp>
       <p:sp>
         <p:nvSpPr>
@@ -19700,7 +20423,7 @@
           <a:bodyPr wrap="square" lIns="0" tIns="0" rIns="0" bIns="0" rtlCol="0" anchor="ctr"/>
           <a:lstStyle/>
           <a:p>
-            <a:pPr algn="ctr" indent="0" marL="0">
+            <a:pPr marL="0" indent="0" algn="ctr">
               <a:buNone/>
             </a:pPr>
             <a:r>
@@ -19742,6 +20465,13 @@
             <a:prstDash val="solid"/>
           </a:ln>
         </p:spPr>
+        <p:txBody>
+          <a:bodyPr/>
+          <a:lstStyle/>
+          <a:p>
+            <a:endParaRPr lang="en-US"/>
+          </a:p>
+        </p:txBody>
       </p:sp>
       <p:sp>
         <p:nvSpPr>
@@ -19764,7 +20494,7 @@
           <a:bodyPr wrap="square" lIns="0" tIns="0" rIns="0" bIns="0" rtlCol="0" anchor="ctr"/>
           <a:lstStyle/>
           <a:p>
-            <a:pPr algn="ctr" indent="0" marL="0">
+            <a:pPr marL="0" indent="0" algn="ctr">
               <a:buNone/>
             </a:pPr>
             <a:r>
@@ -19806,6 +20536,13 @@
             <a:prstDash val="solid"/>
           </a:ln>
         </p:spPr>
+        <p:txBody>
+          <a:bodyPr/>
+          <a:lstStyle/>
+          <a:p>
+            <a:endParaRPr lang="en-US"/>
+          </a:p>
+        </p:txBody>
       </p:sp>
       <p:sp>
         <p:nvSpPr>
@@ -19828,7 +20565,7 @@
           <a:bodyPr wrap="square" lIns="0" tIns="0" rIns="0" bIns="0" rtlCol="0" anchor="ctr"/>
           <a:lstStyle/>
           <a:p>
-            <a:pPr algn="l" indent="0" marL="0">
+            <a:pPr marL="0" indent="0" algn="l">
               <a:buNone/>
             </a:pPr>
             <a:r>
@@ -19870,6 +20607,13 @@
             <a:prstDash val="solid"/>
           </a:ln>
         </p:spPr>
+        <p:txBody>
+          <a:bodyPr/>
+          <a:lstStyle/>
+          <a:p>
+            <a:endParaRPr lang="en-US"/>
+          </a:p>
+        </p:txBody>
       </p:sp>
       <p:sp>
         <p:nvSpPr>
@@ -19892,7 +20636,7 @@
           <a:bodyPr wrap="square" lIns="0" tIns="0" rIns="0" bIns="0" rtlCol="0" anchor="ctr"/>
           <a:lstStyle/>
           <a:p>
-            <a:pPr algn="ctr" indent="0" marL="0">
+            <a:pPr marL="0" indent="0" algn="ctr">
               <a:buNone/>
             </a:pPr>
             <a:r>
@@ -19934,6 +20678,13 @@
             <a:prstDash val="solid"/>
           </a:ln>
         </p:spPr>
+        <p:txBody>
+          <a:bodyPr/>
+          <a:lstStyle/>
+          <a:p>
+            <a:endParaRPr lang="en-US"/>
+          </a:p>
+        </p:txBody>
       </p:sp>
       <p:sp>
         <p:nvSpPr>
@@ -19956,7 +20707,7 @@
           <a:bodyPr wrap="square" lIns="0" tIns="0" rIns="0" bIns="0" rtlCol="0" anchor="ctr"/>
           <a:lstStyle/>
           <a:p>
-            <a:pPr algn="ctr" indent="0" marL="0">
+            <a:pPr marL="0" indent="0" algn="ctr">
               <a:buNone/>
             </a:pPr>
             <a:r>
@@ -19998,6 +20749,13 @@
             <a:prstDash val="solid"/>
           </a:ln>
         </p:spPr>
+        <p:txBody>
+          <a:bodyPr/>
+          <a:lstStyle/>
+          <a:p>
+            <a:endParaRPr lang="en-US"/>
+          </a:p>
+        </p:txBody>
       </p:sp>
       <p:sp>
         <p:nvSpPr>
@@ -20020,7 +20778,7 @@
           <a:bodyPr wrap="square" lIns="0" tIns="0" rIns="0" bIns="0" rtlCol="0" anchor="ctr"/>
           <a:lstStyle/>
           <a:p>
-            <a:pPr algn="ctr" indent="0" marL="0">
+            <a:pPr marL="0" indent="0" algn="ctr">
               <a:buNone/>
             </a:pPr>
             <a:r>
@@ -20062,6 +20820,13 @@
             <a:prstDash val="solid"/>
           </a:ln>
         </p:spPr>
+        <p:txBody>
+          <a:bodyPr/>
+          <a:lstStyle/>
+          <a:p>
+            <a:endParaRPr lang="en-US"/>
+          </a:p>
+        </p:txBody>
       </p:sp>
       <p:sp>
         <p:nvSpPr>
@@ -20084,7 +20849,7 @@
           <a:bodyPr wrap="square" lIns="0" tIns="0" rIns="0" bIns="0" rtlCol="0" anchor="ctr"/>
           <a:lstStyle/>
           <a:p>
-            <a:pPr algn="ctr" indent="0" marL="0">
+            <a:pPr marL="0" indent="0" algn="ctr">
               <a:buNone/>
             </a:pPr>
             <a:r>
@@ -20126,6 +20891,13 @@
             <a:prstDash val="solid"/>
           </a:ln>
         </p:spPr>
+        <p:txBody>
+          <a:bodyPr/>
+          <a:lstStyle/>
+          <a:p>
+            <a:endParaRPr lang="en-US"/>
+          </a:p>
+        </p:txBody>
       </p:sp>
       <p:sp>
         <p:nvSpPr>
@@ -20148,7 +20920,7 @@
           <a:bodyPr wrap="square" lIns="0" tIns="0" rIns="0" bIns="0" rtlCol="0" anchor="ctr"/>
           <a:lstStyle/>
           <a:p>
-            <a:pPr algn="l" indent="0" marL="0">
+            <a:pPr marL="0" indent="0" algn="l">
               <a:buNone/>
             </a:pPr>
             <a:r>
@@ -20190,6 +20962,13 @@
             <a:prstDash val="solid"/>
           </a:ln>
         </p:spPr>
+        <p:txBody>
+          <a:bodyPr/>
+          <a:lstStyle/>
+          <a:p>
+            <a:endParaRPr lang="en-US"/>
+          </a:p>
+        </p:txBody>
       </p:sp>
       <p:sp>
         <p:nvSpPr>
@@ -20212,7 +20991,7 @@
           <a:bodyPr wrap="square" lIns="0" tIns="0" rIns="0" bIns="0" rtlCol="0" anchor="ctr"/>
           <a:lstStyle/>
           <a:p>
-            <a:pPr algn="ctr" indent="0" marL="0">
+            <a:pPr marL="0" indent="0" algn="ctr">
               <a:buNone/>
             </a:pPr>
             <a:r>
@@ -20254,6 +21033,13 @@
             <a:prstDash val="solid"/>
           </a:ln>
         </p:spPr>
+        <p:txBody>
+          <a:bodyPr/>
+          <a:lstStyle/>
+          <a:p>
+            <a:endParaRPr lang="en-US"/>
+          </a:p>
+        </p:txBody>
       </p:sp>
       <p:sp>
         <p:nvSpPr>
@@ -20276,7 +21062,7 @@
           <a:bodyPr wrap="square" lIns="0" tIns="0" rIns="0" bIns="0" rtlCol="0" anchor="ctr"/>
           <a:lstStyle/>
           <a:p>
-            <a:pPr algn="ctr" indent="0" marL="0">
+            <a:pPr marL="0" indent="0" algn="ctr">
               <a:buNone/>
             </a:pPr>
             <a:r>
@@ -20318,6 +21104,13 @@
             <a:prstDash val="solid"/>
           </a:ln>
         </p:spPr>
+        <p:txBody>
+          <a:bodyPr/>
+          <a:lstStyle/>
+          <a:p>
+            <a:endParaRPr lang="en-US"/>
+          </a:p>
+        </p:txBody>
       </p:sp>
       <p:sp>
         <p:nvSpPr>
@@ -20340,7 +21133,7 @@
           <a:bodyPr wrap="square" lIns="0" tIns="0" rIns="0" bIns="0" rtlCol="0" anchor="ctr"/>
           <a:lstStyle/>
           <a:p>
-            <a:pPr algn="ctr" indent="0" marL="0">
+            <a:pPr marL="0" indent="0" algn="ctr">
               <a:buNone/>
             </a:pPr>
             <a:r>
@@ -20382,6 +21175,13 @@
             <a:prstDash val="solid"/>
           </a:ln>
         </p:spPr>
+        <p:txBody>
+          <a:bodyPr/>
+          <a:lstStyle/>
+          <a:p>
+            <a:endParaRPr lang="en-US"/>
+          </a:p>
+        </p:txBody>
       </p:sp>
       <p:sp>
         <p:nvSpPr>
@@ -20404,7 +21204,7 @@
           <a:bodyPr wrap="square" lIns="0" tIns="0" rIns="0" bIns="0" rtlCol="0" anchor="ctr"/>
           <a:lstStyle/>
           <a:p>
-            <a:pPr algn="ctr" indent="0" marL="0">
+            <a:pPr marL="0" indent="0" algn="ctr">
               <a:buNone/>
             </a:pPr>
             <a:r>
@@ -20446,6 +21246,13 @@
             <a:prstDash val="solid"/>
           </a:ln>
         </p:spPr>
+        <p:txBody>
+          <a:bodyPr/>
+          <a:lstStyle/>
+          <a:p>
+            <a:endParaRPr lang="en-US"/>
+          </a:p>
+        </p:txBody>
       </p:sp>
       <p:sp>
         <p:nvSpPr>
@@ -20468,7 +21275,7 @@
           <a:bodyPr wrap="square" lIns="0" tIns="0" rIns="0" bIns="0" rtlCol="0" anchor="ctr"/>
           <a:lstStyle/>
           <a:p>
-            <a:pPr algn="l" indent="0" marL="0">
+            <a:pPr marL="0" indent="0" algn="l">
               <a:buNone/>
             </a:pPr>
             <a:r>
@@ -20510,6 +21317,13 @@
             <a:prstDash val="solid"/>
           </a:ln>
         </p:spPr>
+        <p:txBody>
+          <a:bodyPr/>
+          <a:lstStyle/>
+          <a:p>
+            <a:endParaRPr lang="en-US"/>
+          </a:p>
+        </p:txBody>
       </p:sp>
       <p:sp>
         <p:nvSpPr>
@@ -20532,7 +21346,7 @@
           <a:bodyPr wrap="square" lIns="0" tIns="0" rIns="0" bIns="0" rtlCol="0" anchor="ctr"/>
           <a:lstStyle/>
           <a:p>
-            <a:pPr algn="ctr" indent="0" marL="0">
+            <a:pPr marL="0" indent="0" algn="ctr">
               <a:buNone/>
             </a:pPr>
             <a:r>
@@ -20574,6 +21388,13 @@
             <a:prstDash val="solid"/>
           </a:ln>
         </p:spPr>
+        <p:txBody>
+          <a:bodyPr/>
+          <a:lstStyle/>
+          <a:p>
+            <a:endParaRPr lang="en-US"/>
+          </a:p>
+        </p:txBody>
       </p:sp>
       <p:sp>
         <p:nvSpPr>
@@ -20596,7 +21417,7 @@
           <a:bodyPr wrap="square" lIns="0" tIns="0" rIns="0" bIns="0" rtlCol="0" anchor="ctr"/>
           <a:lstStyle/>
           <a:p>
-            <a:pPr algn="ctr" indent="0" marL="0">
+            <a:pPr marL="0" indent="0" algn="ctr">
               <a:buNone/>
             </a:pPr>
             <a:r>
@@ -20638,6 +21459,13 @@
             <a:prstDash val="solid"/>
           </a:ln>
         </p:spPr>
+        <p:txBody>
+          <a:bodyPr/>
+          <a:lstStyle/>
+          <a:p>
+            <a:endParaRPr lang="en-US"/>
+          </a:p>
+        </p:txBody>
       </p:sp>
       <p:sp>
         <p:nvSpPr>
@@ -20660,7 +21488,7 @@
           <a:bodyPr wrap="square" lIns="0" tIns="0" rIns="0" bIns="0" rtlCol="0" anchor="ctr"/>
           <a:lstStyle/>
           <a:p>
-            <a:pPr algn="ctr" indent="0" marL="0">
+            <a:pPr marL="0" indent="0" algn="ctr">
               <a:buNone/>
             </a:pPr>
             <a:r>
@@ -20702,6 +21530,13 @@
             <a:prstDash val="solid"/>
           </a:ln>
         </p:spPr>
+        <p:txBody>
+          <a:bodyPr/>
+          <a:lstStyle/>
+          <a:p>
+            <a:endParaRPr lang="en-US"/>
+          </a:p>
+        </p:txBody>
       </p:sp>
       <p:sp>
         <p:nvSpPr>
@@ -20724,7 +21559,7 @@
           <a:bodyPr wrap="square" lIns="0" tIns="0" rIns="0" bIns="0" rtlCol="0" anchor="ctr"/>
           <a:lstStyle/>
           <a:p>
-            <a:pPr algn="ctr" indent="0" marL="0">
+            <a:pPr marL="0" indent="0" algn="ctr">
               <a:buNone/>
             </a:pPr>
             <a:r>
@@ -20766,6 +21601,13 @@
             <a:prstDash val="solid"/>
           </a:ln>
         </p:spPr>
+        <p:txBody>
+          <a:bodyPr/>
+          <a:lstStyle/>
+          <a:p>
+            <a:endParaRPr lang="en-US"/>
+          </a:p>
+        </p:txBody>
       </p:sp>
       <p:sp>
         <p:nvSpPr>
@@ -20788,7 +21630,7 @@
           <a:bodyPr wrap="square" lIns="0" tIns="0" rIns="0" bIns="0" rtlCol="0" anchor="ctr"/>
           <a:lstStyle/>
           <a:p>
-            <a:pPr algn="l" indent="0" marL="0">
+            <a:pPr marL="0" indent="0" algn="l">
               <a:buNone/>
             </a:pPr>
             <a:r>
@@ -20830,6 +21672,13 @@
             <a:prstDash val="solid"/>
           </a:ln>
         </p:spPr>
+        <p:txBody>
+          <a:bodyPr/>
+          <a:lstStyle/>
+          <a:p>
+            <a:endParaRPr lang="en-US"/>
+          </a:p>
+        </p:txBody>
       </p:sp>
       <p:sp>
         <p:nvSpPr>
@@ -20852,7 +21701,7 @@
           <a:bodyPr wrap="square" lIns="0" tIns="0" rIns="0" bIns="0" rtlCol="0" anchor="ctr"/>
           <a:lstStyle/>
           <a:p>
-            <a:pPr algn="ctr" indent="0" marL="0">
+            <a:pPr marL="0" indent="0" algn="ctr">
               <a:buNone/>
             </a:pPr>
             <a:r>
@@ -20894,6 +21743,13 @@
             <a:prstDash val="solid"/>
           </a:ln>
         </p:spPr>
+        <p:txBody>
+          <a:bodyPr/>
+          <a:lstStyle/>
+          <a:p>
+            <a:endParaRPr lang="en-US"/>
+          </a:p>
+        </p:txBody>
       </p:sp>
       <p:sp>
         <p:nvSpPr>
@@ -20916,7 +21772,7 @@
           <a:bodyPr wrap="square" lIns="0" tIns="0" rIns="0" bIns="0" rtlCol="0" anchor="ctr"/>
           <a:lstStyle/>
           <a:p>
-            <a:pPr algn="ctr" indent="0" marL="0">
+            <a:pPr marL="0" indent="0" algn="ctr">
               <a:buNone/>
             </a:pPr>
             <a:r>
@@ -20958,6 +21814,13 @@
             <a:prstDash val="solid"/>
           </a:ln>
         </p:spPr>
+        <p:txBody>
+          <a:bodyPr/>
+          <a:lstStyle/>
+          <a:p>
+            <a:endParaRPr lang="en-US"/>
+          </a:p>
+        </p:txBody>
       </p:sp>
       <p:sp>
         <p:nvSpPr>
@@ -20980,7 +21843,7 @@
           <a:bodyPr wrap="square" lIns="0" tIns="0" rIns="0" bIns="0" rtlCol="0" anchor="ctr"/>
           <a:lstStyle/>
           <a:p>
-            <a:pPr algn="ctr" indent="0" marL="0">
+            <a:pPr marL="0" indent="0" algn="ctr">
               <a:buNone/>
             </a:pPr>
             <a:r>
@@ -21022,6 +21885,13 @@
             <a:prstDash val="solid"/>
           </a:ln>
         </p:spPr>
+        <p:txBody>
+          <a:bodyPr/>
+          <a:lstStyle/>
+          <a:p>
+            <a:endParaRPr lang="en-US"/>
+          </a:p>
+        </p:txBody>
       </p:sp>
       <p:sp>
         <p:nvSpPr>
@@ -21044,7 +21914,7 @@
           <a:bodyPr wrap="square" lIns="0" tIns="0" rIns="0" bIns="0" rtlCol="0" anchor="ctr"/>
           <a:lstStyle/>
           <a:p>
-            <a:pPr algn="ctr" indent="0" marL="0">
+            <a:pPr marL="0" indent="0" algn="ctr">
               <a:buNone/>
             </a:pPr>
             <a:r>
@@ -21083,11 +21953,11 @@
           <a:bodyPr wrap="square" lIns="0" tIns="0" rIns="0" bIns="0" rtlCol="0" anchor="ctr"/>
           <a:lstStyle/>
           <a:p>
-            <a:pPr indent="0" marL="0">
-              <a:buNone/>
-            </a:pPr>
-            <a:r>
-              <a:rPr lang="en-US" sz="1100" b="1" spc="150" kern="0" dirty="0">
+            <a:pPr marL="0" indent="0">
+              <a:buNone/>
+            </a:pPr>
+            <a:r>
+              <a:rPr lang="en-US" sz="1100" b="1" kern="0" spc="150" dirty="0">
                 <a:solidFill>
                   <a:srgbClr val="1F6FB2"/>
                 </a:solidFill>
@@ -21125,6 +21995,13 @@
             <a:prstDash val="solid"/>
           </a:ln>
         </p:spPr>
+        <p:txBody>
+          <a:bodyPr/>
+          <a:lstStyle/>
+          <a:p>
+            <a:endParaRPr lang="en-US"/>
+          </a:p>
+        </p:txBody>
       </p:sp>
       <p:sp>
         <p:nvSpPr>
@@ -21147,7 +22024,7 @@
           <a:bodyPr wrap="square" lIns="0" tIns="0" rIns="0" bIns="0" rtlCol="0" anchor="ctr"/>
           <a:lstStyle/>
           <a:p>
-            <a:pPr indent="0" marL="0">
+            <a:pPr marL="0" indent="0">
               <a:buNone/>
             </a:pPr>
             <a:r>
@@ -21186,7 +22063,7 @@
           <a:bodyPr wrap="square" lIns="0" tIns="0" rIns="0" bIns="0" rtlCol="0" anchor="ctr"/>
           <a:lstStyle/>
           <a:p>
-            <a:pPr indent="0" marL="0">
+            <a:pPr marL="0" indent="0">
               <a:buNone/>
             </a:pPr>
             <a:r>
@@ -21225,7 +22102,7 @@
           <a:bodyPr wrap="square" lIns="0" tIns="0" rIns="0" bIns="0" rtlCol="0" anchor="ctr"/>
           <a:lstStyle/>
           <a:p>
-            <a:pPr indent="0" marL="0">
+            <a:pPr marL="0" indent="0">
               <a:buNone/>
             </a:pPr>
             <a:r>
@@ -21264,7 +22141,7 @@
           <a:bodyPr wrap="square" lIns="0" tIns="0" rIns="0" bIns="0" rtlCol="0" anchor="ctr"/>
           <a:lstStyle/>
           <a:p>
-            <a:pPr algn="ctr" indent="0" marL="0">
+            <a:pPr marL="0" indent="0" algn="ctr">
               <a:buNone/>
             </a:pPr>
             <a:r>
@@ -21306,6 +22183,13 @@
             <a:prstDash val="solid"/>
           </a:ln>
         </p:spPr>
+        <p:txBody>
+          <a:bodyPr/>
+          <a:lstStyle/>
+          <a:p>
+            <a:endParaRPr lang="en-US"/>
+          </a:p>
+        </p:txBody>
       </p:sp>
       <p:sp>
         <p:nvSpPr>
@@ -21328,7 +22212,7 @@
           <a:bodyPr wrap="square" lIns="0" tIns="0" rIns="0" bIns="0" rtlCol="0" anchor="ctr"/>
           <a:lstStyle/>
           <a:p>
-            <a:pPr indent="0" marL="0">
+            <a:pPr marL="0" indent="0">
               <a:buNone/>
             </a:pPr>
             <a:r>
@@ -21367,7 +22251,7 @@
           <a:bodyPr wrap="square" lIns="0" tIns="0" rIns="0" bIns="0" rtlCol="0" anchor="ctr"/>
           <a:lstStyle/>
           <a:p>
-            <a:pPr indent="0" marL="0">
+            <a:pPr marL="0" indent="0">
               <a:buNone/>
             </a:pPr>
             <a:r>
@@ -21406,7 +22290,7 @@
           <a:bodyPr wrap="square" lIns="0" tIns="0" rIns="0" bIns="0" rtlCol="0" anchor="ctr"/>
           <a:lstStyle/>
           <a:p>
-            <a:pPr indent="0" marL="0">
+            <a:pPr marL="0" indent="0">
               <a:buNone/>
             </a:pPr>
             <a:r>
@@ -21445,7 +22329,7 @@
           <a:bodyPr wrap="square" lIns="0" tIns="0" rIns="0" bIns="0" rtlCol="0" anchor="ctr"/>
           <a:lstStyle/>
           <a:p>
-            <a:pPr algn="ctr" indent="0" marL="0">
+            <a:pPr marL="0" indent="0" algn="ctr">
               <a:buNone/>
             </a:pPr>
             <a:r>
@@ -21487,6 +22371,13 @@
             <a:prstDash val="solid"/>
           </a:ln>
         </p:spPr>
+        <p:txBody>
+          <a:bodyPr/>
+          <a:lstStyle/>
+          <a:p>
+            <a:endParaRPr lang="en-US"/>
+          </a:p>
+        </p:txBody>
       </p:sp>
       <p:sp>
         <p:nvSpPr>
@@ -21509,7 +22400,7 @@
           <a:bodyPr wrap="square" lIns="0" tIns="0" rIns="0" bIns="0" rtlCol="0" anchor="ctr"/>
           <a:lstStyle/>
           <a:p>
-            <a:pPr indent="0" marL="0">
+            <a:pPr marL="0" indent="0">
               <a:buNone/>
             </a:pPr>
             <a:r>
@@ -21548,7 +22439,7 @@
           <a:bodyPr wrap="square" lIns="0" tIns="0" rIns="0" bIns="0" rtlCol="0" anchor="ctr"/>
           <a:lstStyle/>
           <a:p>
-            <a:pPr indent="0" marL="0">
+            <a:pPr marL="0" indent="0">
               <a:buNone/>
             </a:pPr>
             <a:r>
@@ -21587,7 +22478,7 @@
           <a:bodyPr wrap="square" lIns="0" tIns="0" rIns="0" bIns="0" rtlCol="0" anchor="ctr"/>
           <a:lstStyle/>
           <a:p>
-            <a:pPr indent="0" marL="0">
+            <a:pPr marL="0" indent="0">
               <a:buNone/>
             </a:pPr>
             <a:r>
@@ -21626,7 +22517,7 @@
           <a:bodyPr wrap="square" lIns="0" tIns="0" rIns="0" bIns="0" rtlCol="0" anchor="ctr"/>
           <a:lstStyle/>
           <a:p>
-            <a:pPr algn="ctr" indent="0" marL="0">
+            <a:pPr marL="0" indent="0" algn="ctr">
               <a:buNone/>
             </a:pPr>
             <a:r>
@@ -21668,6 +22559,13 @@
             <a:prstDash val="solid"/>
           </a:ln>
         </p:spPr>
+        <p:txBody>
+          <a:bodyPr/>
+          <a:lstStyle/>
+          <a:p>
+            <a:endParaRPr lang="en-US"/>
+          </a:p>
+        </p:txBody>
       </p:sp>
       <p:sp>
         <p:nvSpPr>
@@ -21690,7 +22588,7 @@
           <a:bodyPr wrap="square" lIns="0" tIns="0" rIns="0" bIns="0" rtlCol="0" anchor="ctr"/>
           <a:lstStyle/>
           <a:p>
-            <a:pPr indent="0" marL="0">
+            <a:pPr marL="0" indent="0">
               <a:buNone/>
             </a:pPr>
             <a:r>
@@ -21729,7 +22627,7 @@
           <a:bodyPr wrap="square" lIns="0" tIns="0" rIns="0" bIns="0" rtlCol="0" anchor="ctr"/>
           <a:lstStyle/>
           <a:p>
-            <a:pPr indent="0" marL="0">
+            <a:pPr marL="0" indent="0">
               <a:buNone/>
             </a:pPr>
             <a:r>
@@ -21768,7 +22666,7 @@
           <a:bodyPr wrap="square" lIns="0" tIns="0" rIns="0" bIns="0" rtlCol="0" anchor="ctr"/>
           <a:lstStyle/>
           <a:p>
-            <a:pPr indent="0" marL="0">
+            <a:pPr marL="0" indent="0">
               <a:buNone/>
             </a:pPr>
             <a:r>
@@ -21807,7 +22705,7 @@
           <a:bodyPr wrap="square" lIns="0" tIns="0" rIns="0" bIns="0" rtlCol="0" anchor="ctr"/>
           <a:lstStyle/>
           <a:p>
-            <a:pPr algn="ctr" indent="0" marL="0">
+            <a:pPr marL="0" indent="0" algn="ctr">
               <a:buNone/>
             </a:pPr>
             <a:r>
@@ -21849,6 +22747,13 @@
             <a:prstDash val="solid"/>
           </a:ln>
         </p:spPr>
+        <p:txBody>
+          <a:bodyPr/>
+          <a:lstStyle/>
+          <a:p>
+            <a:endParaRPr lang="en-US"/>
+          </a:p>
+        </p:txBody>
       </p:sp>
       <p:sp>
         <p:nvSpPr>
@@ -21871,7 +22776,7 @@
           <a:bodyPr wrap="square" lIns="0" tIns="0" rIns="0" bIns="0" rtlCol="0" anchor="ctr"/>
           <a:lstStyle/>
           <a:p>
-            <a:pPr indent="0" marL="0">
+            <a:pPr marL="0" indent="0">
               <a:buNone/>
             </a:pPr>
             <a:r>
@@ -21910,7 +22815,7 @@
           <a:bodyPr wrap="square" lIns="0" tIns="0" rIns="0" bIns="0" rtlCol="0" anchor="ctr"/>
           <a:lstStyle/>
           <a:p>
-            <a:pPr indent="0" marL="0">
+            <a:pPr marL="0" indent="0">
               <a:buNone/>
             </a:pPr>
             <a:r>
@@ -21949,7 +22854,7 @@
           <a:bodyPr wrap="square" lIns="0" tIns="0" rIns="0" bIns="0" rtlCol="0" anchor="ctr"/>
           <a:lstStyle/>
           <a:p>
-            <a:pPr indent="0" marL="0">
+            <a:pPr marL="0" indent="0">
               <a:buNone/>
             </a:pPr>
             <a:r>
@@ -21988,7 +22893,7 @@
           <a:bodyPr wrap="square" lIns="0" tIns="0" rIns="0" bIns="0" rtlCol="0" anchor="ctr"/>
           <a:lstStyle/>
           <a:p>
-            <a:pPr algn="ctr" indent="0" marL="0">
+            <a:pPr marL="0" indent="0" algn="ctr">
               <a:buNone/>
             </a:pPr>
             <a:r>
@@ -22030,6 +22935,13 @@
             <a:prstDash val="solid"/>
           </a:ln>
         </p:spPr>
+        <p:txBody>
+          <a:bodyPr/>
+          <a:lstStyle/>
+          <a:p>
+            <a:endParaRPr lang="en-US"/>
+          </a:p>
+        </p:txBody>
       </p:sp>
       <p:sp>
         <p:nvSpPr>
@@ -22052,7 +22964,7 @@
           <a:bodyPr wrap="square" lIns="0" tIns="0" rIns="0" bIns="0" rtlCol="0" anchor="ctr"/>
           <a:lstStyle/>
           <a:p>
-            <a:pPr indent="0" marL="0">
+            <a:pPr marL="0" indent="0">
               <a:buNone/>
             </a:pPr>
             <a:r>
@@ -22091,7 +23003,7 @@
           <a:bodyPr wrap="square" lIns="0" tIns="0" rIns="0" bIns="0" rtlCol="0" anchor="ctr"/>
           <a:lstStyle/>
           <a:p>
-            <a:pPr indent="0" marL="0">
+            <a:pPr marL="0" indent="0">
               <a:buNone/>
             </a:pPr>
             <a:r>
@@ -22130,7 +23042,7 @@
           <a:bodyPr wrap="square" lIns="0" tIns="0" rIns="0" bIns="0" rtlCol="0" anchor="ctr"/>
           <a:lstStyle/>
           <a:p>
-            <a:pPr indent="0" marL="0">
+            <a:pPr marL="0" indent="0">
               <a:buNone/>
             </a:pPr>
             <a:r>
@@ -22169,7 +23081,7 @@
           <a:bodyPr wrap="square" lIns="0" tIns="0" rIns="0" bIns="0" rtlCol="0" anchor="ctr"/>
           <a:lstStyle/>
           <a:p>
-            <a:pPr indent="0" marL="0">
+            <a:pPr marL="0" indent="0">
               <a:buNone/>
             </a:pPr>
             <a:r>
@@ -22488,4 +23400,319 @@
     </a:ext>
   </a:extLst>
 </a:theme>
+</file>
+
+<file path=ppt/theme/theme2.xml><?xml version="1.0" encoding="utf-8"?>
+<a:theme xmlns:a="http://schemas.openxmlformats.org/drawingml/2006/main" name="Office Theme">
+  <a:themeElements>
+    <a:clrScheme name="Office">
+      <a:dk1>
+        <a:sysClr val="windowText" lastClr="000000"/>
+      </a:dk1>
+      <a:lt1>
+        <a:sysClr val="window" lastClr="FFFFFF"/>
+      </a:lt1>
+      <a:dk2>
+        <a:srgbClr val="0E2841"/>
+      </a:dk2>
+      <a:lt2>
+        <a:srgbClr val="E8E8E8"/>
+      </a:lt2>
+      <a:accent1>
+        <a:srgbClr val="156082"/>
+      </a:accent1>
+      <a:accent2>
+        <a:srgbClr val="E97132"/>
+      </a:accent2>
+      <a:accent3>
+        <a:srgbClr val="196B24"/>
+      </a:accent3>
+      <a:accent4>
+        <a:srgbClr val="0F9ED5"/>
+      </a:accent4>
+      <a:accent5>
+        <a:srgbClr val="A02B93"/>
+      </a:accent5>
+      <a:accent6>
+        <a:srgbClr val="4EA72E"/>
+      </a:accent6>
+      <a:hlink>
+        <a:srgbClr val="467886"/>
+      </a:hlink>
+      <a:folHlink>
+        <a:srgbClr val="96607D"/>
+      </a:folHlink>
+    </a:clrScheme>
+    <a:fontScheme name="Office">
+      <a:majorFont>
+        <a:latin typeface="Aptos Display" panose="02110004020202020204"/>
+        <a:ea typeface=""/>
+        <a:cs typeface=""/>
+        <a:font script="Jpan" typeface="游ゴシック Light"/>
+        <a:font script="Hang" typeface="맑은 고딕"/>
+        <a:font script="Hans" typeface="等线 Light"/>
+        <a:font script="Hant" typeface="新細明體"/>
+        <a:font script="Arab" typeface="Times New Roman"/>
+        <a:font script="Hebr" typeface="Times New Roman"/>
+        <a:font script="Thai" typeface="Angsana New"/>
+        <a:font script="Ethi" typeface="Nyala"/>
+        <a:font script="Beng" typeface="Vrinda"/>
+        <a:font script="Gujr" typeface="Shruti"/>
+        <a:font script="Khmr" typeface="MoolBoran"/>
+        <a:font script="Knda" typeface="Tunga"/>
+        <a:font script="Guru" typeface="Raavi"/>
+        <a:font script="Cans" typeface="Euphemia"/>
+        <a:font script="Cher" typeface="Plantagenet Cherokee"/>
+        <a:font script="Yiii" typeface="Microsoft Yi Baiti"/>
+        <a:font script="Tibt" typeface="Microsoft Himalaya"/>
+        <a:font script="Thaa" typeface="MV Boli"/>
+        <a:font script="Deva" typeface="Mangal"/>
+        <a:font script="Telu" typeface="Gautami"/>
+        <a:font script="Taml" typeface="Latha"/>
+        <a:font script="Syrc" typeface="Estrangelo Edessa"/>
+        <a:font script="Orya" typeface="Kalinga"/>
+        <a:font script="Mlym" typeface="Kartika"/>
+        <a:font script="Laoo" typeface="DokChampa"/>
+        <a:font script="Sinh" typeface="Iskoola Pota"/>
+        <a:font script="Mong" typeface="Mongolian Baiti"/>
+        <a:font script="Viet" typeface="Times New Roman"/>
+        <a:font script="Uigh" typeface="Microsoft Uighur"/>
+        <a:font script="Geor" typeface="Sylfaen"/>
+        <a:font script="Armn" typeface="Arial"/>
+        <a:font script="Bugi" typeface="Leelawadee UI"/>
+        <a:font script="Bopo" typeface="Microsoft JhengHei"/>
+        <a:font script="Java" typeface="Javanese Text"/>
+        <a:font script="Lisu" typeface="Segoe UI"/>
+        <a:font script="Mymr" typeface="Myanmar Text"/>
+        <a:font script="Nkoo" typeface="Ebrima"/>
+        <a:font script="Olck" typeface="Nirmala UI"/>
+        <a:font script="Osma" typeface="Ebrima"/>
+        <a:font script="Phag" typeface="Phagspa"/>
+        <a:font script="Syrn" typeface="Estrangelo Edessa"/>
+        <a:font script="Syrj" typeface="Estrangelo Edessa"/>
+        <a:font script="Syre" typeface="Estrangelo Edessa"/>
+        <a:font script="Sora" typeface="Nirmala UI"/>
+        <a:font script="Tale" typeface="Microsoft Tai Le"/>
+        <a:font script="Talu" typeface="Microsoft New Tai Lue"/>
+        <a:font script="Tfng" typeface="Ebrima"/>
+      </a:majorFont>
+      <a:minorFont>
+        <a:latin typeface="Aptos" panose="02110004020202020204"/>
+        <a:ea typeface=""/>
+        <a:cs typeface=""/>
+        <a:font script="Jpan" typeface="游ゴシック"/>
+        <a:font script="Hang" typeface="맑은 고딕"/>
+        <a:font script="Hans" typeface="等线"/>
+        <a:font script="Hant" typeface="新細明體"/>
+        <a:font script="Arab" typeface="Arial"/>
+        <a:font script="Hebr" typeface="Arial"/>
+        <a:font script="Thai" typeface="Cordia New"/>
+        <a:font script="Ethi" typeface="Nyala"/>
+        <a:font script="Beng" typeface="Vrinda"/>
+        <a:font script="Gujr" typeface="Shruti"/>
+        <a:font script="Khmr" typeface="DaunPenh"/>
+        <a:font script="Knda" typeface="Tunga"/>
+        <a:font script="Guru" typeface="Raavi"/>
+        <a:font script="Cans" typeface="Euphemia"/>
+        <a:font script="Cher" typeface="Plantagenet Cherokee"/>
+        <a:font script="Yiii" typeface="Microsoft Yi Baiti"/>
+        <a:font script="Tibt" typeface="Microsoft Himalaya"/>
+        <a:font script="Thaa" typeface="MV Boli"/>
+        <a:font script="Deva" typeface="Mangal"/>
+        <a:font script="Telu" typeface="Gautami"/>
+        <a:font script="Taml" typeface="Latha"/>
+        <a:font script="Syrc" typeface="Estrangelo Edessa"/>
+        <a:font script="Orya" typeface="Kalinga"/>
+        <a:font script="Mlym" typeface="Kartika"/>
+        <a:font script="Laoo" typeface="DokChampa"/>
+        <a:font script="Sinh" typeface="Iskoola Pota"/>
+        <a:font script="Mong" typeface="Mongolian Baiti"/>
+        <a:font script="Viet" typeface="Arial"/>
+        <a:font script="Uigh" typeface="Microsoft Uighur"/>
+        <a:font script="Geor" typeface="Sylfaen"/>
+        <a:font script="Armn" typeface="Arial"/>
+        <a:font script="Bugi" typeface="Leelawadee UI"/>
+        <a:font script="Bopo" typeface="Microsoft JhengHei"/>
+        <a:font script="Java" typeface="Javanese Text"/>
+        <a:font script="Lisu" typeface="Segoe UI"/>
+        <a:font script="Mymr" typeface="Myanmar Text"/>
+        <a:font script="Nkoo" typeface="Ebrima"/>
+        <a:font script="Olck" typeface="Nirmala UI"/>
+        <a:font script="Osma" typeface="Ebrima"/>
+        <a:font script="Phag" typeface="Phagspa"/>
+        <a:font script="Syrn" typeface="Estrangelo Edessa"/>
+        <a:font script="Syrj" typeface="Estrangelo Edessa"/>
+        <a:font script="Syre" typeface="Estrangelo Edessa"/>
+        <a:font script="Sora" typeface="Nirmala UI"/>
+        <a:font script="Tale" typeface="Microsoft Tai Le"/>
+        <a:font script="Talu" typeface="Microsoft New Tai Lue"/>
+        <a:font script="Tfng" typeface="Ebrima"/>
+      </a:minorFont>
+    </a:fontScheme>
+    <a:fmtScheme name="Office">
+      <a:fillStyleLst>
+        <a:solidFill>
+          <a:schemeClr val="phClr"/>
+        </a:solidFill>
+        <a:gradFill rotWithShape="1">
+          <a:gsLst>
+            <a:gs pos="0">
+              <a:schemeClr val="phClr">
+                <a:lumMod val="110000"/>
+                <a:satMod val="105000"/>
+                <a:tint val="67000"/>
+              </a:schemeClr>
+            </a:gs>
+            <a:gs pos="50000">
+              <a:schemeClr val="phClr">
+                <a:lumMod val="105000"/>
+                <a:satMod val="103000"/>
+                <a:tint val="73000"/>
+              </a:schemeClr>
+            </a:gs>
+            <a:gs pos="100000">
+              <a:schemeClr val="phClr">
+                <a:lumMod val="105000"/>
+                <a:satMod val="109000"/>
+                <a:tint val="81000"/>
+              </a:schemeClr>
+            </a:gs>
+          </a:gsLst>
+          <a:lin ang="5400000" scaled="0"/>
+        </a:gradFill>
+        <a:gradFill rotWithShape="1">
+          <a:gsLst>
+            <a:gs pos="0">
+              <a:schemeClr val="phClr">
+                <a:satMod val="103000"/>
+                <a:lumMod val="102000"/>
+                <a:tint val="94000"/>
+              </a:schemeClr>
+            </a:gs>
+            <a:gs pos="50000">
+              <a:schemeClr val="phClr">
+                <a:satMod val="110000"/>
+                <a:lumMod val="100000"/>
+                <a:shade val="100000"/>
+              </a:schemeClr>
+            </a:gs>
+            <a:gs pos="100000">
+              <a:schemeClr val="phClr">
+                <a:lumMod val="99000"/>
+                <a:satMod val="120000"/>
+                <a:shade val="78000"/>
+              </a:schemeClr>
+            </a:gs>
+          </a:gsLst>
+          <a:lin ang="5400000" scaled="0"/>
+        </a:gradFill>
+      </a:fillStyleLst>
+      <a:lnStyleLst>
+        <a:ln w="12700" cap="flat" cmpd="sng" algn="ctr">
+          <a:solidFill>
+            <a:schemeClr val="phClr"/>
+          </a:solidFill>
+          <a:prstDash val="solid"/>
+          <a:miter lim="800000"/>
+        </a:ln>
+        <a:ln w="19050" cap="flat" cmpd="sng" algn="ctr">
+          <a:solidFill>
+            <a:schemeClr val="phClr"/>
+          </a:solidFill>
+          <a:prstDash val="solid"/>
+          <a:miter lim="800000"/>
+        </a:ln>
+        <a:ln w="25400" cap="flat" cmpd="sng" algn="ctr">
+          <a:solidFill>
+            <a:schemeClr val="phClr"/>
+          </a:solidFill>
+          <a:prstDash val="solid"/>
+          <a:miter lim="800000"/>
+        </a:ln>
+      </a:lnStyleLst>
+      <a:effectStyleLst>
+        <a:effectStyle>
+          <a:effectLst/>
+        </a:effectStyle>
+        <a:effectStyle>
+          <a:effectLst/>
+        </a:effectStyle>
+        <a:effectStyle>
+          <a:effectLst>
+            <a:outerShdw blurRad="57150" dist="19050" dir="5400000" algn="ctr" rotWithShape="0">
+              <a:srgbClr val="000000">
+                <a:alpha val="63000"/>
+              </a:srgbClr>
+            </a:outerShdw>
+          </a:effectLst>
+        </a:effectStyle>
+      </a:effectStyleLst>
+      <a:bgFillStyleLst>
+        <a:solidFill>
+          <a:schemeClr val="phClr"/>
+        </a:solidFill>
+        <a:solidFill>
+          <a:schemeClr val="phClr">
+            <a:tint val="95000"/>
+            <a:satMod val="170000"/>
+          </a:schemeClr>
+        </a:solidFill>
+        <a:gradFill rotWithShape="1">
+          <a:gsLst>
+            <a:gs pos="0">
+              <a:schemeClr val="phClr">
+                <a:tint val="93000"/>
+                <a:satMod val="150000"/>
+                <a:shade val="98000"/>
+                <a:lumMod val="102000"/>
+              </a:schemeClr>
+            </a:gs>
+            <a:gs pos="50000">
+              <a:schemeClr val="phClr">
+                <a:tint val="98000"/>
+                <a:satMod val="130000"/>
+                <a:shade val="90000"/>
+                <a:lumMod val="103000"/>
+              </a:schemeClr>
+            </a:gs>
+            <a:gs pos="100000">
+              <a:schemeClr val="phClr">
+                <a:shade val="63000"/>
+                <a:satMod val="120000"/>
+              </a:schemeClr>
+            </a:gs>
+          </a:gsLst>
+          <a:lin ang="5400000" scaled="0"/>
+        </a:gradFill>
+      </a:bgFillStyleLst>
+    </a:fmtScheme>
+  </a:themeElements>
+  <a:objectDefaults>
+    <a:lnDef>
+      <a:spPr/>
+      <a:bodyPr/>
+      <a:lstStyle/>
+      <a:style>
+        <a:lnRef idx="2">
+          <a:schemeClr val="accent1"/>
+        </a:lnRef>
+        <a:fillRef idx="0">
+          <a:schemeClr val="accent1"/>
+        </a:fillRef>
+        <a:effectRef idx="1">
+          <a:schemeClr val="accent1"/>
+        </a:effectRef>
+        <a:fontRef idx="minor">
+          <a:schemeClr val="tx1"/>
+        </a:fontRef>
+      </a:style>
+    </a:lnDef>
+  </a:objectDefaults>
+  <a:extraClrSchemeLst/>
+  <a:extLst>
+    <a:ext uri="{05A4C25C-085E-4340-85A3-A5531E510DB2}">
+      <thm15:themeFamily xmlns:thm15="http://schemas.microsoft.com/office/thememl/2012/main" name="Office Theme" id="{2E142A2C-CD16-42D6-873A-C26D2A0506FA}" vid="{1BDDFF52-6CD6-40A5-AB3C-68EB2F1E4D0A}"/>
+    </a:ext>
+  </a:extLst>
+</a:theme>
 </file>
--- a/proposal/pitchdeck_nickopus5.8.pptx
+++ b/proposal/pitchdeck_nickopus5.8.pptx
@@ -11636,7 +11636,7 @@
               <a:buNone/>
             </a:pPr>
             <a:r>
-              <a:rPr lang="en-US" sz="2300" b="1" dirty="0">
+              <a:rPr lang="en-US" sz="2300" b="1" dirty="0" err="1">
                 <a:solidFill>
                   <a:srgbClr val="FFFFFF"/>
                 </a:solidFill>
@@ -11644,7 +11644,18 @@
                 <a:ea typeface="Georgia" pitchFamily="34" charset="-122"/>
                 <a:cs typeface="Georgia" pitchFamily="34" charset="-120"/>
               </a:rPr>
-              <a:t>Transakt is the documentary credit rail for SMEs — </a:t>
+              <a:t>BlockMed</a:t>
+            </a:r>
+            <a:r>
+              <a:rPr lang="en-US" sz="2300" b="1" dirty="0">
+                <a:solidFill>
+                  <a:srgbClr val="FFFFFF"/>
+                </a:solidFill>
+                <a:latin typeface="Georgia" pitchFamily="34" charset="0"/>
+                <a:ea typeface="Georgia" pitchFamily="34" charset="-122"/>
+                <a:cs typeface="Georgia" pitchFamily="34" charset="-120"/>
+              </a:rPr>
+              <a:t> is the documentary credit rail for SMEs — </a:t>
             </a:r>
             <a:r>
               <a:rPr lang="en-US" sz="2300" b="1" dirty="0">
